--- a/final-deck/從碳客變捷客_決賽簡報_v6_精髓版.pptx
+++ b/final-deck/從碳客變捷客_決賽簡報_v6_精髓版.pptx
@@ -19,6 +19,7 @@
     <p:sldId id="267" r:id="rId19"/>
     <p:sldId id="268" r:id="rId20"/>
     <p:sldId id="269" r:id="rId21"/>
+    <p:sldId id="270" r:id="rId22"/>
   </p:sldIdLst>
   <p:sldSz cx="12191695" cy="6858000" type="screen4x3"/>
   <p:notesSz cx="6858000" cy="9144000"/>
@@ -655,7 +656,7 @@
           <a:lstStyle/>
           <a:p>
             <a:r>
-              <a:t>（35 秒）落地三步走，每一步北捷都可以喊停：第一步就是今天的原型；第二步試辦半年，選兩三個站實測導客；第三步接悠遊付擴大。團隊三人：Numbers Protocol 的可信資料、LINE Pay 的點數經濟實戰、市府的政策對接——正好對應這個提案的三個支柱。結尾一句話：從碳客變捷客，讓 207 萬人的每一趟通勤，都被看見、被回饋、被信任。謝謝評審。</a:t>
+              <a:t>（25 秒）落地策略是小步驗證，一站一站放大。第一步就是今天的原型，動線 3 分鐘可走完；第二步試辦半年，選 2 到 3 個示範站，驗收真實的開啟率、導客數和核銷率；第三步接入悠遊付生活圈擴大。每一步都有明確驗收點——北捷不必一次下注，用示範站的數字決定要不要放大。</a:t>
             </a:r>
           </a:p>
         </p:txBody>
@@ -725,7 +726,7 @@
           <a:lstStyle/>
           <a:p>
             <a:r>
-              <a:t>附錄頁，不在 7 分鐘內。財務或會計評審提問時使用。</a:t>
+              <a:t>（25 秒）這個提案需要三種能力，我們剛好湊齊：Numbers Protocol 的可信資料技術，負責每一筆減碳經得起查；LINE Pay 的點數經濟實戰，負責點數有地方賺、有地方花；市府的政策與合規經驗，負責健康政策串得上、審查過得了。結尾一句話：從碳客變捷客，讓 207 萬人的每一趟通勤，都被看見、被回饋、被信任。謝謝評審。</a:t>
             </a:r>
           </a:p>
         </p:txBody>
@@ -795,7 +796,7 @@
           <a:lstStyle/>
           <a:p>
             <a:r>
-              <a:t>附錄頁。評審想深入單一場景的資料邊界與成效指標時使用。</a:t>
+              <a:t>附錄頁，不在 7 分鐘內。財務或會計評審提問時使用。</a:t>
             </a:r>
           </a:p>
         </p:txBody>
@@ -821,6 +822,76 @@
 </file>
 
 <file path=ppt/notesSlides/notesSlide14.xml><?xml version="1.0" encoding="utf-8"?>
+<p:notes xmlns:a="http://schemas.openxmlformats.org/drawingml/2006/main" xmlns:p="http://schemas.openxmlformats.org/presentationml/2006/main" xmlns:r="http://schemas.openxmlformats.org/officeDocument/2006/relationships">
+  <p:cSld>
+    <p:spTree>
+      <p:nvGrpSpPr>
+        <p:cNvPr id="1" name=""/>
+        <p:cNvGrpSpPr/>
+        <p:nvPr/>
+      </p:nvGrpSpPr>
+      <p:grpSpPr>
+        <a:xfrm>
+          <a:off x="0" y="0"/>
+          <a:ext cx="0" cy="0"/>
+          <a:chOff x="0" y="0"/>
+          <a:chExt cx="0" cy="0"/>
+        </a:xfrm>
+      </p:grpSpPr>
+      <p:sp>
+        <p:nvSpPr>
+          <p:cNvPr id="2" name="Slide Image Placeholder 1"/>
+          <p:cNvSpPr>
+            <a:spLocks noGrp="1"/>
+          </p:cNvSpPr>
+          <p:nvPr>
+            <p:ph type="sldImg" idx="2"/>
+          </p:nvPr>
+        </p:nvSpPr>
+        <p:spPr/>
+      </p:sp>
+      <p:sp>
+        <p:nvSpPr>
+          <p:cNvPr id="3" name="Notes Placeholder 2"/>
+          <p:cNvSpPr>
+            <a:spLocks noGrp="1"/>
+          </p:cNvSpPr>
+          <p:nvPr>
+            <p:ph type="body" idx="3" sz="quarter"/>
+          </p:nvPr>
+        </p:nvSpPr>
+        <p:spPr/>
+        <p:txBody>
+          <a:bodyPr/>
+          <a:lstStyle/>
+          <a:p>
+            <a:r>
+              <a:t>附錄頁。評審想深入單一場景的資料邊界與成效指標時使用。</a:t>
+            </a:r>
+          </a:p>
+        </p:txBody>
+      </p:sp>
+      <p:sp>
+        <p:nvSpPr>
+          <p:cNvPr id="4" name="Slide Number Placeholder 3"/>
+          <p:cNvSpPr>
+            <a:spLocks noGrp="1"/>
+          </p:cNvSpPr>
+          <p:nvPr>
+            <p:ph type="sldNum" idx="5" sz="quarter"/>
+          </p:nvPr>
+        </p:nvSpPr>
+        <p:spPr/>
+      </p:sp>
+    </p:spTree>
+  </p:cSld>
+  <p:clrMapOvr>
+    <a:masterClrMapping/>
+  </p:clrMapOvr>
+</p:notes>
+</file>
+
+<file path=ppt/notesSlides/notesSlide15.xml><?xml version="1.0" encoding="utf-8"?>
 <p:notes xmlns:a="http://schemas.openxmlformats.org/drawingml/2006/main" xmlns:p="http://schemas.openxmlformats.org/presentationml/2006/main" xmlns:r="http://schemas.openxmlformats.org/officeDocument/2006/relationships">
   <p:cSld>
     <p:spTree>
@@ -6323,7 +6394,7 @@
                 <a:latin typeface="微軟正黑體"/>
                 <a:ea typeface="微軟正黑體"/>
               </a:rPr>
-              <a:t>怎麼落地？三步走，每一步都可以喊停</a:t>
+              <a:t>小步驗證，一站一站放大</a:t>
             </a:r>
           </a:p>
         </p:txBody>
@@ -6336,8 +6407,8 @@
         </p:nvSpPr>
         <p:spPr>
           <a:xfrm>
-            <a:off x="585216" y="1453896"/>
-            <a:ext cx="3520440" cy="1737360"/>
+            <a:off x="585216" y="1636776"/>
+            <a:ext cx="3520440" cy="3291840"/>
           </a:xfrm>
           <a:prstGeom prst="roundRect">
             <a:avLst>
@@ -6382,8 +6453,8 @@
         </p:nvSpPr>
         <p:spPr>
           <a:xfrm>
-            <a:off x="502920" y="1371600"/>
-            <a:ext cx="3520440" cy="1737360"/>
+            <a:off x="502920" y="1554480"/>
+            <a:ext cx="3520440" cy="3291840"/>
           </a:xfrm>
           <a:prstGeom prst="roundRect">
             <a:avLst>
@@ -6430,8 +6501,8 @@
         </p:nvSpPr>
         <p:spPr>
           <a:xfrm>
-            <a:off x="777240" y="1600200"/>
-            <a:ext cx="1965960" cy="475488"/>
+            <a:off x="777240" y="1828800"/>
+            <a:ext cx="2148840" cy="530352"/>
           </a:xfrm>
           <a:prstGeom prst="roundRect">
             <a:avLst>
@@ -6476,8 +6547,8 @@
         </p:nvSpPr>
         <p:spPr>
           <a:xfrm>
-            <a:off x="731520" y="1554480"/>
-            <a:ext cx="1965960" cy="475488"/>
+            <a:off x="731520" y="1783080"/>
+            <a:ext cx="2148840" cy="530352"/>
           </a:xfrm>
           <a:prstGeom prst="roundRect">
             <a:avLst>
@@ -6521,7 +6592,7 @@
               </a:spcAft>
             </a:pPr>
             <a:r>
-              <a:rPr sz="1300" b="1">
+              <a:rPr sz="1450" b="1">
                 <a:solidFill>
                   <a:srgbClr val="17231C"/>
                 </a:solidFill>
@@ -6541,8 +6612,8 @@
         </p:nvSpPr>
         <p:spPr>
           <a:xfrm>
-            <a:off x="758952" y="2148840"/>
-            <a:ext cx="3017520" cy="914400"/>
+            <a:off x="758952" y="2514600"/>
+            <a:ext cx="3017520" cy="1234440"/>
           </a:xfrm>
           <a:prstGeom prst="rect">
             <a:avLst/>
@@ -6557,14 +6628,14 @@
           <a:p>
             <a:pPr algn="l">
               <a:lnSpc>
-                <a:spcPct val="125000"/>
+                <a:spcPct val="130000"/>
               </a:lnSpc>
               <a:spcAft>
                 <a:spcPts val="400"/>
               </a:spcAft>
             </a:pPr>
             <a:r>
-              <a:rPr sz="1250" b="0">
+              <a:rPr sz="1300" b="0">
                 <a:solidFill>
                   <a:srgbClr val="17231C"/>
                 </a:solidFill>
@@ -6578,61 +6649,18 @@
       </p:sp>
       <p:sp>
         <p:nvSpPr>
-          <p:cNvPr id="10" name="TextBox 9"/>
-          <p:cNvSpPr txBox="1"/>
-          <p:nvPr/>
-        </p:nvSpPr>
-        <p:spPr>
-          <a:xfrm>
-            <a:off x="3995928" y="1920240"/>
-            <a:ext cx="411480" cy="731520"/>
-          </a:xfrm>
-          <a:prstGeom prst="rect">
-            <a:avLst/>
-          </a:prstGeom>
-          <a:noFill/>
-        </p:spPr>
-        <p:txBody>
-          <a:bodyPr wrap="square">
-            <a:spAutoFit/>
-          </a:bodyPr>
-          <a:lstStyle/>
-          <a:p>
-            <a:pPr algn="ctr">
-              <a:lnSpc>
-                <a:spcPct val="112000"/>
-              </a:lnSpc>
-              <a:spcAft>
-                <a:spcPts val="400"/>
-              </a:spcAft>
-            </a:pPr>
-            <a:r>
-              <a:rPr sz="1800" b="1">
-                <a:solidFill>
-                  <a:srgbClr val="17231C"/>
-                </a:solidFill>
-                <a:latin typeface="微軟正黑體"/>
-                <a:ea typeface="微軟正黑體"/>
-              </a:rPr>
-              <a:t>→</a:t>
-            </a:r>
-          </a:p>
-        </p:txBody>
-      </p:sp>
-      <p:sp>
-        <p:nvSpPr>
-          <p:cNvPr id="11" name="Rounded Rectangle 10"/>
+          <p:cNvPr id="10" name="Rounded Rectangle 9"/>
           <p:cNvSpPr/>
           <p:nvPr/>
         </p:nvSpPr>
         <p:spPr>
           <a:xfrm>
-            <a:off x="4407407" y="1453896"/>
-            <a:ext cx="3520440" cy="1737360"/>
+            <a:off x="777240" y="4023359"/>
+            <a:ext cx="3063240" cy="658368"/>
           </a:xfrm>
           <a:prstGeom prst="roundRect">
             <a:avLst>
-              <a:gd name="adj" fmla="val 12000"/>
+              <a:gd name="adj" fmla="val 15000"/>
             </a:avLst>
           </a:prstGeom>
           <a:solidFill>
@@ -6667,14 +6695,168 @@
       </p:sp>
       <p:sp>
         <p:nvSpPr>
-          <p:cNvPr id="12" name="Rounded Rectangle 11"/>
+          <p:cNvPr id="11" name="Rounded Rectangle 10"/>
           <p:cNvSpPr/>
           <p:nvPr/>
         </p:nvSpPr>
         <p:spPr>
           <a:xfrm>
-            <a:off x="4325112" y="1371600"/>
-            <a:ext cx="3520440" cy="1737360"/>
+            <a:off x="731520" y="3977639"/>
+            <a:ext cx="3063240" cy="658368"/>
+          </a:xfrm>
+          <a:prstGeom prst="roundRect">
+            <a:avLst>
+              <a:gd name="adj" fmla="val 15000"/>
+            </a:avLst>
+          </a:prstGeom>
+          <a:solidFill>
+            <a:srgbClr val="083C37"/>
+          </a:solidFill>
+          <a:ln w="22860">
+            <a:solidFill>
+              <a:srgbClr val="17231C"/>
+            </a:solidFill>
+          </a:ln>
+          <a:effectLst/>
+        </p:spPr>
+        <p:style>
+          <a:lnRef idx="1">
+            <a:schemeClr val="accent1"/>
+          </a:lnRef>
+          <a:fillRef idx="3">
+            <a:schemeClr val="accent1"/>
+          </a:fillRef>
+          <a:effectRef idx="2">
+            <a:schemeClr val="accent1"/>
+          </a:effectRef>
+          <a:fontRef idx="minor">
+            <a:schemeClr val="lt1"/>
+          </a:fontRef>
+        </p:style>
+        <p:txBody>
+          <a:bodyPr rtlCol="0" anchor="ctr" wrap="square"/>
+          <a:lstStyle/>
+          <a:p>
+            <a:pPr algn="l">
+              <a:lnSpc>
+                <a:spcPct val="115000"/>
+              </a:lnSpc>
+              <a:spcAft>
+                <a:spcPts val="0"/>
+              </a:spcAft>
+            </a:pPr>
+            <a:r>
+              <a:rPr sz="1050" b="1">
+                <a:solidFill>
+                  <a:srgbClr val="FFFFFF"/>
+                </a:solidFill>
+                <a:latin typeface="微軟正黑體"/>
+                <a:ea typeface="微軟正黑體"/>
+              </a:rPr>
+              <a:t>驗收點：動線 3 分鐘走完，可離線演示。</a:t>
+            </a:r>
+          </a:p>
+        </p:txBody>
+      </p:sp>
+      <p:sp>
+        <p:nvSpPr>
+          <p:cNvPr id="12" name="TextBox 11"/>
+          <p:cNvSpPr txBox="1"/>
+          <p:nvPr/>
+        </p:nvSpPr>
+        <p:spPr>
+          <a:xfrm>
+            <a:off x="3977639" y="2834640"/>
+            <a:ext cx="457200" cy="731520"/>
+          </a:xfrm>
+          <a:prstGeom prst="rect">
+            <a:avLst/>
+          </a:prstGeom>
+          <a:noFill/>
+        </p:spPr>
+        <p:txBody>
+          <a:bodyPr wrap="square">
+            <a:spAutoFit/>
+          </a:bodyPr>
+          <a:lstStyle/>
+          <a:p>
+            <a:pPr algn="ctr">
+              <a:lnSpc>
+                <a:spcPct val="112000"/>
+              </a:lnSpc>
+              <a:spcAft>
+                <a:spcPts val="400"/>
+              </a:spcAft>
+            </a:pPr>
+            <a:r>
+              <a:rPr sz="2000" b="1">
+                <a:solidFill>
+                  <a:srgbClr val="17231C"/>
+                </a:solidFill>
+                <a:latin typeface="微軟正黑體"/>
+                <a:ea typeface="微軟正黑體"/>
+              </a:rPr>
+              <a:t>→</a:t>
+            </a:r>
+          </a:p>
+        </p:txBody>
+      </p:sp>
+      <p:sp>
+        <p:nvSpPr>
+          <p:cNvPr id="13" name="Rounded Rectangle 12"/>
+          <p:cNvSpPr/>
+          <p:nvPr/>
+        </p:nvSpPr>
+        <p:spPr>
+          <a:xfrm>
+            <a:off x="4407407" y="1636776"/>
+            <a:ext cx="3520440" cy="3291840"/>
+          </a:xfrm>
+          <a:prstGeom prst="roundRect">
+            <a:avLst>
+              <a:gd name="adj" fmla="val 12000"/>
+            </a:avLst>
+          </a:prstGeom>
+          <a:solidFill>
+            <a:srgbClr val="17231C"/>
+          </a:solidFill>
+          <a:ln>
+            <a:noFill/>
+          </a:ln>
+          <a:effectLst/>
+        </p:spPr>
+        <p:style>
+          <a:lnRef idx="1">
+            <a:schemeClr val="accent1"/>
+          </a:lnRef>
+          <a:fillRef idx="3">
+            <a:schemeClr val="accent1"/>
+          </a:fillRef>
+          <a:effectRef idx="2">
+            <a:schemeClr val="accent1"/>
+          </a:effectRef>
+          <a:fontRef idx="minor">
+            <a:schemeClr val="lt1"/>
+          </a:fontRef>
+        </p:style>
+        <p:txBody>
+          <a:bodyPr rtlCol="0" anchor="ctr"/>
+          <a:lstStyle/>
+          <a:p>
+            <a:pPr algn="ctr"/>
+          </a:p>
+        </p:txBody>
+      </p:sp>
+      <p:sp>
+        <p:nvSpPr>
+          <p:cNvPr id="14" name="Rounded Rectangle 13"/>
+          <p:cNvSpPr/>
+          <p:nvPr/>
+        </p:nvSpPr>
+        <p:spPr>
+          <a:xfrm>
+            <a:off x="4325112" y="1554480"/>
+            <a:ext cx="3520440" cy="3291840"/>
           </a:xfrm>
           <a:prstGeom prst="roundRect">
             <a:avLst>
@@ -6715,14 +6897,14 @@
       </p:sp>
       <p:sp>
         <p:nvSpPr>
-          <p:cNvPr id="13" name="Rounded Rectangle 12"/>
+          <p:cNvPr id="15" name="Rounded Rectangle 14"/>
           <p:cNvSpPr/>
           <p:nvPr/>
         </p:nvSpPr>
         <p:spPr>
           <a:xfrm>
-            <a:off x="4599431" y="1600200"/>
-            <a:ext cx="1965960" cy="475488"/>
+            <a:off x="4599431" y="1828800"/>
+            <a:ext cx="2148840" cy="530352"/>
           </a:xfrm>
           <a:prstGeom prst="roundRect">
             <a:avLst>
@@ -6761,14 +6943,14 @@
       </p:sp>
       <p:sp>
         <p:nvSpPr>
-          <p:cNvPr id="14" name="Rounded Rectangle 13"/>
+          <p:cNvPr id="16" name="Rounded Rectangle 15"/>
           <p:cNvSpPr/>
           <p:nvPr/>
         </p:nvSpPr>
         <p:spPr>
           <a:xfrm>
-            <a:off x="4553712" y="1554480"/>
-            <a:ext cx="1965960" cy="475488"/>
+            <a:off x="4553712" y="1783080"/>
+            <a:ext cx="2148840" cy="530352"/>
           </a:xfrm>
           <a:prstGeom prst="roundRect">
             <a:avLst>
@@ -6812,7 +6994,7 @@
               </a:spcAft>
             </a:pPr>
             <a:r>
-              <a:rPr sz="1300" b="1">
+              <a:rPr sz="1450" b="1">
                 <a:solidFill>
                   <a:srgbClr val="17231C"/>
                 </a:solidFill>
@@ -6826,14 +7008,14 @@
       </p:sp>
       <p:sp>
         <p:nvSpPr>
-          <p:cNvPr id="15" name="TextBox 14"/>
+          <p:cNvPr id="17" name="TextBox 16"/>
           <p:cNvSpPr txBox="1"/>
           <p:nvPr/>
         </p:nvSpPr>
         <p:spPr>
           <a:xfrm>
-            <a:off x="4581144" y="2148840"/>
-            <a:ext cx="3017520" cy="914400"/>
+            <a:off x="4581144" y="2514600"/>
+            <a:ext cx="3017520" cy="1234440"/>
           </a:xfrm>
           <a:prstGeom prst="rect">
             <a:avLst/>
@@ -6848,82 +7030,39 @@
           <a:p>
             <a:pPr algn="l">
               <a:lnSpc>
-                <a:spcPct val="125000"/>
+                <a:spcPct val="130000"/>
               </a:lnSpc>
               <a:spcAft>
                 <a:spcPts val="400"/>
               </a:spcAft>
             </a:pPr>
             <a:r>
-              <a:rPr sz="1250" b="0">
+              <a:rPr sz="1300" b="0">
                 <a:solidFill>
                   <a:srgbClr val="17231C"/>
                 </a:solidFill>
                 <a:latin typeface="微軟正黑體"/>
                 <a:ea typeface="微軟正黑體"/>
               </a:rPr>
-              <a:t>選 2–3 個示範站點，串既有店家與市府健康政策，實測導客成效。</a:t>
-            </a:r>
-          </a:p>
-        </p:txBody>
-      </p:sp>
-      <p:sp>
-        <p:nvSpPr>
-          <p:cNvPr id="16" name="TextBox 15"/>
-          <p:cNvSpPr txBox="1"/>
-          <p:nvPr/>
-        </p:nvSpPr>
-        <p:spPr>
-          <a:xfrm>
-            <a:off x="7818119" y="1920240"/>
-            <a:ext cx="411480" cy="731520"/>
-          </a:xfrm>
-          <a:prstGeom prst="rect">
-            <a:avLst/>
-          </a:prstGeom>
-          <a:noFill/>
-        </p:spPr>
-        <p:txBody>
-          <a:bodyPr wrap="square">
-            <a:spAutoFit/>
-          </a:bodyPr>
-          <a:lstStyle/>
-          <a:p>
-            <a:pPr algn="ctr">
-              <a:lnSpc>
-                <a:spcPct val="112000"/>
-              </a:lnSpc>
-              <a:spcAft>
-                <a:spcPts val="400"/>
-              </a:spcAft>
-            </a:pPr>
-            <a:r>
-              <a:rPr sz="1800" b="1">
-                <a:solidFill>
-                  <a:srgbClr val="17231C"/>
-                </a:solidFill>
-                <a:latin typeface="微軟正黑體"/>
-                <a:ea typeface="微軟正黑體"/>
-              </a:rPr>
-              <a:t>→</a:t>
-            </a:r>
-          </a:p>
-        </p:txBody>
-      </p:sp>
-      <p:sp>
-        <p:nvSpPr>
-          <p:cNvPr id="17" name="Rounded Rectangle 16"/>
+              <a:t>選 2–3 個示範站點，串既有店家與市府健康政策，實測真實導客。</a:t>
+            </a:r>
+          </a:p>
+        </p:txBody>
+      </p:sp>
+      <p:sp>
+        <p:nvSpPr>
+          <p:cNvPr id="18" name="Rounded Rectangle 17"/>
           <p:cNvSpPr/>
           <p:nvPr/>
         </p:nvSpPr>
         <p:spPr>
           <a:xfrm>
-            <a:off x="8229600" y="1453896"/>
-            <a:ext cx="3520440" cy="1737360"/>
+            <a:off x="4599431" y="4023359"/>
+            <a:ext cx="3063240" cy="658368"/>
           </a:xfrm>
           <a:prstGeom prst="roundRect">
             <a:avLst>
-              <a:gd name="adj" fmla="val 12000"/>
+              <a:gd name="adj" fmla="val 15000"/>
             </a:avLst>
           </a:prstGeom>
           <a:solidFill>
@@ -6958,14 +7097,168 @@
       </p:sp>
       <p:sp>
         <p:nvSpPr>
-          <p:cNvPr id="18" name="Rounded Rectangle 17"/>
+          <p:cNvPr id="19" name="Rounded Rectangle 18"/>
           <p:cNvSpPr/>
           <p:nvPr/>
         </p:nvSpPr>
         <p:spPr>
           <a:xfrm>
-            <a:off x="8147304" y="1371600"/>
-            <a:ext cx="3520440" cy="1737360"/>
+            <a:off x="4553712" y="3977639"/>
+            <a:ext cx="3063240" cy="658368"/>
+          </a:xfrm>
+          <a:prstGeom prst="roundRect">
+            <a:avLst>
+              <a:gd name="adj" fmla="val 15000"/>
+            </a:avLst>
+          </a:prstGeom>
+          <a:solidFill>
+            <a:srgbClr val="083C37"/>
+          </a:solidFill>
+          <a:ln w="22860">
+            <a:solidFill>
+              <a:srgbClr val="17231C"/>
+            </a:solidFill>
+          </a:ln>
+          <a:effectLst/>
+        </p:spPr>
+        <p:style>
+          <a:lnRef idx="1">
+            <a:schemeClr val="accent1"/>
+          </a:lnRef>
+          <a:fillRef idx="3">
+            <a:schemeClr val="accent1"/>
+          </a:fillRef>
+          <a:effectRef idx="2">
+            <a:schemeClr val="accent1"/>
+          </a:effectRef>
+          <a:fontRef idx="minor">
+            <a:schemeClr val="lt1"/>
+          </a:fontRef>
+        </p:style>
+        <p:txBody>
+          <a:bodyPr rtlCol="0" anchor="ctr" wrap="square"/>
+          <a:lstStyle/>
+          <a:p>
+            <a:pPr algn="l">
+              <a:lnSpc>
+                <a:spcPct val="115000"/>
+              </a:lnSpc>
+              <a:spcAft>
+                <a:spcPts val="0"/>
+              </a:spcAft>
+            </a:pPr>
+            <a:r>
+              <a:rPr sz="1050" b="1">
+                <a:solidFill>
+                  <a:srgbClr val="FFFFFF"/>
+                </a:solidFill>
+                <a:latin typeface="微軟正黑體"/>
+                <a:ea typeface="微軟正黑體"/>
+              </a:rPr>
+              <a:t>驗收點：推播開啟率、到店導客數、券核銷率。</a:t>
+            </a:r>
+          </a:p>
+        </p:txBody>
+      </p:sp>
+      <p:sp>
+        <p:nvSpPr>
+          <p:cNvPr id="20" name="TextBox 19"/>
+          <p:cNvSpPr txBox="1"/>
+          <p:nvPr/>
+        </p:nvSpPr>
+        <p:spPr>
+          <a:xfrm>
+            <a:off x="7799831" y="2834640"/>
+            <a:ext cx="457200" cy="731520"/>
+          </a:xfrm>
+          <a:prstGeom prst="rect">
+            <a:avLst/>
+          </a:prstGeom>
+          <a:noFill/>
+        </p:spPr>
+        <p:txBody>
+          <a:bodyPr wrap="square">
+            <a:spAutoFit/>
+          </a:bodyPr>
+          <a:lstStyle/>
+          <a:p>
+            <a:pPr algn="ctr">
+              <a:lnSpc>
+                <a:spcPct val="112000"/>
+              </a:lnSpc>
+              <a:spcAft>
+                <a:spcPts val="400"/>
+              </a:spcAft>
+            </a:pPr>
+            <a:r>
+              <a:rPr sz="2000" b="1">
+                <a:solidFill>
+                  <a:srgbClr val="17231C"/>
+                </a:solidFill>
+                <a:latin typeface="微軟正黑體"/>
+                <a:ea typeface="微軟正黑體"/>
+              </a:rPr>
+              <a:t>→</a:t>
+            </a:r>
+          </a:p>
+        </p:txBody>
+      </p:sp>
+      <p:sp>
+        <p:nvSpPr>
+          <p:cNvPr id="21" name="Rounded Rectangle 20"/>
+          <p:cNvSpPr/>
+          <p:nvPr/>
+        </p:nvSpPr>
+        <p:spPr>
+          <a:xfrm>
+            <a:off x="8229600" y="1636776"/>
+            <a:ext cx="3520440" cy="3291840"/>
+          </a:xfrm>
+          <a:prstGeom prst="roundRect">
+            <a:avLst>
+              <a:gd name="adj" fmla="val 12000"/>
+            </a:avLst>
+          </a:prstGeom>
+          <a:solidFill>
+            <a:srgbClr val="17231C"/>
+          </a:solidFill>
+          <a:ln>
+            <a:noFill/>
+          </a:ln>
+          <a:effectLst/>
+        </p:spPr>
+        <p:style>
+          <a:lnRef idx="1">
+            <a:schemeClr val="accent1"/>
+          </a:lnRef>
+          <a:fillRef idx="3">
+            <a:schemeClr val="accent1"/>
+          </a:fillRef>
+          <a:effectRef idx="2">
+            <a:schemeClr val="accent1"/>
+          </a:effectRef>
+          <a:fontRef idx="minor">
+            <a:schemeClr val="lt1"/>
+          </a:fontRef>
+        </p:style>
+        <p:txBody>
+          <a:bodyPr rtlCol="0" anchor="ctr"/>
+          <a:lstStyle/>
+          <a:p>
+            <a:pPr algn="ctr"/>
+          </a:p>
+        </p:txBody>
+      </p:sp>
+      <p:sp>
+        <p:nvSpPr>
+          <p:cNvPr id="22" name="Rounded Rectangle 21"/>
+          <p:cNvSpPr/>
+          <p:nvPr/>
+        </p:nvSpPr>
+        <p:spPr>
+          <a:xfrm>
+            <a:off x="8147304" y="1554480"/>
+            <a:ext cx="3520440" cy="3291840"/>
           </a:xfrm>
           <a:prstGeom prst="roundRect">
             <a:avLst>
@@ -7006,14 +7299,14 @@
       </p:sp>
       <p:sp>
         <p:nvSpPr>
-          <p:cNvPr id="19" name="Rounded Rectangle 18"/>
+          <p:cNvPr id="23" name="Rounded Rectangle 22"/>
           <p:cNvSpPr/>
           <p:nvPr/>
         </p:nvSpPr>
         <p:spPr>
           <a:xfrm>
-            <a:off x="8421624" y="1600200"/>
-            <a:ext cx="1965960" cy="475488"/>
+            <a:off x="8421624" y="1828800"/>
+            <a:ext cx="2148840" cy="530352"/>
           </a:xfrm>
           <a:prstGeom prst="roundRect">
             <a:avLst>
@@ -7052,14 +7345,14 @@
       </p:sp>
       <p:sp>
         <p:nvSpPr>
-          <p:cNvPr id="20" name="Rounded Rectangle 19"/>
+          <p:cNvPr id="24" name="Rounded Rectangle 23"/>
           <p:cNvSpPr/>
           <p:nvPr/>
         </p:nvSpPr>
         <p:spPr>
           <a:xfrm>
-            <a:off x="8375904" y="1554480"/>
-            <a:ext cx="1965960" cy="475488"/>
+            <a:off x="8375904" y="1783080"/>
+            <a:ext cx="2148840" cy="530352"/>
           </a:xfrm>
           <a:prstGeom prst="roundRect">
             <a:avLst>
@@ -7103,7 +7396,7 @@
               </a:spcAft>
             </a:pPr>
             <a:r>
-              <a:rPr sz="1300" b="1">
+              <a:rPr sz="1450" b="1">
                 <a:solidFill>
                   <a:srgbClr val="17231C"/>
                 </a:solidFill>
@@ -7117,14 +7410,14 @@
       </p:sp>
       <p:sp>
         <p:nvSpPr>
-          <p:cNvPr id="21" name="TextBox 20"/>
+          <p:cNvPr id="25" name="TextBox 24"/>
           <p:cNvSpPr txBox="1"/>
           <p:nvPr/>
         </p:nvSpPr>
         <p:spPr>
           <a:xfrm>
-            <a:off x="8403336" y="2148840"/>
-            <a:ext cx="3017520" cy="914400"/>
+            <a:off x="8403336" y="2514600"/>
+            <a:ext cx="3017520" cy="1234440"/>
           </a:xfrm>
           <a:prstGeom prst="rect">
             <a:avLst/>
@@ -7139,14 +7432,14 @@
           <a:p>
             <a:pPr algn="l">
               <a:lnSpc>
-                <a:spcPct val="125000"/>
+                <a:spcPct val="130000"/>
               </a:lnSpc>
               <a:spcAft>
                 <a:spcPts val="400"/>
               </a:spcAft>
             </a:pPr>
             <a:r>
-              <a:rPr sz="1250" b="0">
+              <a:rPr sz="1300" b="0">
                 <a:solidFill>
                   <a:srgbClr val="17231C"/>
                 </a:solidFill>
@@ -7160,18 +7453,18 @@
       </p:sp>
       <p:sp>
         <p:nvSpPr>
-          <p:cNvPr id="22" name="Rounded Rectangle 21"/>
+          <p:cNvPr id="26" name="Rounded Rectangle 25"/>
           <p:cNvSpPr/>
           <p:nvPr/>
         </p:nvSpPr>
         <p:spPr>
           <a:xfrm>
-            <a:off x="585216" y="3465576"/>
-            <a:ext cx="3520440" cy="1600200"/>
+            <a:off x="8421624" y="4023359"/>
+            <a:ext cx="3063240" cy="658368"/>
           </a:xfrm>
           <a:prstGeom prst="roundRect">
             <a:avLst>
-              <a:gd name="adj" fmla="val 12000"/>
+              <a:gd name="adj" fmla="val 15000"/>
             </a:avLst>
           </a:prstGeom>
           <a:solidFill>
@@ -7206,14 +7499,79 @@
       </p:sp>
       <p:sp>
         <p:nvSpPr>
-          <p:cNvPr id="23" name="Rounded Rectangle 22"/>
+          <p:cNvPr id="27" name="Rounded Rectangle 26"/>
           <p:cNvSpPr/>
           <p:nvPr/>
         </p:nvSpPr>
         <p:spPr>
           <a:xfrm>
-            <a:off x="502920" y="3383280"/>
-            <a:ext cx="3520440" cy="1600200"/>
+            <a:off x="8375904" y="3977639"/>
+            <a:ext cx="3063240" cy="658368"/>
+          </a:xfrm>
+          <a:prstGeom prst="roundRect">
+            <a:avLst>
+              <a:gd name="adj" fmla="val 15000"/>
+            </a:avLst>
+          </a:prstGeom>
+          <a:solidFill>
+            <a:srgbClr val="083C37"/>
+          </a:solidFill>
+          <a:ln w="22860">
+            <a:solidFill>
+              <a:srgbClr val="17231C"/>
+            </a:solidFill>
+          </a:ln>
+          <a:effectLst/>
+        </p:spPr>
+        <p:style>
+          <a:lnRef idx="1">
+            <a:schemeClr val="accent1"/>
+          </a:lnRef>
+          <a:fillRef idx="3">
+            <a:schemeClr val="accent1"/>
+          </a:fillRef>
+          <a:effectRef idx="2">
+            <a:schemeClr val="accent1"/>
+          </a:effectRef>
+          <a:fontRef idx="minor">
+            <a:schemeClr val="lt1"/>
+          </a:fontRef>
+        </p:style>
+        <p:txBody>
+          <a:bodyPr rtlCol="0" anchor="ctr" wrap="square"/>
+          <a:lstStyle/>
+          <a:p>
+            <a:pPr algn="l">
+              <a:lnSpc>
+                <a:spcPct val="115000"/>
+              </a:lnSpc>
+              <a:spcAft>
+                <a:spcPts val="0"/>
+              </a:spcAft>
+            </a:pPr>
+            <a:r>
+              <a:rPr sz="1050" b="1">
+                <a:solidFill>
+                  <a:srgbClr val="FFFFFF"/>
+                </a:solidFill>
+                <a:latin typeface="微軟正黑體"/>
+                <a:ea typeface="微軟正黑體"/>
+              </a:rPr>
+              <a:t>驗收點：合作包續約率、非票務收入成長。</a:t>
+            </a:r>
+          </a:p>
+        </p:txBody>
+      </p:sp>
+      <p:sp>
+        <p:nvSpPr>
+          <p:cNvPr id="28" name="Rounded Rectangle 27"/>
+          <p:cNvSpPr/>
+          <p:nvPr/>
+        </p:nvSpPr>
+        <p:spPr>
+          <a:xfrm>
+            <a:off x="576072" y="5422392"/>
+            <a:ext cx="11155680" cy="868680"/>
           </a:xfrm>
           <a:prstGeom prst="roundRect">
             <a:avLst>
@@ -7221,7 +7579,53 @@
             </a:avLst>
           </a:prstGeom>
           <a:solidFill>
-            <a:srgbClr val="FFFDF2"/>
+            <a:srgbClr val="17231C"/>
+          </a:solidFill>
+          <a:ln>
+            <a:noFill/>
+          </a:ln>
+          <a:effectLst/>
+        </p:spPr>
+        <p:style>
+          <a:lnRef idx="1">
+            <a:schemeClr val="accent1"/>
+          </a:lnRef>
+          <a:fillRef idx="3">
+            <a:schemeClr val="accent1"/>
+          </a:fillRef>
+          <a:effectRef idx="2">
+            <a:schemeClr val="accent1"/>
+          </a:effectRef>
+          <a:fontRef idx="minor">
+            <a:schemeClr val="lt1"/>
+          </a:fontRef>
+        </p:style>
+        <p:txBody>
+          <a:bodyPr rtlCol="0" anchor="ctr"/>
+          <a:lstStyle/>
+          <a:p>
+            <a:pPr algn="ctr"/>
+          </a:p>
+        </p:txBody>
+      </p:sp>
+      <p:sp>
+        <p:nvSpPr>
+          <p:cNvPr id="29" name="Rounded Rectangle 28"/>
+          <p:cNvSpPr/>
+          <p:nvPr/>
+        </p:nvSpPr>
+        <p:spPr>
+          <a:xfrm>
+            <a:off x="502920" y="5349240"/>
+            <a:ext cx="11155680" cy="868680"/>
+          </a:xfrm>
+          <a:prstGeom prst="roundRect">
+            <a:avLst>
+              <a:gd name="adj" fmla="val 12000"/>
+            </a:avLst>
+          </a:prstGeom>
+          <a:solidFill>
+            <a:srgbClr val="FFD34D"/>
           </a:solidFill>
           <a:ln w="31750">
             <a:solidFill>
@@ -7245,23 +7649,40 @@
           </a:fontRef>
         </p:style>
         <p:txBody>
-          <a:bodyPr rtlCol="0" anchor="ctr"/>
-          <a:lstStyle/>
-          <a:p>
-            <a:pPr algn="ctr"/>
-          </a:p>
-        </p:txBody>
-      </p:sp>
-      <p:sp>
-        <p:nvSpPr>
-          <p:cNvPr id="24" name="TextBox 23"/>
+          <a:bodyPr rtlCol="0" anchor="ctr" wrap="square"/>
+          <a:lstStyle/>
+          <a:p>
+            <a:pPr algn="ctr">
+              <a:lnSpc>
+                <a:spcPct val="112000"/>
+              </a:lnSpc>
+              <a:spcAft>
+                <a:spcPts val="0"/>
+              </a:spcAft>
+            </a:pPr>
+            <a:r>
+              <a:rPr sz="1450" b="1">
+                <a:solidFill>
+                  <a:srgbClr val="17231C"/>
+                </a:solidFill>
+                <a:latin typeface="微軟正黑體"/>
+                <a:ea typeface="微軟正黑體"/>
+              </a:rPr>
+              <a:t>每一步都有明確驗收點——北捷不必一次下注，用示範站的真實數字決定要不要放大。</a:t>
+            </a:r>
+          </a:p>
+        </p:txBody>
+      </p:sp>
+      <p:sp>
+        <p:nvSpPr>
+          <p:cNvPr id="30" name="TextBox 29"/>
           <p:cNvSpPr txBox="1"/>
           <p:nvPr/>
         </p:nvSpPr>
         <p:spPr>
           <a:xfrm>
-            <a:off x="777240" y="3520440"/>
-            <a:ext cx="2926080" cy="457200"/>
+            <a:off x="502920" y="6473952"/>
+            <a:ext cx="8229600" cy="320040"/>
           </a:xfrm>
           <a:prstGeom prst="rect">
             <a:avLst/>
@@ -7283,949 +7704,13 @@
               </a:spcAft>
             </a:pPr>
             <a:r>
-              <a:rPr sz="1900" b="1">
-                <a:solidFill>
-                  <a:srgbClr val="17231C"/>
+              <a:rPr sz="900" b="0">
+                <a:solidFill>
+                  <a:srgbClr val="6E776F"/>
                 </a:solidFill>
                 <a:latin typeface="微軟正黑體"/>
                 <a:ea typeface="微軟正黑體"/>
               </a:rPr>
-              <a:t>嚴世紀</a:t>
-            </a:r>
-          </a:p>
-        </p:txBody>
-      </p:sp>
-      <p:sp>
-        <p:nvSpPr>
-          <p:cNvPr id="25" name="Rounded Rectangle 24"/>
-          <p:cNvSpPr/>
-          <p:nvPr/>
-        </p:nvSpPr>
-        <p:spPr>
-          <a:xfrm>
-            <a:off x="822960" y="4114800"/>
-            <a:ext cx="1965960" cy="457200"/>
-          </a:xfrm>
-          <a:prstGeom prst="roundRect">
-            <a:avLst>
-              <a:gd name="adj" fmla="val 50000"/>
-            </a:avLst>
-          </a:prstGeom>
-          <a:solidFill>
-            <a:srgbClr val="17231C"/>
-          </a:solidFill>
-          <a:ln>
-            <a:noFill/>
-          </a:ln>
-          <a:effectLst/>
-        </p:spPr>
-        <p:style>
-          <a:lnRef idx="1">
-            <a:schemeClr val="accent1"/>
-          </a:lnRef>
-          <a:fillRef idx="3">
-            <a:schemeClr val="accent1"/>
-          </a:fillRef>
-          <a:effectRef idx="2">
-            <a:schemeClr val="accent1"/>
-          </a:effectRef>
-          <a:fontRef idx="minor">
-            <a:schemeClr val="lt1"/>
-          </a:fontRef>
-        </p:style>
-        <p:txBody>
-          <a:bodyPr rtlCol="0" anchor="ctr"/>
-          <a:lstStyle/>
-          <a:p>
-            <a:pPr algn="ctr"/>
-          </a:p>
-        </p:txBody>
-      </p:sp>
-      <p:sp>
-        <p:nvSpPr>
-          <p:cNvPr id="26" name="Rounded Rectangle 25"/>
-          <p:cNvSpPr/>
-          <p:nvPr/>
-        </p:nvSpPr>
-        <p:spPr>
-          <a:xfrm>
-            <a:off x="777240" y="4069080"/>
-            <a:ext cx="1965960" cy="457200"/>
-          </a:xfrm>
-          <a:prstGeom prst="roundRect">
-            <a:avLst>
-              <a:gd name="adj" fmla="val 50000"/>
-            </a:avLst>
-          </a:prstGeom>
-          <a:solidFill>
-            <a:srgbClr val="0B7A75"/>
-          </a:solidFill>
-          <a:ln w="25400">
-            <a:solidFill>
-              <a:srgbClr val="17231C"/>
-            </a:solidFill>
-          </a:ln>
-          <a:effectLst/>
-        </p:spPr>
-        <p:style>
-          <a:lnRef idx="1">
-            <a:schemeClr val="accent1"/>
-          </a:lnRef>
-          <a:fillRef idx="3">
-            <a:schemeClr val="accent1"/>
-          </a:fillRef>
-          <a:effectRef idx="2">
-            <a:schemeClr val="accent1"/>
-          </a:effectRef>
-          <a:fontRef idx="minor">
-            <a:schemeClr val="lt1"/>
-          </a:fontRef>
-        </p:style>
-        <p:txBody>
-          <a:bodyPr rtlCol="0" anchor="ctr" lIns="45720" rIns="45720" tIns="18288" bIns="18288" wrap="square"/>
-          <a:lstStyle/>
-          <a:p>
-            <a:pPr algn="ctr">
-              <a:lnSpc>
-                <a:spcPct val="112000"/>
-              </a:lnSpc>
-              <a:spcAft>
-                <a:spcPts val="0"/>
-              </a:spcAft>
-            </a:pPr>
-            <a:r>
-              <a:rPr sz="1150" b="1">
-                <a:solidFill>
-                  <a:srgbClr val="FFFFFF"/>
-                </a:solidFill>
-                <a:latin typeface="微軟正黑體"/>
-                <a:ea typeface="微軟正黑體"/>
-              </a:rPr>
-              <a:t>Numbers Protocol</a:t>
-            </a:r>
-          </a:p>
-        </p:txBody>
-      </p:sp>
-      <p:sp>
-        <p:nvSpPr>
-          <p:cNvPr id="27" name="TextBox 26"/>
-          <p:cNvSpPr txBox="1"/>
-          <p:nvPr/>
-        </p:nvSpPr>
-        <p:spPr>
-          <a:xfrm>
-            <a:off x="2834639" y="4114800"/>
-            <a:ext cx="1188720" cy="457200"/>
-          </a:xfrm>
-          <a:prstGeom prst="rect">
-            <a:avLst/>
-          </a:prstGeom>
-          <a:noFill/>
-        </p:spPr>
-        <p:txBody>
-          <a:bodyPr wrap="square">
-            <a:spAutoFit/>
-          </a:bodyPr>
-          <a:lstStyle/>
-          <a:p>
-            <a:pPr algn="l">
-              <a:lnSpc>
-                <a:spcPct val="112000"/>
-              </a:lnSpc>
-              <a:spcAft>
-                <a:spcPts val="400"/>
-              </a:spcAft>
-            </a:pPr>
-            <a:r>
-              <a:rPr sz="1100" b="0">
-                <a:solidFill>
-                  <a:srgbClr val="6E776F"/>
-                </a:solidFill>
-                <a:latin typeface="微軟正黑體"/>
-                <a:ea typeface="微軟正黑體"/>
-              </a:rPr>
-              <a:t>可信資料架構</a:t>
-            </a:r>
-          </a:p>
-        </p:txBody>
-      </p:sp>
-      <p:sp>
-        <p:nvSpPr>
-          <p:cNvPr id="28" name="Rounded Rectangle 27"/>
-          <p:cNvSpPr/>
-          <p:nvPr/>
-        </p:nvSpPr>
-        <p:spPr>
-          <a:xfrm>
-            <a:off x="4407407" y="3465576"/>
-            <a:ext cx="3520440" cy="1600200"/>
-          </a:xfrm>
-          <a:prstGeom prst="roundRect">
-            <a:avLst>
-              <a:gd name="adj" fmla="val 12000"/>
-            </a:avLst>
-          </a:prstGeom>
-          <a:solidFill>
-            <a:srgbClr val="17231C"/>
-          </a:solidFill>
-          <a:ln>
-            <a:noFill/>
-          </a:ln>
-          <a:effectLst/>
-        </p:spPr>
-        <p:style>
-          <a:lnRef idx="1">
-            <a:schemeClr val="accent1"/>
-          </a:lnRef>
-          <a:fillRef idx="3">
-            <a:schemeClr val="accent1"/>
-          </a:fillRef>
-          <a:effectRef idx="2">
-            <a:schemeClr val="accent1"/>
-          </a:effectRef>
-          <a:fontRef idx="minor">
-            <a:schemeClr val="lt1"/>
-          </a:fontRef>
-        </p:style>
-        <p:txBody>
-          <a:bodyPr rtlCol="0" anchor="ctr"/>
-          <a:lstStyle/>
-          <a:p>
-            <a:pPr algn="ctr"/>
-          </a:p>
-        </p:txBody>
-      </p:sp>
-      <p:sp>
-        <p:nvSpPr>
-          <p:cNvPr id="29" name="Rounded Rectangle 28"/>
-          <p:cNvSpPr/>
-          <p:nvPr/>
-        </p:nvSpPr>
-        <p:spPr>
-          <a:xfrm>
-            <a:off x="4325112" y="3383280"/>
-            <a:ext cx="3520440" cy="1600200"/>
-          </a:xfrm>
-          <a:prstGeom prst="roundRect">
-            <a:avLst>
-              <a:gd name="adj" fmla="val 12000"/>
-            </a:avLst>
-          </a:prstGeom>
-          <a:solidFill>
-            <a:srgbClr val="FFFDF2"/>
-          </a:solidFill>
-          <a:ln w="31750">
-            <a:solidFill>
-              <a:srgbClr val="17231C"/>
-            </a:solidFill>
-          </a:ln>
-          <a:effectLst/>
-        </p:spPr>
-        <p:style>
-          <a:lnRef idx="1">
-            <a:schemeClr val="accent1"/>
-          </a:lnRef>
-          <a:fillRef idx="3">
-            <a:schemeClr val="accent1"/>
-          </a:fillRef>
-          <a:effectRef idx="2">
-            <a:schemeClr val="accent1"/>
-          </a:effectRef>
-          <a:fontRef idx="minor">
-            <a:schemeClr val="lt1"/>
-          </a:fontRef>
-        </p:style>
-        <p:txBody>
-          <a:bodyPr rtlCol="0" anchor="ctr"/>
-          <a:lstStyle/>
-          <a:p>
-            <a:pPr algn="ctr"/>
-          </a:p>
-        </p:txBody>
-      </p:sp>
-      <p:sp>
-        <p:nvSpPr>
-          <p:cNvPr id="30" name="TextBox 29"/>
-          <p:cNvSpPr txBox="1"/>
-          <p:nvPr/>
-        </p:nvSpPr>
-        <p:spPr>
-          <a:xfrm>
-            <a:off x="4599431" y="3520440"/>
-            <a:ext cx="2926080" cy="457200"/>
-          </a:xfrm>
-          <a:prstGeom prst="rect">
-            <a:avLst/>
-          </a:prstGeom>
-          <a:noFill/>
-        </p:spPr>
-        <p:txBody>
-          <a:bodyPr wrap="square">
-            <a:spAutoFit/>
-          </a:bodyPr>
-          <a:lstStyle/>
-          <a:p>
-            <a:pPr algn="l">
-              <a:lnSpc>
-                <a:spcPct val="112000"/>
-              </a:lnSpc>
-              <a:spcAft>
-                <a:spcPts val="400"/>
-              </a:spcAft>
-            </a:pPr>
-            <a:r>
-              <a:rPr sz="1900" b="1">
-                <a:solidFill>
-                  <a:srgbClr val="17231C"/>
-                </a:solidFill>
-                <a:latin typeface="微軟正黑體"/>
-                <a:ea typeface="微軟正黑體"/>
-              </a:rPr>
-              <a:t>鍾天傑</a:t>
-            </a:r>
-          </a:p>
-        </p:txBody>
-      </p:sp>
-      <p:sp>
-        <p:nvSpPr>
-          <p:cNvPr id="31" name="Rounded Rectangle 30"/>
-          <p:cNvSpPr/>
-          <p:nvPr/>
-        </p:nvSpPr>
-        <p:spPr>
-          <a:xfrm>
-            <a:off x="4645151" y="4114800"/>
-            <a:ext cx="1965960" cy="457200"/>
-          </a:xfrm>
-          <a:prstGeom prst="roundRect">
-            <a:avLst>
-              <a:gd name="adj" fmla="val 50000"/>
-            </a:avLst>
-          </a:prstGeom>
-          <a:solidFill>
-            <a:srgbClr val="17231C"/>
-          </a:solidFill>
-          <a:ln>
-            <a:noFill/>
-          </a:ln>
-          <a:effectLst/>
-        </p:spPr>
-        <p:style>
-          <a:lnRef idx="1">
-            <a:schemeClr val="accent1"/>
-          </a:lnRef>
-          <a:fillRef idx="3">
-            <a:schemeClr val="accent1"/>
-          </a:fillRef>
-          <a:effectRef idx="2">
-            <a:schemeClr val="accent1"/>
-          </a:effectRef>
-          <a:fontRef idx="minor">
-            <a:schemeClr val="lt1"/>
-          </a:fontRef>
-        </p:style>
-        <p:txBody>
-          <a:bodyPr rtlCol="0" anchor="ctr"/>
-          <a:lstStyle/>
-          <a:p>
-            <a:pPr algn="ctr"/>
-          </a:p>
-        </p:txBody>
-      </p:sp>
-      <p:sp>
-        <p:nvSpPr>
-          <p:cNvPr id="32" name="Rounded Rectangle 31"/>
-          <p:cNvSpPr/>
-          <p:nvPr/>
-        </p:nvSpPr>
-        <p:spPr>
-          <a:xfrm>
-            <a:off x="4599431" y="4069080"/>
-            <a:ext cx="1965960" cy="457200"/>
-          </a:xfrm>
-          <a:prstGeom prst="roundRect">
-            <a:avLst>
-              <a:gd name="adj" fmla="val 50000"/>
-            </a:avLst>
-          </a:prstGeom>
-          <a:solidFill>
-            <a:srgbClr val="F5A524"/>
-          </a:solidFill>
-          <a:ln w="25400">
-            <a:solidFill>
-              <a:srgbClr val="17231C"/>
-            </a:solidFill>
-          </a:ln>
-          <a:effectLst/>
-        </p:spPr>
-        <p:style>
-          <a:lnRef idx="1">
-            <a:schemeClr val="accent1"/>
-          </a:lnRef>
-          <a:fillRef idx="3">
-            <a:schemeClr val="accent1"/>
-          </a:fillRef>
-          <a:effectRef idx="2">
-            <a:schemeClr val="accent1"/>
-          </a:effectRef>
-          <a:fontRef idx="minor">
-            <a:schemeClr val="lt1"/>
-          </a:fontRef>
-        </p:style>
-        <p:txBody>
-          <a:bodyPr rtlCol="0" anchor="ctr" lIns="45720" rIns="45720" tIns="18288" bIns="18288" wrap="square"/>
-          <a:lstStyle/>
-          <a:p>
-            <a:pPr algn="ctr">
-              <a:lnSpc>
-                <a:spcPct val="112000"/>
-              </a:lnSpc>
-              <a:spcAft>
-                <a:spcPts val="0"/>
-              </a:spcAft>
-            </a:pPr>
-            <a:r>
-              <a:rPr sz="1150" b="1">
-                <a:solidFill>
-                  <a:srgbClr val="17231C"/>
-                </a:solidFill>
-                <a:latin typeface="微軟正黑體"/>
-                <a:ea typeface="微軟正黑體"/>
-              </a:rPr>
-              <a:t>LINE Pay</a:t>
-            </a:r>
-          </a:p>
-        </p:txBody>
-      </p:sp>
-      <p:sp>
-        <p:nvSpPr>
-          <p:cNvPr id="33" name="TextBox 32"/>
-          <p:cNvSpPr txBox="1"/>
-          <p:nvPr/>
-        </p:nvSpPr>
-        <p:spPr>
-          <a:xfrm>
-            <a:off x="6656831" y="4114800"/>
-            <a:ext cx="1188720" cy="457200"/>
-          </a:xfrm>
-          <a:prstGeom prst="rect">
-            <a:avLst/>
-          </a:prstGeom>
-          <a:noFill/>
-        </p:spPr>
-        <p:txBody>
-          <a:bodyPr wrap="square">
-            <a:spAutoFit/>
-          </a:bodyPr>
-          <a:lstStyle/>
-          <a:p>
-            <a:pPr algn="l">
-              <a:lnSpc>
-                <a:spcPct val="112000"/>
-              </a:lnSpc>
-              <a:spcAft>
-                <a:spcPts val="400"/>
-              </a:spcAft>
-            </a:pPr>
-            <a:r>
-              <a:rPr sz="1100" b="0">
-                <a:solidFill>
-                  <a:srgbClr val="6E776F"/>
-                </a:solidFill>
-                <a:latin typeface="微軟正黑體"/>
-                <a:ea typeface="微軟正黑體"/>
-              </a:rPr>
-              <a:t>點數經濟設計</a:t>
-            </a:r>
-          </a:p>
-        </p:txBody>
-      </p:sp>
-      <p:sp>
-        <p:nvSpPr>
-          <p:cNvPr id="34" name="Rounded Rectangle 33"/>
-          <p:cNvSpPr/>
-          <p:nvPr/>
-        </p:nvSpPr>
-        <p:spPr>
-          <a:xfrm>
-            <a:off x="8229600" y="3465576"/>
-            <a:ext cx="3520440" cy="1600200"/>
-          </a:xfrm>
-          <a:prstGeom prst="roundRect">
-            <a:avLst>
-              <a:gd name="adj" fmla="val 12000"/>
-            </a:avLst>
-          </a:prstGeom>
-          <a:solidFill>
-            <a:srgbClr val="17231C"/>
-          </a:solidFill>
-          <a:ln>
-            <a:noFill/>
-          </a:ln>
-          <a:effectLst/>
-        </p:spPr>
-        <p:style>
-          <a:lnRef idx="1">
-            <a:schemeClr val="accent1"/>
-          </a:lnRef>
-          <a:fillRef idx="3">
-            <a:schemeClr val="accent1"/>
-          </a:fillRef>
-          <a:effectRef idx="2">
-            <a:schemeClr val="accent1"/>
-          </a:effectRef>
-          <a:fontRef idx="minor">
-            <a:schemeClr val="lt1"/>
-          </a:fontRef>
-        </p:style>
-        <p:txBody>
-          <a:bodyPr rtlCol="0" anchor="ctr"/>
-          <a:lstStyle/>
-          <a:p>
-            <a:pPr algn="ctr"/>
-          </a:p>
-        </p:txBody>
-      </p:sp>
-      <p:sp>
-        <p:nvSpPr>
-          <p:cNvPr id="35" name="Rounded Rectangle 34"/>
-          <p:cNvSpPr/>
-          <p:nvPr/>
-        </p:nvSpPr>
-        <p:spPr>
-          <a:xfrm>
-            <a:off x="8147304" y="3383280"/>
-            <a:ext cx="3520440" cy="1600200"/>
-          </a:xfrm>
-          <a:prstGeom prst="roundRect">
-            <a:avLst>
-              <a:gd name="adj" fmla="val 12000"/>
-            </a:avLst>
-          </a:prstGeom>
-          <a:solidFill>
-            <a:srgbClr val="FFFDF2"/>
-          </a:solidFill>
-          <a:ln w="31750">
-            <a:solidFill>
-              <a:srgbClr val="17231C"/>
-            </a:solidFill>
-          </a:ln>
-          <a:effectLst/>
-        </p:spPr>
-        <p:style>
-          <a:lnRef idx="1">
-            <a:schemeClr val="accent1"/>
-          </a:lnRef>
-          <a:fillRef idx="3">
-            <a:schemeClr val="accent1"/>
-          </a:fillRef>
-          <a:effectRef idx="2">
-            <a:schemeClr val="accent1"/>
-          </a:effectRef>
-          <a:fontRef idx="minor">
-            <a:schemeClr val="lt1"/>
-          </a:fontRef>
-        </p:style>
-        <p:txBody>
-          <a:bodyPr rtlCol="0" anchor="ctr"/>
-          <a:lstStyle/>
-          <a:p>
-            <a:pPr algn="ctr"/>
-          </a:p>
-        </p:txBody>
-      </p:sp>
-      <p:sp>
-        <p:nvSpPr>
-          <p:cNvPr id="36" name="TextBox 35"/>
-          <p:cNvSpPr txBox="1"/>
-          <p:nvPr/>
-        </p:nvSpPr>
-        <p:spPr>
-          <a:xfrm>
-            <a:off x="8421624" y="3520440"/>
-            <a:ext cx="2926080" cy="457200"/>
-          </a:xfrm>
-          <a:prstGeom prst="rect">
-            <a:avLst/>
-          </a:prstGeom>
-          <a:noFill/>
-        </p:spPr>
-        <p:txBody>
-          <a:bodyPr wrap="square">
-            <a:spAutoFit/>
-          </a:bodyPr>
-          <a:lstStyle/>
-          <a:p>
-            <a:pPr algn="l">
-              <a:lnSpc>
-                <a:spcPct val="112000"/>
-              </a:lnSpc>
-              <a:spcAft>
-                <a:spcPts val="400"/>
-              </a:spcAft>
-            </a:pPr>
-            <a:r>
-              <a:rPr sz="1900" b="1">
-                <a:solidFill>
-                  <a:srgbClr val="17231C"/>
-                </a:solidFill>
-                <a:latin typeface="微軟正黑體"/>
-                <a:ea typeface="微軟正黑體"/>
-              </a:rPr>
-              <a:t>嚴世裕</a:t>
-            </a:r>
-          </a:p>
-        </p:txBody>
-      </p:sp>
-      <p:sp>
-        <p:nvSpPr>
-          <p:cNvPr id="37" name="Rounded Rectangle 36"/>
-          <p:cNvSpPr/>
-          <p:nvPr/>
-        </p:nvSpPr>
-        <p:spPr>
-          <a:xfrm>
-            <a:off x="8467344" y="4114800"/>
-            <a:ext cx="1965960" cy="457200"/>
-          </a:xfrm>
-          <a:prstGeom prst="roundRect">
-            <a:avLst>
-              <a:gd name="adj" fmla="val 50000"/>
-            </a:avLst>
-          </a:prstGeom>
-          <a:solidFill>
-            <a:srgbClr val="17231C"/>
-          </a:solidFill>
-          <a:ln>
-            <a:noFill/>
-          </a:ln>
-          <a:effectLst/>
-        </p:spPr>
-        <p:style>
-          <a:lnRef idx="1">
-            <a:schemeClr val="accent1"/>
-          </a:lnRef>
-          <a:fillRef idx="3">
-            <a:schemeClr val="accent1"/>
-          </a:fillRef>
-          <a:effectRef idx="2">
-            <a:schemeClr val="accent1"/>
-          </a:effectRef>
-          <a:fontRef idx="minor">
-            <a:schemeClr val="lt1"/>
-          </a:fontRef>
-        </p:style>
-        <p:txBody>
-          <a:bodyPr rtlCol="0" anchor="ctr"/>
-          <a:lstStyle/>
-          <a:p>
-            <a:pPr algn="ctr"/>
-          </a:p>
-        </p:txBody>
-      </p:sp>
-      <p:sp>
-        <p:nvSpPr>
-          <p:cNvPr id="38" name="Rounded Rectangle 37"/>
-          <p:cNvSpPr/>
-          <p:nvPr/>
-        </p:nvSpPr>
-        <p:spPr>
-          <a:xfrm>
-            <a:off x="8421624" y="4069080"/>
-            <a:ext cx="1965960" cy="457200"/>
-          </a:xfrm>
-          <a:prstGeom prst="roundRect">
-            <a:avLst>
-              <a:gd name="adj" fmla="val 50000"/>
-            </a:avLst>
-          </a:prstGeom>
-          <a:solidFill>
-            <a:srgbClr val="38B86F"/>
-          </a:solidFill>
-          <a:ln w="25400">
-            <a:solidFill>
-              <a:srgbClr val="17231C"/>
-            </a:solidFill>
-          </a:ln>
-          <a:effectLst/>
-        </p:spPr>
-        <p:style>
-          <a:lnRef idx="1">
-            <a:schemeClr val="accent1"/>
-          </a:lnRef>
-          <a:fillRef idx="3">
-            <a:schemeClr val="accent1"/>
-          </a:fillRef>
-          <a:effectRef idx="2">
-            <a:schemeClr val="accent1"/>
-          </a:effectRef>
-          <a:fontRef idx="minor">
-            <a:schemeClr val="lt1"/>
-          </a:fontRef>
-        </p:style>
-        <p:txBody>
-          <a:bodyPr rtlCol="0" anchor="ctr" lIns="45720" rIns="45720" tIns="18288" bIns="18288" wrap="square"/>
-          <a:lstStyle/>
-          <a:p>
-            <a:pPr algn="ctr">
-              <a:lnSpc>
-                <a:spcPct val="112000"/>
-              </a:lnSpc>
-              <a:spcAft>
-                <a:spcPts val="0"/>
-              </a:spcAft>
-            </a:pPr>
-            <a:r>
-              <a:rPr sz="1150" b="1">
-                <a:solidFill>
-                  <a:srgbClr val="FFFFFF"/>
-                </a:solidFill>
-                <a:latin typeface="微軟正黑體"/>
-                <a:ea typeface="微軟正黑體"/>
-              </a:rPr>
-              <a:t>北市府地政局</a:t>
-            </a:r>
-          </a:p>
-        </p:txBody>
-      </p:sp>
-      <p:sp>
-        <p:nvSpPr>
-          <p:cNvPr id="39" name="TextBox 38"/>
-          <p:cNvSpPr txBox="1"/>
-          <p:nvPr/>
-        </p:nvSpPr>
-        <p:spPr>
-          <a:xfrm>
-            <a:off x="10479024" y="4114800"/>
-            <a:ext cx="1188720" cy="457200"/>
-          </a:xfrm>
-          <a:prstGeom prst="rect">
-            <a:avLst/>
-          </a:prstGeom>
-          <a:noFill/>
-        </p:spPr>
-        <p:txBody>
-          <a:bodyPr wrap="square">
-            <a:spAutoFit/>
-          </a:bodyPr>
-          <a:lstStyle/>
-          <a:p>
-            <a:pPr algn="l">
-              <a:lnSpc>
-                <a:spcPct val="112000"/>
-              </a:lnSpc>
-              <a:spcAft>
-                <a:spcPts val="400"/>
-              </a:spcAft>
-            </a:pPr>
-            <a:r>
-              <a:rPr sz="1100" b="0">
-                <a:solidFill>
-                  <a:srgbClr val="6E776F"/>
-                </a:solidFill>
-                <a:latin typeface="微軟正黑體"/>
-                <a:ea typeface="微軟正黑體"/>
-              </a:rPr>
-              <a:t>市政政策對接</a:t>
-            </a:r>
-          </a:p>
-        </p:txBody>
-      </p:sp>
-      <p:sp>
-        <p:nvSpPr>
-          <p:cNvPr id="40" name="Rounded Rectangle 39"/>
-          <p:cNvSpPr/>
-          <p:nvPr/>
-        </p:nvSpPr>
-        <p:spPr>
-          <a:xfrm>
-            <a:off x="594360" y="5349240"/>
-            <a:ext cx="11155680" cy="1051560"/>
-          </a:xfrm>
-          <a:prstGeom prst="roundRect">
-            <a:avLst>
-              <a:gd name="adj" fmla="val 12000"/>
-            </a:avLst>
-          </a:prstGeom>
-          <a:solidFill>
-            <a:srgbClr val="17231C"/>
-          </a:solidFill>
-          <a:ln>
-            <a:noFill/>
-          </a:ln>
-          <a:effectLst/>
-        </p:spPr>
-        <p:style>
-          <a:lnRef idx="1">
-            <a:schemeClr val="accent1"/>
-          </a:lnRef>
-          <a:fillRef idx="3">
-            <a:schemeClr val="accent1"/>
-          </a:fillRef>
-          <a:effectRef idx="2">
-            <a:schemeClr val="accent1"/>
-          </a:effectRef>
-          <a:fontRef idx="minor">
-            <a:schemeClr val="lt1"/>
-          </a:fontRef>
-        </p:style>
-        <p:txBody>
-          <a:bodyPr rtlCol="0" anchor="ctr"/>
-          <a:lstStyle/>
-          <a:p>
-            <a:pPr algn="ctr"/>
-          </a:p>
-        </p:txBody>
-      </p:sp>
-      <p:sp>
-        <p:nvSpPr>
-          <p:cNvPr id="41" name="Rounded Rectangle 40"/>
-          <p:cNvSpPr/>
-          <p:nvPr/>
-        </p:nvSpPr>
-        <p:spPr>
-          <a:xfrm>
-            <a:off x="502920" y="5257800"/>
-            <a:ext cx="11155680" cy="1051560"/>
-          </a:xfrm>
-          <a:prstGeom prst="roundRect">
-            <a:avLst>
-              <a:gd name="adj" fmla="val 12000"/>
-            </a:avLst>
-          </a:prstGeom>
-          <a:solidFill>
-            <a:srgbClr val="0B7A75"/>
-          </a:solidFill>
-          <a:ln w="38100">
-            <a:solidFill>
-              <a:srgbClr val="17231C"/>
-            </a:solidFill>
-          </a:ln>
-          <a:effectLst/>
-        </p:spPr>
-        <p:style>
-          <a:lnRef idx="1">
-            <a:schemeClr val="accent1"/>
-          </a:lnRef>
-          <a:fillRef idx="3">
-            <a:schemeClr val="accent1"/>
-          </a:fillRef>
-          <a:effectRef idx="2">
-            <a:schemeClr val="accent1"/>
-          </a:effectRef>
-          <a:fontRef idx="minor">
-            <a:schemeClr val="lt1"/>
-          </a:fontRef>
-        </p:style>
-        <p:txBody>
-          <a:bodyPr rtlCol="0" anchor="ctr"/>
-          <a:lstStyle/>
-          <a:p>
-            <a:pPr algn="ctr"/>
-          </a:p>
-        </p:txBody>
-      </p:sp>
-      <p:sp>
-        <p:nvSpPr>
-          <p:cNvPr id="42" name="TextBox 41"/>
-          <p:cNvSpPr txBox="1"/>
-          <p:nvPr/>
-        </p:nvSpPr>
-        <p:spPr>
-          <a:xfrm>
-            <a:off x="868680" y="5413248"/>
-            <a:ext cx="10515600" cy="777240"/>
-          </a:xfrm>
-          <a:prstGeom prst="rect">
-            <a:avLst/>
-          </a:prstGeom>
-          <a:noFill/>
-        </p:spPr>
-        <p:txBody>
-          <a:bodyPr wrap="square">
-            <a:spAutoFit/>
-          </a:bodyPr>
-          <a:lstStyle/>
-          <a:p>
-            <a:pPr algn="l">
-              <a:lnSpc>
-                <a:spcPct val="112000"/>
-              </a:lnSpc>
-              <a:spcAft>
-                <a:spcPts val="300"/>
-              </a:spcAft>
-            </a:pPr>
-            <a:r>
-              <a:rPr sz="1650" b="1">
-                <a:solidFill>
-                  <a:srgbClr val="FFD34D"/>
-                </a:solidFill>
-                <a:latin typeface="微軟正黑體"/>
-                <a:ea typeface="微軟正黑體"/>
-              </a:rPr>
-              <a:t>從碳客變捷客：讓 207 萬人的每一趟通勤，都被看見、被回饋、被信任。</a:t>
-            </a:r>
-          </a:p>
-          <a:p>
-            <a:pPr algn="l">
-              <a:lnSpc>
-                <a:spcPct val="112000"/>
-              </a:lnSpc>
-              <a:spcAft>
-                <a:spcPts val="400"/>
-              </a:spcAft>
-            </a:pPr>
-            <a:r>
-              <a:rPr sz="1100" b="0">
-                <a:solidFill>
-                  <a:srgbClr val="C8F3DF"/>
-                </a:solidFill>
-                <a:latin typeface="微軟正黑體"/>
-                <a:ea typeface="微軟正黑體"/>
-              </a:rPr>
-              <a:t>誠實標註：碳係數採北捷座談分享之參考值（104/75/29 g/人km），正式導入時以北捷確認版本為準。</a:t>
-            </a:r>
-          </a:p>
-        </p:txBody>
-      </p:sp>
-      <p:sp>
-        <p:nvSpPr>
-          <p:cNvPr id="43" name="TextBox 42"/>
-          <p:cNvSpPr txBox="1"/>
-          <p:nvPr/>
-        </p:nvSpPr>
-        <p:spPr>
-          <a:xfrm>
-            <a:off x="502920" y="6473952"/>
-            <a:ext cx="8229600" cy="320040"/>
-          </a:xfrm>
-          <a:prstGeom prst="rect">
-            <a:avLst/>
-          </a:prstGeom>
-          <a:noFill/>
-        </p:spPr>
-        <p:txBody>
-          <a:bodyPr wrap="square">
-            <a:spAutoFit/>
-          </a:bodyPr>
-          <a:lstStyle/>
-          <a:p>
-            <a:pPr algn="l">
-              <a:lnSpc>
-                <a:spcPct val="112000"/>
-              </a:lnSpc>
-              <a:spcAft>
-                <a:spcPts val="400"/>
-              </a:spcAft>
-            </a:pPr>
-            <a:r>
-              <a:rPr sz="900" b="0">
-                <a:solidFill>
-                  <a:srgbClr val="6E776F"/>
-                </a:solidFill>
-                <a:latin typeface="微軟正黑體"/>
-                <a:ea typeface="微軟正黑體"/>
-              </a:rPr>
               <a:t>從碳客變捷客 · 2026 捷運盃黑客松決賽簡報 · 想領獎金的捷客</a:t>
             </a:r>
           </a:p>
@@ -8233,7 +7718,7 @@
       </p:sp>
       <p:sp>
         <p:nvSpPr>
-          <p:cNvPr id="44" name="TextBox 43"/>
+          <p:cNvPr id="31" name="TextBox 30"/>
           <p:cNvSpPr txBox="1"/>
           <p:nvPr/>
         </p:nvSpPr>
@@ -8288,7 +7773,7 @@
     <p:bg>
       <p:bgPr>
         <a:solidFill>
-          <a:srgbClr val="FFFDF2"/>
+          <a:srgbClr val="FFF7DF"/>
         </a:solidFill>
         <a:effectLst/>
       </p:bgPr>
@@ -8308,12 +7793,12 @@
         </p:nvSpPr>
         <p:spPr>
           <a:xfrm>
-            <a:off x="548640" y="457200"/>
-            <a:ext cx="2103120" cy="502920"/>
+            <a:off x="566928" y="448056"/>
+            <a:ext cx="566928" cy="566928"/>
           </a:xfrm>
           <a:prstGeom prst="roundRect">
             <a:avLst>
-              <a:gd name="adj" fmla="val 50000"/>
+              <a:gd name="adj" fmla="val 25000"/>
             </a:avLst>
           </a:prstGeom>
           <a:solidFill>
@@ -8354,8 +7839,253 @@
         </p:nvSpPr>
         <p:spPr>
           <a:xfrm>
-            <a:off x="502920" y="411480"/>
-            <a:ext cx="2103120" cy="502920"/>
+            <a:off x="502920" y="384048"/>
+            <a:ext cx="566928" cy="566928"/>
+          </a:xfrm>
+          <a:prstGeom prst="roundRect">
+            <a:avLst>
+              <a:gd name="adj" fmla="val 25000"/>
+            </a:avLst>
+          </a:prstGeom>
+          <a:solidFill>
+            <a:srgbClr val="FFD34D"/>
+          </a:solidFill>
+          <a:ln w="31750">
+            <a:solidFill>
+              <a:srgbClr val="17231C"/>
+            </a:solidFill>
+          </a:ln>
+          <a:effectLst/>
+        </p:spPr>
+        <p:style>
+          <a:lnRef idx="1">
+            <a:schemeClr val="accent1"/>
+          </a:lnRef>
+          <a:fillRef idx="3">
+            <a:schemeClr val="accent1"/>
+          </a:fillRef>
+          <a:effectRef idx="2">
+            <a:schemeClr val="accent1"/>
+          </a:effectRef>
+          <a:fontRef idx="minor">
+            <a:schemeClr val="lt1"/>
+          </a:fontRef>
+        </p:style>
+        <p:txBody>
+          <a:bodyPr rtlCol="0" anchor="ctr" wrap="square"/>
+          <a:lstStyle/>
+          <a:p>
+            <a:pPr algn="ctr">
+              <a:lnSpc>
+                <a:spcPct val="112000"/>
+              </a:lnSpc>
+              <a:spcAft>
+                <a:spcPts val="0"/>
+              </a:spcAft>
+            </a:pPr>
+            <a:r>
+              <a:rPr sz="2200" b="1">
+                <a:solidFill>
+                  <a:srgbClr val="17231C"/>
+                </a:solidFill>
+                <a:latin typeface="Arial Black"/>
+                <a:ea typeface="Arial Black"/>
+              </a:rPr>
+              <a:t>12</a:t>
+            </a:r>
+          </a:p>
+        </p:txBody>
+      </p:sp>
+      <p:sp>
+        <p:nvSpPr>
+          <p:cNvPr id="4" name="TextBox 3"/>
+          <p:cNvSpPr txBox="1"/>
+          <p:nvPr/>
+        </p:nvSpPr>
+        <p:spPr>
+          <a:xfrm>
+            <a:off x="1280160" y="384048"/>
+            <a:ext cx="8503920" cy="731520"/>
+          </a:xfrm>
+          <a:prstGeom prst="rect">
+            <a:avLst/>
+          </a:prstGeom>
+          <a:noFill/>
+        </p:spPr>
+        <p:txBody>
+          <a:bodyPr wrap="square">
+            <a:spAutoFit/>
+          </a:bodyPr>
+          <a:lstStyle/>
+          <a:p>
+            <a:pPr algn="l">
+              <a:lnSpc>
+                <a:spcPct val="112000"/>
+              </a:lnSpc>
+              <a:spcAft>
+                <a:spcPts val="400"/>
+              </a:spcAft>
+            </a:pPr>
+            <a:r>
+              <a:rPr sz="2600" b="1">
+                <a:solidFill>
+                  <a:srgbClr val="17231C"/>
+                </a:solidFill>
+                <a:latin typeface="微軟正黑體"/>
+                <a:ea typeface="微軟正黑體"/>
+              </a:rPr>
+              <a:t>私部門技術 × 點數實戰 × 公部門政策</a:t>
+            </a:r>
+          </a:p>
+        </p:txBody>
+      </p:sp>
+      <p:sp>
+        <p:nvSpPr>
+          <p:cNvPr id="5" name="Rounded Rectangle 4"/>
+          <p:cNvSpPr/>
+          <p:nvPr/>
+        </p:nvSpPr>
+        <p:spPr>
+          <a:xfrm>
+            <a:off x="585216" y="1636776"/>
+            <a:ext cx="3520440" cy="3017520"/>
+          </a:xfrm>
+          <a:prstGeom prst="roundRect">
+            <a:avLst>
+              <a:gd name="adj" fmla="val 12000"/>
+            </a:avLst>
+          </a:prstGeom>
+          <a:solidFill>
+            <a:srgbClr val="17231C"/>
+          </a:solidFill>
+          <a:ln>
+            <a:noFill/>
+          </a:ln>
+          <a:effectLst/>
+        </p:spPr>
+        <p:style>
+          <a:lnRef idx="1">
+            <a:schemeClr val="accent1"/>
+          </a:lnRef>
+          <a:fillRef idx="3">
+            <a:schemeClr val="accent1"/>
+          </a:fillRef>
+          <a:effectRef idx="2">
+            <a:schemeClr val="accent1"/>
+          </a:effectRef>
+          <a:fontRef idx="minor">
+            <a:schemeClr val="lt1"/>
+          </a:fontRef>
+        </p:style>
+        <p:txBody>
+          <a:bodyPr rtlCol="0" anchor="ctr"/>
+          <a:lstStyle/>
+          <a:p>
+            <a:pPr algn="ctr"/>
+          </a:p>
+        </p:txBody>
+      </p:sp>
+      <p:sp>
+        <p:nvSpPr>
+          <p:cNvPr id="6" name="Rounded Rectangle 5"/>
+          <p:cNvSpPr/>
+          <p:nvPr/>
+        </p:nvSpPr>
+        <p:spPr>
+          <a:xfrm>
+            <a:off x="502920" y="1554480"/>
+            <a:ext cx="3520440" cy="3017520"/>
+          </a:xfrm>
+          <a:prstGeom prst="roundRect">
+            <a:avLst>
+              <a:gd name="adj" fmla="val 12000"/>
+            </a:avLst>
+          </a:prstGeom>
+          <a:solidFill>
+            <a:srgbClr val="FFFDF2"/>
+          </a:solidFill>
+          <a:ln w="31750">
+            <a:solidFill>
+              <a:srgbClr val="17231C"/>
+            </a:solidFill>
+          </a:ln>
+          <a:effectLst/>
+        </p:spPr>
+        <p:style>
+          <a:lnRef idx="1">
+            <a:schemeClr val="accent1"/>
+          </a:lnRef>
+          <a:fillRef idx="3">
+            <a:schemeClr val="accent1"/>
+          </a:fillRef>
+          <a:effectRef idx="2">
+            <a:schemeClr val="accent1"/>
+          </a:effectRef>
+          <a:fontRef idx="minor">
+            <a:schemeClr val="lt1"/>
+          </a:fontRef>
+        </p:style>
+        <p:txBody>
+          <a:bodyPr rtlCol="0" anchor="ctr"/>
+          <a:lstStyle/>
+          <a:p>
+            <a:pPr algn="ctr"/>
+          </a:p>
+        </p:txBody>
+      </p:sp>
+      <p:sp>
+        <p:nvSpPr>
+          <p:cNvPr id="7" name="TextBox 6"/>
+          <p:cNvSpPr txBox="1"/>
+          <p:nvPr/>
+        </p:nvSpPr>
+        <p:spPr>
+          <a:xfrm>
+            <a:off x="777240" y="1783080"/>
+            <a:ext cx="2926080" cy="548640"/>
+          </a:xfrm>
+          <a:prstGeom prst="rect">
+            <a:avLst/>
+          </a:prstGeom>
+          <a:noFill/>
+        </p:spPr>
+        <p:txBody>
+          <a:bodyPr wrap="square">
+            <a:spAutoFit/>
+          </a:bodyPr>
+          <a:lstStyle/>
+          <a:p>
+            <a:pPr algn="l">
+              <a:lnSpc>
+                <a:spcPct val="112000"/>
+              </a:lnSpc>
+              <a:spcAft>
+                <a:spcPts val="400"/>
+              </a:spcAft>
+            </a:pPr>
+            <a:r>
+              <a:rPr sz="2400" b="1">
+                <a:solidFill>
+                  <a:srgbClr val="17231C"/>
+                </a:solidFill>
+                <a:latin typeface="微軟正黑體"/>
+                <a:ea typeface="微軟正黑體"/>
+              </a:rPr>
+              <a:t>嚴世紀</a:t>
+            </a:r>
+          </a:p>
+        </p:txBody>
+      </p:sp>
+      <p:sp>
+        <p:nvSpPr>
+          <p:cNvPr id="8" name="Rounded Rectangle 7"/>
+          <p:cNvSpPr/>
+          <p:nvPr/>
+        </p:nvSpPr>
+        <p:spPr>
+          <a:xfrm>
+            <a:off x="822960" y="2560320"/>
+            <a:ext cx="2377440" cy="502920"/>
           </a:xfrm>
           <a:prstGeom prst="roundRect">
             <a:avLst>
@@ -8363,7 +8093,53 @@
             </a:avLst>
           </a:prstGeom>
           <a:solidFill>
-            <a:srgbClr val="083C37"/>
+            <a:srgbClr val="17231C"/>
+          </a:solidFill>
+          <a:ln>
+            <a:noFill/>
+          </a:ln>
+          <a:effectLst/>
+        </p:spPr>
+        <p:style>
+          <a:lnRef idx="1">
+            <a:schemeClr val="accent1"/>
+          </a:lnRef>
+          <a:fillRef idx="3">
+            <a:schemeClr val="accent1"/>
+          </a:fillRef>
+          <a:effectRef idx="2">
+            <a:schemeClr val="accent1"/>
+          </a:effectRef>
+          <a:fontRef idx="minor">
+            <a:schemeClr val="lt1"/>
+          </a:fontRef>
+        </p:style>
+        <p:txBody>
+          <a:bodyPr rtlCol="0" anchor="ctr"/>
+          <a:lstStyle/>
+          <a:p>
+            <a:pPr algn="ctr"/>
+          </a:p>
+        </p:txBody>
+      </p:sp>
+      <p:sp>
+        <p:nvSpPr>
+          <p:cNvPr id="9" name="Rounded Rectangle 8"/>
+          <p:cNvSpPr/>
+          <p:nvPr/>
+        </p:nvSpPr>
+        <p:spPr>
+          <a:xfrm>
+            <a:off x="777240" y="2514600"/>
+            <a:ext cx="2377440" cy="502920"/>
+          </a:xfrm>
+          <a:prstGeom prst="roundRect">
+            <a:avLst>
+              <a:gd name="adj" fmla="val 50000"/>
+            </a:avLst>
+          </a:prstGeom>
+          <a:solidFill>
+            <a:srgbClr val="0B7A75"/>
           </a:solidFill>
           <a:ln w="25400">
             <a:solidFill>
@@ -8399,28 +8175,28 @@
               </a:spcAft>
             </a:pPr>
             <a:r>
-              <a:rPr sz="1300" b="1">
+              <a:rPr sz="1250" b="1">
                 <a:solidFill>
                   <a:srgbClr val="FFFFFF"/>
                 </a:solidFill>
                 <a:latin typeface="微軟正黑體"/>
                 <a:ea typeface="微軟正黑體"/>
               </a:rPr>
-              <a:t>附錄 A1 · 備詢用</a:t>
-            </a:r>
-          </a:p>
-        </p:txBody>
-      </p:sp>
-      <p:sp>
-        <p:nvSpPr>
-          <p:cNvPr id="4" name="TextBox 3"/>
+              <a:t>Numbers Protocol</a:t>
+            </a:r>
+          </a:p>
+        </p:txBody>
+      </p:sp>
+      <p:sp>
+        <p:nvSpPr>
+          <p:cNvPr id="10" name="TextBox 9"/>
           <p:cNvSpPr txBox="1"/>
           <p:nvPr/>
         </p:nvSpPr>
         <p:spPr>
           <a:xfrm>
-            <a:off x="2743200" y="411480"/>
-            <a:ext cx="8229600" cy="548640"/>
+            <a:off x="777240" y="3246120"/>
+            <a:ext cx="2971800" cy="1188720"/>
           </a:xfrm>
           <a:prstGeom prst="rect">
             <a:avLst/>
@@ -8435,35 +8211,35 @@
           <a:p>
             <a:pPr algn="l">
               <a:lnSpc>
-                <a:spcPct val="112000"/>
+                <a:spcPct val="135000"/>
               </a:lnSpc>
               <a:spcAft>
                 <a:spcPts val="400"/>
               </a:spcAft>
             </a:pPr>
             <a:r>
-              <a:rPr sz="2200" b="1">
+              <a:rPr sz="1250" b="0">
                 <a:solidFill>
                   <a:srgbClr val="17231C"/>
                 </a:solidFill>
                 <a:latin typeface="微軟正黑體"/>
                 <a:ea typeface="微軟正黑體"/>
               </a:rPr>
-              <a:t>財務細目與點數會計（IFRS 15）</a:t>
-            </a:r>
-          </a:p>
-        </p:txBody>
-      </p:sp>
-      <p:sp>
-        <p:nvSpPr>
-          <p:cNvPr id="5" name="Rounded Rectangle 4"/>
+              <a:t>專案總指揮。可信資料架構與存證機制——負責「每一筆減碳都經得起查」。</a:t>
+            </a:r>
+          </a:p>
+        </p:txBody>
+      </p:sp>
+      <p:sp>
+        <p:nvSpPr>
+          <p:cNvPr id="11" name="Rounded Rectangle 10"/>
           <p:cNvSpPr/>
           <p:nvPr/>
         </p:nvSpPr>
         <p:spPr>
           <a:xfrm>
-            <a:off x="576072" y="1353312"/>
-            <a:ext cx="5486400" cy="4937760"/>
+            <a:off x="4407407" y="1636776"/>
+            <a:ext cx="3520440" cy="3017520"/>
           </a:xfrm>
           <a:prstGeom prst="roundRect">
             <a:avLst>
@@ -8502,14 +8278,14 @@
       </p:sp>
       <p:sp>
         <p:nvSpPr>
-          <p:cNvPr id="6" name="Rounded Rectangle 5"/>
+          <p:cNvPr id="12" name="Rounded Rectangle 11"/>
           <p:cNvSpPr/>
           <p:nvPr/>
         </p:nvSpPr>
         <p:spPr>
           <a:xfrm>
-            <a:off x="502920" y="1280160"/>
-            <a:ext cx="5486400" cy="4937760"/>
+            <a:off x="4325112" y="1554480"/>
+            <a:ext cx="3520440" cy="3017520"/>
           </a:xfrm>
           <a:prstGeom prst="roundRect">
             <a:avLst>
@@ -8517,7 +8293,7 @@
             </a:avLst>
           </a:prstGeom>
           <a:solidFill>
-            <a:srgbClr val="FFF7DF"/>
+            <a:srgbClr val="FFFDF2"/>
           </a:solidFill>
           <a:ln w="31750">
             <a:solidFill>
@@ -8550,14 +8326,14 @@
       </p:sp>
       <p:sp>
         <p:nvSpPr>
-          <p:cNvPr id="7" name="TextBox 6"/>
+          <p:cNvPr id="13" name="TextBox 12"/>
           <p:cNvSpPr txBox="1"/>
           <p:nvPr/>
         </p:nvSpPr>
         <p:spPr>
           <a:xfrm>
-            <a:off x="822960" y="1508760"/>
-            <a:ext cx="4846320" cy="4572000"/>
+            <a:off x="4599431" y="1783080"/>
+            <a:ext cx="2926080" cy="548640"/>
           </a:xfrm>
           <a:prstGeom prst="rect">
             <a:avLst/>
@@ -8575,196 +8351,36 @@
                 <a:spcPct val="112000"/>
               </a:lnSpc>
               <a:spcAft>
-                <a:spcPts val="500"/>
-              </a:spcAft>
-            </a:pPr>
-            <a:r>
-              <a:rPr sz="1450" b="1">
-                <a:solidFill>
-                  <a:srgbClr val="0B7A75"/>
+                <a:spcPts val="400"/>
+              </a:spcAft>
+            </a:pPr>
+            <a:r>
+              <a:rPr sz="2400" b="1">
+                <a:solidFill>
+                  <a:srgbClr val="17231C"/>
                 </a:solidFill>
                 <a:latin typeface="微軟正黑體"/>
                 <a:ea typeface="微軟正黑體"/>
               </a:rPr>
-              <a:t>收入（首年試算 NT$ 2,270 萬）</a:t>
-            </a:r>
-          </a:p>
-          <a:p>
-            <a:pPr algn="l">
-              <a:lnSpc>
-                <a:spcPct val="112000"/>
-              </a:lnSpc>
-              <a:spcAft>
-                <a:spcPts val="300"/>
-              </a:spcAft>
-            </a:pPr>
-            <a:r>
-              <a:rPr sz="1200" b="0">
-                <a:solidFill>
-                  <a:srgbClr val="17231C"/>
-                </a:solidFill>
-                <a:latin typeface="微軟正黑體"/>
-                <a:ea typeface="微軟正黑體"/>
-              </a:rPr>
-              <a:t>· 站點健康共享合作包：20 包/月 × 5 萬 × 12 = 1,200 萬</a:t>
-            </a:r>
-          </a:p>
-          <a:p>
-            <a:pPr algn="l">
-              <a:lnSpc>
-                <a:spcPct val="112000"/>
-              </a:lnSpc>
-              <a:spcAft>
-                <a:spcPts val="300"/>
-              </a:spcAft>
-            </a:pPr>
-            <a:r>
-              <a:rPr sz="1200" b="0">
-                <a:solidFill>
-                  <a:srgbClr val="17231C"/>
-                </a:solidFill>
-                <a:latin typeface="微軟正黑體"/>
-                <a:ea typeface="微軟正黑體"/>
-              </a:rPr>
-              <a:t>· 任務回饋池合作金流：37,500 次/月 × 5 點 × 1.2 元 × 12 = 270 萬</a:t>
-            </a:r>
-          </a:p>
-          <a:p>
-            <a:pPr algn="l">
-              <a:lnSpc>
-                <a:spcPct val="112000"/>
-              </a:lnSpc>
-              <a:spcAft>
-                <a:spcPts val="300"/>
-              </a:spcAft>
-            </a:pPr>
-            <a:r>
-              <a:rPr sz="1200" b="0">
-                <a:solidFill>
-                  <a:srgbClr val="17231C"/>
-                </a:solidFill>
-                <a:latin typeface="微軟正黑體"/>
-                <a:ea typeface="微軟正黑體"/>
-              </a:rPr>
-              <a:t>· ESG／健康品牌共創：2 案 × 250 萬 = 500 萬</a:t>
-            </a:r>
-          </a:p>
-          <a:p>
-            <a:pPr algn="l">
-              <a:lnSpc>
-                <a:spcPct val="112000"/>
-              </a:lnSpc>
-              <a:spcAft>
-                <a:spcPts val="800"/>
-              </a:spcAft>
-            </a:pPr>
-            <a:r>
-              <a:rPr sz="1200" b="0">
-                <a:solidFill>
-                  <a:srgbClr val="17231C"/>
-                </a:solidFill>
-                <a:latin typeface="微軟正黑體"/>
-                <a:ea typeface="微軟正黑體"/>
-              </a:rPr>
-              <a:t>· App / Go!Map / 租賃加值版位：300 萬</a:t>
-            </a:r>
-          </a:p>
-          <a:p>
-            <a:pPr algn="l">
-              <a:lnSpc>
-                <a:spcPct val="112000"/>
-              </a:lnSpc>
-              <a:spcAft>
-                <a:spcPts val="500"/>
-              </a:spcAft>
-            </a:pPr>
-            <a:r>
-              <a:rPr sz="1450" b="1">
-                <a:solidFill>
-                  <a:srgbClr val="F5A524"/>
-                </a:solidFill>
-                <a:latin typeface="微軟正黑體"/>
-                <a:ea typeface="微軟正黑體"/>
-              </a:rPr>
-              <a:t>支出（首年試算 NT$ 1,525 萬）</a:t>
-            </a:r>
-          </a:p>
-          <a:p>
-            <a:pPr algn="l">
-              <a:lnSpc>
-                <a:spcPct val="112000"/>
-              </a:lnSpc>
-              <a:spcAft>
-                <a:spcPts val="300"/>
-              </a:spcAft>
-            </a:pPr>
-            <a:r>
-              <a:rPr sz="1200" b="0">
-                <a:solidFill>
-                  <a:srgbClr val="17231C"/>
-                </a:solidFill>
-                <a:latin typeface="微軟正黑體"/>
-                <a:ea typeface="微軟正黑體"/>
-              </a:rPr>
-              <a:t>· 任務回饋履約 225 萬 · 北捷自有補貼上限 600 萬</a:t>
-            </a:r>
-          </a:p>
-          <a:p>
-            <a:pPr algn="l">
-              <a:lnSpc>
-                <a:spcPct val="112000"/>
-              </a:lnSpc>
-              <a:spcAft>
-                <a:spcPts val="800"/>
-              </a:spcAft>
-            </a:pPr>
-            <a:r>
-              <a:rPr sz="1200" b="0">
-                <a:solidFill>
-                  <a:srgbClr val="17231C"/>
-                </a:solidFill>
-                <a:latin typeface="微軟正黑體"/>
-                <a:ea typeface="微軟正黑體"/>
-              </a:rPr>
-              <a:t>· 資料治理與報表 200 萬 · 系統維運 300 萬 · 營運客服 200 萬</a:t>
-            </a:r>
-          </a:p>
-          <a:p>
-            <a:pPr algn="l">
-              <a:lnSpc>
-                <a:spcPct val="112000"/>
-              </a:lnSpc>
-              <a:spcAft>
-                <a:spcPts val="400"/>
-              </a:spcAft>
-            </a:pPr>
-            <a:r>
-              <a:rPr sz="1200" b="1">
-                <a:solidFill>
-                  <a:srgbClr val="17231C"/>
-                </a:solidFill>
-                <a:latin typeface="微軟正黑體"/>
-                <a:ea typeface="微軟正黑體"/>
-              </a:rPr>
-              <a:t>損益兩平：含共創收入約 8 個合作包/月；不含共創約 16 包/月。</a:t>
-            </a:r>
-          </a:p>
-        </p:txBody>
-      </p:sp>
-      <p:sp>
-        <p:nvSpPr>
-          <p:cNvPr id="8" name="Rounded Rectangle 7"/>
+              <a:t>鍾天傑</a:t>
+            </a:r>
+          </a:p>
+        </p:txBody>
+      </p:sp>
+      <p:sp>
+        <p:nvSpPr>
+          <p:cNvPr id="14" name="Rounded Rectangle 13"/>
           <p:cNvSpPr/>
           <p:nvPr/>
         </p:nvSpPr>
         <p:spPr>
           <a:xfrm>
-            <a:off x="6336792" y="1353312"/>
-            <a:ext cx="5394960" cy="4937760"/>
+            <a:off x="4645151" y="2560320"/>
+            <a:ext cx="2377440" cy="502920"/>
           </a:xfrm>
           <a:prstGeom prst="roundRect">
             <a:avLst>
-              <a:gd name="adj" fmla="val 12000"/>
+              <a:gd name="adj" fmla="val 50000"/>
             </a:avLst>
           </a:prstGeom>
           <a:solidFill>
@@ -8799,14 +8415,122 @@
       </p:sp>
       <p:sp>
         <p:nvSpPr>
-          <p:cNvPr id="9" name="Rounded Rectangle 8"/>
+          <p:cNvPr id="15" name="Rounded Rectangle 14"/>
           <p:cNvSpPr/>
           <p:nvPr/>
         </p:nvSpPr>
         <p:spPr>
           <a:xfrm>
-            <a:off x="6263640" y="1280160"/>
-            <a:ext cx="5394960" cy="4937760"/>
+            <a:off x="4599431" y="2514600"/>
+            <a:ext cx="2377440" cy="502920"/>
+          </a:xfrm>
+          <a:prstGeom prst="roundRect">
+            <a:avLst>
+              <a:gd name="adj" fmla="val 50000"/>
+            </a:avLst>
+          </a:prstGeom>
+          <a:solidFill>
+            <a:srgbClr val="F5A524"/>
+          </a:solidFill>
+          <a:ln w="25400">
+            <a:solidFill>
+              <a:srgbClr val="17231C"/>
+            </a:solidFill>
+          </a:ln>
+          <a:effectLst/>
+        </p:spPr>
+        <p:style>
+          <a:lnRef idx="1">
+            <a:schemeClr val="accent1"/>
+          </a:lnRef>
+          <a:fillRef idx="3">
+            <a:schemeClr val="accent1"/>
+          </a:fillRef>
+          <a:effectRef idx="2">
+            <a:schemeClr val="accent1"/>
+          </a:effectRef>
+          <a:fontRef idx="minor">
+            <a:schemeClr val="lt1"/>
+          </a:fontRef>
+        </p:style>
+        <p:txBody>
+          <a:bodyPr rtlCol="0" anchor="ctr" lIns="45720" rIns="45720" tIns="18288" bIns="18288" wrap="square"/>
+          <a:lstStyle/>
+          <a:p>
+            <a:pPr algn="ctr">
+              <a:lnSpc>
+                <a:spcPct val="112000"/>
+              </a:lnSpc>
+              <a:spcAft>
+                <a:spcPts val="0"/>
+              </a:spcAft>
+            </a:pPr>
+            <a:r>
+              <a:rPr sz="1250" b="1">
+                <a:solidFill>
+                  <a:srgbClr val="17231C"/>
+                </a:solidFill>
+                <a:latin typeface="微軟正黑體"/>
+                <a:ea typeface="微軟正黑體"/>
+              </a:rPr>
+              <a:t>LINE Pay</a:t>
+            </a:r>
+          </a:p>
+        </p:txBody>
+      </p:sp>
+      <p:sp>
+        <p:nvSpPr>
+          <p:cNvPr id="16" name="TextBox 15"/>
+          <p:cNvSpPr txBox="1"/>
+          <p:nvPr/>
+        </p:nvSpPr>
+        <p:spPr>
+          <a:xfrm>
+            <a:off x="4599431" y="3246120"/>
+            <a:ext cx="2971800" cy="1188720"/>
+          </a:xfrm>
+          <a:prstGeom prst="rect">
+            <a:avLst/>
+          </a:prstGeom>
+          <a:noFill/>
+        </p:spPr>
+        <p:txBody>
+          <a:bodyPr wrap="square">
+            <a:spAutoFit/>
+          </a:bodyPr>
+          <a:lstStyle/>
+          <a:p>
+            <a:pPr algn="l">
+              <a:lnSpc>
+                <a:spcPct val="135000"/>
+              </a:lnSpc>
+              <a:spcAft>
+                <a:spcPts val="400"/>
+              </a:spcAft>
+            </a:pPr>
+            <a:r>
+              <a:rPr sz="1250" b="0">
+                <a:solidFill>
+                  <a:srgbClr val="17231C"/>
+                </a:solidFill>
+                <a:latin typeface="微軟正黑體"/>
+                <a:ea typeface="微軟正黑體"/>
+              </a:rPr>
+              <a:t>點數經濟模型與遊戲化設計——負責「點數有地方賺、有地方花」。</a:t>
+            </a:r>
+          </a:p>
+        </p:txBody>
+      </p:sp>
+      <p:sp>
+        <p:nvSpPr>
+          <p:cNvPr id="17" name="Rounded Rectangle 16"/>
+          <p:cNvSpPr/>
+          <p:nvPr/>
+        </p:nvSpPr>
+        <p:spPr>
+          <a:xfrm>
+            <a:off x="8229600" y="1636776"/>
+            <a:ext cx="3520440" cy="3017520"/>
           </a:xfrm>
           <a:prstGeom prst="roundRect">
             <a:avLst>
@@ -8814,7 +8538,53 @@
             </a:avLst>
           </a:prstGeom>
           <a:solidFill>
-            <a:srgbClr val="FFF7DF"/>
+            <a:srgbClr val="17231C"/>
+          </a:solidFill>
+          <a:ln>
+            <a:noFill/>
+          </a:ln>
+          <a:effectLst/>
+        </p:spPr>
+        <p:style>
+          <a:lnRef idx="1">
+            <a:schemeClr val="accent1"/>
+          </a:lnRef>
+          <a:fillRef idx="3">
+            <a:schemeClr val="accent1"/>
+          </a:fillRef>
+          <a:effectRef idx="2">
+            <a:schemeClr val="accent1"/>
+          </a:effectRef>
+          <a:fontRef idx="minor">
+            <a:schemeClr val="lt1"/>
+          </a:fontRef>
+        </p:style>
+        <p:txBody>
+          <a:bodyPr rtlCol="0" anchor="ctr"/>
+          <a:lstStyle/>
+          <a:p>
+            <a:pPr algn="ctr"/>
+          </a:p>
+        </p:txBody>
+      </p:sp>
+      <p:sp>
+        <p:nvSpPr>
+          <p:cNvPr id="18" name="Rounded Rectangle 17"/>
+          <p:cNvSpPr/>
+          <p:nvPr/>
+        </p:nvSpPr>
+        <p:spPr>
+          <a:xfrm>
+            <a:off x="8147304" y="1554480"/>
+            <a:ext cx="3520440" cy="3017520"/>
+          </a:xfrm>
+          <a:prstGeom prst="roundRect">
+            <a:avLst>
+              <a:gd name="adj" fmla="val 12000"/>
+            </a:avLst>
+          </a:prstGeom>
+          <a:solidFill>
+            <a:srgbClr val="FFFDF2"/>
           </a:solidFill>
           <a:ln w="31750">
             <a:solidFill>
@@ -8847,14 +8617,14 @@
       </p:sp>
       <p:sp>
         <p:nvSpPr>
-          <p:cNvPr id="10" name="TextBox 9"/>
+          <p:cNvPr id="19" name="TextBox 18"/>
           <p:cNvSpPr txBox="1"/>
           <p:nvPr/>
         </p:nvSpPr>
         <p:spPr>
           <a:xfrm>
-            <a:off x="6583680" y="1508760"/>
-            <a:ext cx="4754880" cy="4572000"/>
+            <a:off x="8421624" y="1783080"/>
+            <a:ext cx="2926080" cy="548640"/>
           </a:xfrm>
           <a:prstGeom prst="rect">
             <a:avLst/>
@@ -8872,132 +8642,143 @@
                 <a:spcPct val="112000"/>
               </a:lnSpc>
               <a:spcAft>
-                <a:spcPts val="500"/>
-              </a:spcAft>
-            </a:pPr>
-            <a:r>
-              <a:rPr sz="1450" b="1">
-                <a:solidFill>
-                  <a:srgbClr val="0B7A75"/>
+                <a:spcPts val="400"/>
+              </a:spcAft>
+            </a:pPr>
+            <a:r>
+              <a:rPr sz="2400" b="1">
+                <a:solidFill>
+                  <a:srgbClr val="17231C"/>
                 </a:solidFill>
                 <a:latin typeface="微軟正黑體"/>
                 <a:ea typeface="微軟正黑體"/>
               </a:rPr>
-              <a:t>點數會計處理（依 IFRS 15）</a:t>
-            </a:r>
-          </a:p>
-          <a:p>
-            <a:pPr algn="l">
-              <a:lnSpc>
-                <a:spcPct val="125000"/>
-              </a:lnSpc>
-              <a:spcAft>
-                <a:spcPts val="400"/>
-              </a:spcAft>
-            </a:pPr>
-            <a:r>
-              <a:rPr sz="1200" b="0">
-                <a:solidFill>
-                  <a:srgbClr val="17231C"/>
+              <a:t>嚴世裕</a:t>
+            </a:r>
+          </a:p>
+        </p:txBody>
+      </p:sp>
+      <p:sp>
+        <p:nvSpPr>
+          <p:cNvPr id="20" name="Rounded Rectangle 19"/>
+          <p:cNvSpPr/>
+          <p:nvPr/>
+        </p:nvSpPr>
+        <p:spPr>
+          <a:xfrm>
+            <a:off x="8467344" y="2560320"/>
+            <a:ext cx="2377440" cy="502920"/>
+          </a:xfrm>
+          <a:prstGeom prst="roundRect">
+            <a:avLst>
+              <a:gd name="adj" fmla="val 50000"/>
+            </a:avLst>
+          </a:prstGeom>
+          <a:solidFill>
+            <a:srgbClr val="17231C"/>
+          </a:solidFill>
+          <a:ln>
+            <a:noFill/>
+          </a:ln>
+          <a:effectLst/>
+        </p:spPr>
+        <p:style>
+          <a:lnRef idx="1">
+            <a:schemeClr val="accent1"/>
+          </a:lnRef>
+          <a:fillRef idx="3">
+            <a:schemeClr val="accent1"/>
+          </a:fillRef>
+          <a:effectRef idx="2">
+            <a:schemeClr val="accent1"/>
+          </a:effectRef>
+          <a:fontRef idx="minor">
+            <a:schemeClr val="lt1"/>
+          </a:fontRef>
+        </p:style>
+        <p:txBody>
+          <a:bodyPr rtlCol="0" anchor="ctr"/>
+          <a:lstStyle/>
+          <a:p>
+            <a:pPr algn="ctr"/>
+          </a:p>
+        </p:txBody>
+      </p:sp>
+      <p:sp>
+        <p:nvSpPr>
+          <p:cNvPr id="21" name="Rounded Rectangle 20"/>
+          <p:cNvSpPr/>
+          <p:nvPr/>
+        </p:nvSpPr>
+        <p:spPr>
+          <a:xfrm>
+            <a:off x="8421624" y="2514600"/>
+            <a:ext cx="2377440" cy="502920"/>
+          </a:xfrm>
+          <a:prstGeom prst="roundRect">
+            <a:avLst>
+              <a:gd name="adj" fmla="val 50000"/>
+            </a:avLst>
+          </a:prstGeom>
+          <a:solidFill>
+            <a:srgbClr val="38B86F"/>
+          </a:solidFill>
+          <a:ln w="25400">
+            <a:solidFill>
+              <a:srgbClr val="17231C"/>
+            </a:solidFill>
+          </a:ln>
+          <a:effectLst/>
+        </p:spPr>
+        <p:style>
+          <a:lnRef idx="1">
+            <a:schemeClr val="accent1"/>
+          </a:lnRef>
+          <a:fillRef idx="3">
+            <a:schemeClr val="accent1"/>
+          </a:fillRef>
+          <a:effectRef idx="2">
+            <a:schemeClr val="accent1"/>
+          </a:effectRef>
+          <a:fontRef idx="minor">
+            <a:schemeClr val="lt1"/>
+          </a:fontRef>
+        </p:style>
+        <p:txBody>
+          <a:bodyPr rtlCol="0" anchor="ctr" lIns="45720" rIns="45720" tIns="18288" bIns="18288" wrap="square"/>
+          <a:lstStyle/>
+          <a:p>
+            <a:pPr algn="ctr">
+              <a:lnSpc>
+                <a:spcPct val="112000"/>
+              </a:lnSpc>
+              <a:spcAft>
+                <a:spcPts val="0"/>
+              </a:spcAft>
+            </a:pPr>
+            <a:r>
+              <a:rPr sz="1250" b="1">
+                <a:solidFill>
+                  <a:srgbClr val="FFFFFF"/>
                 </a:solidFill>
                 <a:latin typeface="微軟正黑體"/>
                 <a:ea typeface="微軟正黑體"/>
               </a:rPr>
-              <a:t>· 發點時列「合約負債（遞延收入）」，實際核銷或逾期失效時認列收入。</a:t>
-            </a:r>
-          </a:p>
-          <a:p>
-            <a:pPr algn="l">
-              <a:lnSpc>
-                <a:spcPct val="125000"/>
-              </a:lnSpc>
-              <a:spcAft>
-                <a:spcPts val="400"/>
-              </a:spcAft>
-            </a:pPr>
-            <a:r>
-              <a:rPr sz="1200" b="0">
-                <a:solidFill>
-                  <a:srgbClr val="17231C"/>
-                </a:solidFill>
-                <a:latin typeface="微軟正黑體"/>
-                <a:ea typeface="微軟正黑體"/>
-              </a:rPr>
-              <a:t>· 未兌換率（Breakage）參照 LINE POINTS、OPENPOINT 等歷史區間估算，避免虛增負債。</a:t>
-            </a:r>
-          </a:p>
-          <a:p>
-            <a:pPr algn="l">
-              <a:lnSpc>
-                <a:spcPct val="125000"/>
-              </a:lnSpc>
-              <a:spcAft>
-                <a:spcPts val="400"/>
-              </a:spcAft>
-            </a:pPr>
-            <a:r>
-              <a:rPr sz="1200" b="0">
-                <a:solidFill>
-                  <a:srgbClr val="17231C"/>
-                </a:solidFill>
-                <a:latin typeface="微軟正黑體"/>
-                <a:ea typeface="微軟正黑體"/>
-              </a:rPr>
-              <a:t>· 點數池由合作商家出資分攤 + 北捷年上限 600 萬補貼，形成可預算化成本結構。</a:t>
-            </a:r>
-          </a:p>
-          <a:p>
-            <a:pPr algn="l">
-              <a:lnSpc>
-                <a:spcPct val="125000"/>
-              </a:lnSpc>
-              <a:spcAft>
-                <a:spcPts val="800"/>
-              </a:spcAft>
-            </a:pPr>
-            <a:r>
-              <a:rPr sz="1200" b="0">
-                <a:solidFill>
-                  <a:srgbClr val="17231C"/>
-                </a:solidFill>
-                <a:latin typeface="微軟正黑體"/>
-                <a:ea typeface="微軟正黑體"/>
-              </a:rPr>
-              <a:t>· 研究底稿：LINE POINTS / OPENPOINT / 星巴克 / Marriott 之點數負債與認列實務。</a:t>
-            </a:r>
-          </a:p>
-          <a:p>
-            <a:pPr algn="l">
-              <a:lnSpc>
-                <a:spcPct val="130000"/>
-              </a:lnSpc>
-              <a:spcAft>
-                <a:spcPts val="400"/>
-              </a:spcAft>
-            </a:pPr>
-            <a:r>
-              <a:rPr sz="1150" b="0">
-                <a:solidFill>
-                  <a:srgbClr val="6E776F"/>
-                </a:solidFill>
-                <a:latin typeface="微軟正黑體"/>
-                <a:ea typeface="微軟正黑體"/>
-              </a:rPr>
-              <a:t>所有數字為提案試算；正式收入認列、點數負債與分潤拆分，需由北捷依合約與財會規範確認。</a:t>
-            </a:r>
-          </a:p>
-        </p:txBody>
-      </p:sp>
-      <p:sp>
-        <p:nvSpPr>
-          <p:cNvPr id="11" name="TextBox 10"/>
+              <a:t>台北市政府地政局</a:t>
+            </a:r>
+          </a:p>
+        </p:txBody>
+      </p:sp>
+      <p:sp>
+        <p:nvSpPr>
+          <p:cNvPr id="22" name="TextBox 21"/>
           <p:cNvSpPr txBox="1"/>
           <p:nvPr/>
         </p:nvSpPr>
         <p:spPr>
           <a:xfrm>
-            <a:off x="502920" y="6473952"/>
-            <a:ext cx="8229600" cy="320040"/>
+            <a:off x="8421624" y="3246120"/>
+            <a:ext cx="2971800" cy="1188720"/>
           </a:xfrm>
           <a:prstGeom prst="rect">
             <a:avLst/>
@@ -9012,21 +8793,264 @@
           <a:p>
             <a:pPr algn="l">
               <a:lnSpc>
-                <a:spcPct val="112000"/>
+                <a:spcPct val="135000"/>
               </a:lnSpc>
               <a:spcAft>
                 <a:spcPts val="400"/>
               </a:spcAft>
             </a:pPr>
             <a:r>
-              <a:rPr sz="900" b="0">
-                <a:solidFill>
-                  <a:srgbClr val="6E776F"/>
+              <a:rPr sz="1250" b="0">
+                <a:solidFill>
+                  <a:srgbClr val="17231C"/>
                 </a:solidFill>
                 <a:latin typeface="微軟正黑體"/>
                 <a:ea typeface="微軟正黑體"/>
               </a:rPr>
-              <a:t>從碳客變捷客 · 附錄（不在 7 分鐘簡報內，供評審提問時備詢）</a:t>
+              <a:t>市府政策對接與行政合規——負責「健康政策串得上、審查過得了」。</a:t>
+            </a:r>
+          </a:p>
+        </p:txBody>
+      </p:sp>
+      <p:sp>
+        <p:nvSpPr>
+          <p:cNvPr id="23" name="Rounded Rectangle 22"/>
+          <p:cNvSpPr/>
+          <p:nvPr/>
+        </p:nvSpPr>
+        <p:spPr>
+          <a:xfrm>
+            <a:off x="594360" y="5074920"/>
+            <a:ext cx="11155680" cy="1280160"/>
+          </a:xfrm>
+          <a:prstGeom prst="roundRect">
+            <a:avLst>
+              <a:gd name="adj" fmla="val 12000"/>
+            </a:avLst>
+          </a:prstGeom>
+          <a:solidFill>
+            <a:srgbClr val="17231C"/>
+          </a:solidFill>
+          <a:ln>
+            <a:noFill/>
+          </a:ln>
+          <a:effectLst/>
+        </p:spPr>
+        <p:style>
+          <a:lnRef idx="1">
+            <a:schemeClr val="accent1"/>
+          </a:lnRef>
+          <a:fillRef idx="3">
+            <a:schemeClr val="accent1"/>
+          </a:fillRef>
+          <a:effectRef idx="2">
+            <a:schemeClr val="accent1"/>
+          </a:effectRef>
+          <a:fontRef idx="minor">
+            <a:schemeClr val="lt1"/>
+          </a:fontRef>
+        </p:style>
+        <p:txBody>
+          <a:bodyPr rtlCol="0" anchor="ctr"/>
+          <a:lstStyle/>
+          <a:p>
+            <a:pPr algn="ctr"/>
+          </a:p>
+        </p:txBody>
+      </p:sp>
+      <p:sp>
+        <p:nvSpPr>
+          <p:cNvPr id="24" name="Rounded Rectangle 23"/>
+          <p:cNvSpPr/>
+          <p:nvPr/>
+        </p:nvSpPr>
+        <p:spPr>
+          <a:xfrm>
+            <a:off x="502920" y="4983480"/>
+            <a:ext cx="11155680" cy="1280160"/>
+          </a:xfrm>
+          <a:prstGeom prst="roundRect">
+            <a:avLst>
+              <a:gd name="adj" fmla="val 12000"/>
+            </a:avLst>
+          </a:prstGeom>
+          <a:solidFill>
+            <a:srgbClr val="0B7A75"/>
+          </a:solidFill>
+          <a:ln w="38100">
+            <a:solidFill>
+              <a:srgbClr val="17231C"/>
+            </a:solidFill>
+          </a:ln>
+          <a:effectLst/>
+        </p:spPr>
+        <p:style>
+          <a:lnRef idx="1">
+            <a:schemeClr val="accent1"/>
+          </a:lnRef>
+          <a:fillRef idx="3">
+            <a:schemeClr val="accent1"/>
+          </a:fillRef>
+          <a:effectRef idx="2">
+            <a:schemeClr val="accent1"/>
+          </a:effectRef>
+          <a:fontRef idx="minor">
+            <a:schemeClr val="lt1"/>
+          </a:fontRef>
+        </p:style>
+        <p:txBody>
+          <a:bodyPr rtlCol="0" anchor="ctr"/>
+          <a:lstStyle/>
+          <a:p>
+            <a:pPr algn="ctr"/>
+          </a:p>
+        </p:txBody>
+      </p:sp>
+      <p:sp>
+        <p:nvSpPr>
+          <p:cNvPr id="25" name="TextBox 24"/>
+          <p:cNvSpPr txBox="1"/>
+          <p:nvPr/>
+        </p:nvSpPr>
+        <p:spPr>
+          <a:xfrm>
+            <a:off x="868680" y="5166360"/>
+            <a:ext cx="10515600" cy="960120"/>
+          </a:xfrm>
+          <a:prstGeom prst="rect">
+            <a:avLst/>
+          </a:prstGeom>
+          <a:noFill/>
+        </p:spPr>
+        <p:txBody>
+          <a:bodyPr wrap="square">
+            <a:spAutoFit/>
+          </a:bodyPr>
+          <a:lstStyle/>
+          <a:p>
+            <a:pPr algn="l">
+              <a:lnSpc>
+                <a:spcPct val="112000"/>
+              </a:lnSpc>
+              <a:spcAft>
+                <a:spcPts val="400"/>
+              </a:spcAft>
+            </a:pPr>
+            <a:r>
+              <a:rPr sz="1750" b="1">
+                <a:solidFill>
+                  <a:srgbClr val="FFD34D"/>
+                </a:solidFill>
+                <a:latin typeface="微軟正黑體"/>
+                <a:ea typeface="微軟正黑體"/>
+              </a:rPr>
+              <a:t>從碳客變捷客：讓 207 萬人的每一趟通勤，都被看見、被回饋、被信任。</a:t>
+            </a:r>
+          </a:p>
+          <a:p>
+            <a:pPr algn="l">
+              <a:lnSpc>
+                <a:spcPct val="112000"/>
+              </a:lnSpc>
+              <a:spcAft>
+                <a:spcPts val="400"/>
+              </a:spcAft>
+            </a:pPr>
+            <a:r>
+              <a:rPr sz="1100" b="0">
+                <a:solidFill>
+                  <a:srgbClr val="C8F3DF"/>
+                </a:solidFill>
+                <a:latin typeface="微軟正黑體"/>
+                <a:ea typeface="微軟正黑體"/>
+              </a:rPr>
+              <a:t>誠實標註：碳係數採北捷座談分享之參考值（104/75/29 g/人km），正式導入時以北捷確認版本為準。</a:t>
+            </a:r>
+          </a:p>
+        </p:txBody>
+      </p:sp>
+      <p:sp>
+        <p:nvSpPr>
+          <p:cNvPr id="26" name="TextBox 25"/>
+          <p:cNvSpPr txBox="1"/>
+          <p:nvPr/>
+        </p:nvSpPr>
+        <p:spPr>
+          <a:xfrm>
+            <a:off x="502920" y="6473952"/>
+            <a:ext cx="8229600" cy="320040"/>
+          </a:xfrm>
+          <a:prstGeom prst="rect">
+            <a:avLst/>
+          </a:prstGeom>
+          <a:noFill/>
+        </p:spPr>
+        <p:txBody>
+          <a:bodyPr wrap="square">
+            <a:spAutoFit/>
+          </a:bodyPr>
+          <a:lstStyle/>
+          <a:p>
+            <a:pPr algn="l">
+              <a:lnSpc>
+                <a:spcPct val="112000"/>
+              </a:lnSpc>
+              <a:spcAft>
+                <a:spcPts val="400"/>
+              </a:spcAft>
+            </a:pPr>
+            <a:r>
+              <a:rPr sz="900" b="0">
+                <a:solidFill>
+                  <a:srgbClr val="6E776F"/>
+                </a:solidFill>
+                <a:latin typeface="微軟正黑體"/>
+                <a:ea typeface="微軟正黑體"/>
+              </a:rPr>
+              <a:t>從碳客變捷客 · 2026 捷運盃黑客松決賽簡報 · 想領獎金的捷客</a:t>
+            </a:r>
+          </a:p>
+        </p:txBody>
+      </p:sp>
+      <p:sp>
+        <p:nvSpPr>
+          <p:cNvPr id="27" name="TextBox 26"/>
+          <p:cNvSpPr txBox="1"/>
+          <p:nvPr/>
+        </p:nvSpPr>
+        <p:spPr>
+          <a:xfrm>
+            <a:off x="11155680" y="6473952"/>
+            <a:ext cx="640080" cy="320040"/>
+          </a:xfrm>
+          <a:prstGeom prst="rect">
+            <a:avLst/>
+          </a:prstGeom>
+          <a:noFill/>
+        </p:spPr>
+        <p:txBody>
+          <a:bodyPr wrap="square">
+            <a:spAutoFit/>
+          </a:bodyPr>
+          <a:lstStyle/>
+          <a:p>
+            <a:pPr algn="r">
+              <a:lnSpc>
+                <a:spcPct val="112000"/>
+              </a:lnSpc>
+              <a:spcAft>
+                <a:spcPts val="400"/>
+              </a:spcAft>
+            </a:pPr>
+            <a:r>
+              <a:rPr sz="1000" b="0">
+                <a:solidFill>
+                  <a:srgbClr val="6E776F"/>
+                </a:solidFill>
+                <a:latin typeface="Arial"/>
+                <a:ea typeface="Arial"/>
+              </a:rPr>
+              <a:t>12</a:t>
             </a:r>
           </a:p>
         </p:txBody>
@@ -9163,7 +9187,7 @@
                 <a:latin typeface="微軟正黑體"/>
                 <a:ea typeface="微軟正黑體"/>
               </a:rPr>
-              <a:t>附錄 A2 · 備詢用</a:t>
+              <a:t>附錄 A1 · 備詢用</a:t>
             </a:r>
           </a:p>
         </p:txBody>
@@ -9206,7 +9230,7 @@
                 <a:latin typeface="微軟正黑體"/>
                 <a:ea typeface="微軟正黑體"/>
               </a:rPr>
-              <a:t>四個示範場景（完整版：資料／回饋／成效）</a:t>
+              <a:t>財務細目與點數會計（IFRS 15）</a:t>
             </a:r>
           </a:p>
         </p:txBody>
@@ -9220,7 +9244,7 @@
         <p:spPr>
           <a:xfrm>
             <a:off x="576072" y="1353312"/>
-            <a:ext cx="5440680" cy="2331720"/>
+            <a:ext cx="5486400" cy="4937760"/>
           </a:xfrm>
           <a:prstGeom prst="roundRect">
             <a:avLst>
@@ -9266,7 +9290,7 @@
         <p:spPr>
           <a:xfrm>
             <a:off x="502920" y="1280160"/>
-            <a:ext cx="5440680" cy="2331720"/>
+            <a:ext cx="5486400" cy="4937760"/>
           </a:xfrm>
           <a:prstGeom prst="roundRect">
             <a:avLst>
@@ -9307,18 +9331,221 @@
       </p:sp>
       <p:sp>
         <p:nvSpPr>
-          <p:cNvPr id="7" name="Rounded Rectangle 6"/>
+          <p:cNvPr id="7" name="TextBox 6"/>
+          <p:cNvSpPr txBox="1"/>
+          <p:nvPr/>
+        </p:nvSpPr>
+        <p:spPr>
+          <a:xfrm>
+            <a:off x="822960" y="1508760"/>
+            <a:ext cx="4846320" cy="4572000"/>
+          </a:xfrm>
+          <a:prstGeom prst="rect">
+            <a:avLst/>
+          </a:prstGeom>
+          <a:noFill/>
+        </p:spPr>
+        <p:txBody>
+          <a:bodyPr wrap="square">
+            <a:spAutoFit/>
+          </a:bodyPr>
+          <a:lstStyle/>
+          <a:p>
+            <a:pPr algn="l">
+              <a:lnSpc>
+                <a:spcPct val="112000"/>
+              </a:lnSpc>
+              <a:spcAft>
+                <a:spcPts val="500"/>
+              </a:spcAft>
+            </a:pPr>
+            <a:r>
+              <a:rPr sz="1450" b="1">
+                <a:solidFill>
+                  <a:srgbClr val="0B7A75"/>
+                </a:solidFill>
+                <a:latin typeface="微軟正黑體"/>
+                <a:ea typeface="微軟正黑體"/>
+              </a:rPr>
+              <a:t>收入（首年試算 NT$ 2,270 萬）</a:t>
+            </a:r>
+          </a:p>
+          <a:p>
+            <a:pPr algn="l">
+              <a:lnSpc>
+                <a:spcPct val="112000"/>
+              </a:lnSpc>
+              <a:spcAft>
+                <a:spcPts val="300"/>
+              </a:spcAft>
+            </a:pPr>
+            <a:r>
+              <a:rPr sz="1200" b="0">
+                <a:solidFill>
+                  <a:srgbClr val="17231C"/>
+                </a:solidFill>
+                <a:latin typeface="微軟正黑體"/>
+                <a:ea typeface="微軟正黑體"/>
+              </a:rPr>
+              <a:t>· 站點健康共享合作包：20 包/月 × 5 萬 × 12 = 1,200 萬</a:t>
+            </a:r>
+          </a:p>
+          <a:p>
+            <a:pPr algn="l">
+              <a:lnSpc>
+                <a:spcPct val="112000"/>
+              </a:lnSpc>
+              <a:spcAft>
+                <a:spcPts val="300"/>
+              </a:spcAft>
+            </a:pPr>
+            <a:r>
+              <a:rPr sz="1200" b="0">
+                <a:solidFill>
+                  <a:srgbClr val="17231C"/>
+                </a:solidFill>
+                <a:latin typeface="微軟正黑體"/>
+                <a:ea typeface="微軟正黑體"/>
+              </a:rPr>
+              <a:t>· 任務回饋池合作金流：37,500 次/月 × 5 點 × 1.2 元 × 12 = 270 萬</a:t>
+            </a:r>
+          </a:p>
+          <a:p>
+            <a:pPr algn="l">
+              <a:lnSpc>
+                <a:spcPct val="112000"/>
+              </a:lnSpc>
+              <a:spcAft>
+                <a:spcPts val="300"/>
+              </a:spcAft>
+            </a:pPr>
+            <a:r>
+              <a:rPr sz="1200" b="0">
+                <a:solidFill>
+                  <a:srgbClr val="17231C"/>
+                </a:solidFill>
+                <a:latin typeface="微軟正黑體"/>
+                <a:ea typeface="微軟正黑體"/>
+              </a:rPr>
+              <a:t>· ESG／健康品牌共創：2 案 × 250 萬 = 500 萬</a:t>
+            </a:r>
+          </a:p>
+          <a:p>
+            <a:pPr algn="l">
+              <a:lnSpc>
+                <a:spcPct val="112000"/>
+              </a:lnSpc>
+              <a:spcAft>
+                <a:spcPts val="800"/>
+              </a:spcAft>
+            </a:pPr>
+            <a:r>
+              <a:rPr sz="1200" b="0">
+                <a:solidFill>
+                  <a:srgbClr val="17231C"/>
+                </a:solidFill>
+                <a:latin typeface="微軟正黑體"/>
+                <a:ea typeface="微軟正黑體"/>
+              </a:rPr>
+              <a:t>· App / Go!Map / 租賃加值版位：300 萬</a:t>
+            </a:r>
+          </a:p>
+          <a:p>
+            <a:pPr algn="l">
+              <a:lnSpc>
+                <a:spcPct val="112000"/>
+              </a:lnSpc>
+              <a:spcAft>
+                <a:spcPts val="500"/>
+              </a:spcAft>
+            </a:pPr>
+            <a:r>
+              <a:rPr sz="1450" b="1">
+                <a:solidFill>
+                  <a:srgbClr val="F5A524"/>
+                </a:solidFill>
+                <a:latin typeface="微軟正黑體"/>
+                <a:ea typeface="微軟正黑體"/>
+              </a:rPr>
+              <a:t>支出（首年試算 NT$ 1,525 萬）</a:t>
+            </a:r>
+          </a:p>
+          <a:p>
+            <a:pPr algn="l">
+              <a:lnSpc>
+                <a:spcPct val="112000"/>
+              </a:lnSpc>
+              <a:spcAft>
+                <a:spcPts val="300"/>
+              </a:spcAft>
+            </a:pPr>
+            <a:r>
+              <a:rPr sz="1200" b="0">
+                <a:solidFill>
+                  <a:srgbClr val="17231C"/>
+                </a:solidFill>
+                <a:latin typeface="微軟正黑體"/>
+                <a:ea typeface="微軟正黑體"/>
+              </a:rPr>
+              <a:t>· 任務回饋履約 225 萬 · 北捷自有補貼上限 600 萬</a:t>
+            </a:r>
+          </a:p>
+          <a:p>
+            <a:pPr algn="l">
+              <a:lnSpc>
+                <a:spcPct val="112000"/>
+              </a:lnSpc>
+              <a:spcAft>
+                <a:spcPts val="800"/>
+              </a:spcAft>
+            </a:pPr>
+            <a:r>
+              <a:rPr sz="1200" b="0">
+                <a:solidFill>
+                  <a:srgbClr val="17231C"/>
+                </a:solidFill>
+                <a:latin typeface="微軟正黑體"/>
+                <a:ea typeface="微軟正黑體"/>
+              </a:rPr>
+              <a:t>· 資料治理與報表 200 萬 · 系統維運 300 萬 · 營運客服 200 萬</a:t>
+            </a:r>
+          </a:p>
+          <a:p>
+            <a:pPr algn="l">
+              <a:lnSpc>
+                <a:spcPct val="112000"/>
+              </a:lnSpc>
+              <a:spcAft>
+                <a:spcPts val="400"/>
+              </a:spcAft>
+            </a:pPr>
+            <a:r>
+              <a:rPr sz="1200" b="1">
+                <a:solidFill>
+                  <a:srgbClr val="17231C"/>
+                </a:solidFill>
+                <a:latin typeface="微軟正黑體"/>
+                <a:ea typeface="微軟正黑體"/>
+              </a:rPr>
+              <a:t>損益兩平：含共創收入約 8 個合作包/月；不含共創約 16 包/月。</a:t>
+            </a:r>
+          </a:p>
+        </p:txBody>
+      </p:sp>
+      <p:sp>
+        <p:nvSpPr>
+          <p:cNvPr id="8" name="Rounded Rectangle 7"/>
           <p:cNvSpPr/>
           <p:nvPr/>
         </p:nvSpPr>
         <p:spPr>
           <a:xfrm>
-            <a:off x="777240" y="1508760"/>
-            <a:ext cx="2286000" cy="475488"/>
+            <a:off x="6336792" y="1353312"/>
+            <a:ext cx="5394960" cy="4937760"/>
           </a:xfrm>
           <a:prstGeom prst="roundRect">
             <a:avLst>
-              <a:gd name="adj" fmla="val 50000"/>
+              <a:gd name="adj" fmla="val 12000"/>
             </a:avLst>
           </a:prstGeom>
           <a:solidFill>
@@ -9353,251 +9580,14 @@
       </p:sp>
       <p:sp>
         <p:nvSpPr>
-          <p:cNvPr id="8" name="Rounded Rectangle 7"/>
+          <p:cNvPr id="9" name="Rounded Rectangle 8"/>
           <p:cNvSpPr/>
           <p:nvPr/>
         </p:nvSpPr>
         <p:spPr>
           <a:xfrm>
-            <a:off x="731520" y="1463039"/>
-            <a:ext cx="2286000" cy="475488"/>
-          </a:xfrm>
-          <a:prstGeom prst="roundRect">
-            <a:avLst>
-              <a:gd name="adj" fmla="val 50000"/>
-            </a:avLst>
-          </a:prstGeom>
-          <a:solidFill>
-            <a:srgbClr val="C8F3DF"/>
-          </a:solidFill>
-          <a:ln w="25400">
-            <a:solidFill>
-              <a:srgbClr val="17231C"/>
-            </a:solidFill>
-          </a:ln>
-          <a:effectLst/>
-        </p:spPr>
-        <p:style>
-          <a:lnRef idx="1">
-            <a:schemeClr val="accent1"/>
-          </a:lnRef>
-          <a:fillRef idx="3">
-            <a:schemeClr val="accent1"/>
-          </a:fillRef>
-          <a:effectRef idx="2">
-            <a:schemeClr val="accent1"/>
-          </a:effectRef>
-          <a:fontRef idx="minor">
-            <a:schemeClr val="lt1"/>
-          </a:fontRef>
-        </p:style>
-        <p:txBody>
-          <a:bodyPr rtlCol="0" anchor="ctr" lIns="45720" rIns="45720" tIns="18288" bIns="18288" wrap="square"/>
-          <a:lstStyle/>
-          <a:p>
-            <a:pPr algn="ctr">
-              <a:lnSpc>
-                <a:spcPct val="112000"/>
-              </a:lnSpc>
-              <a:spcAft>
-                <a:spcPts val="0"/>
-              </a:spcAft>
-            </a:pPr>
-            <a:r>
-              <a:rPr sz="1300" b="1">
-                <a:solidFill>
-                  <a:srgbClr val="17231C"/>
-                </a:solidFill>
-                <a:latin typeface="微軟正黑體"/>
-                <a:ea typeface="微軟正黑體"/>
-              </a:rPr>
-              <a:t>A · 下班健康任務</a:t>
-            </a:r>
-          </a:p>
-        </p:txBody>
-      </p:sp>
-      <p:sp>
-        <p:nvSpPr>
-          <p:cNvPr id="9" name="TextBox 8"/>
-          <p:cNvSpPr txBox="1"/>
-          <p:nvPr/>
-        </p:nvSpPr>
-        <p:spPr>
-          <a:xfrm>
-            <a:off x="731520" y="2057400"/>
-            <a:ext cx="4937760" cy="640080"/>
-          </a:xfrm>
-          <a:prstGeom prst="rect">
-            <a:avLst/>
-          </a:prstGeom>
-          <a:noFill/>
-        </p:spPr>
-        <p:txBody>
-          <a:bodyPr wrap="square">
-            <a:spAutoFit/>
-          </a:bodyPr>
-          <a:lstStyle/>
-          <a:p>
-            <a:pPr algn="l">
-              <a:lnSpc>
-                <a:spcPct val="120000"/>
-              </a:lnSpc>
-              <a:spcAft>
-                <a:spcPts val="400"/>
-              </a:spcAft>
-            </a:pPr>
-            <a:r>
-              <a:rPr sz="1200" b="0">
-                <a:solidFill>
-                  <a:srgbClr val="17231C"/>
-                </a:solidFill>
-                <a:latin typeface="微軟正黑體"/>
-                <a:ea typeface="微軟正黑體"/>
-              </a:rPr>
-              <a:t>出站推播：「離萬步差 2,000 步，步行 9 分鐘到運動中心，完成入場解鎖本月加成。」</a:t>
-            </a:r>
-          </a:p>
-        </p:txBody>
-      </p:sp>
-      <p:sp>
-        <p:nvSpPr>
-          <p:cNvPr id="10" name="TextBox 9"/>
-          <p:cNvSpPr txBox="1"/>
-          <p:nvPr/>
-        </p:nvSpPr>
-        <p:spPr>
-          <a:xfrm>
-            <a:off x="731520" y="2697480"/>
-            <a:ext cx="4937760" cy="868680"/>
-          </a:xfrm>
-          <a:prstGeom prst="rect">
-            <a:avLst/>
-          </a:prstGeom>
-          <a:noFill/>
-        </p:spPr>
-        <p:txBody>
-          <a:bodyPr wrap="square">
-            <a:spAutoFit/>
-          </a:bodyPr>
-          <a:lstStyle/>
-          <a:p>
-            <a:pPr algn="l">
-              <a:lnSpc>
-                <a:spcPct val="112000"/>
-              </a:lnSpc>
-              <a:spcAft>
-                <a:spcPts val="100"/>
-              </a:spcAft>
-            </a:pPr>
-            <a:r>
-              <a:rPr sz="1050" b="0">
-                <a:solidFill>
-                  <a:srgbClr val="6E776F"/>
-                </a:solidFill>
-                <a:latin typeface="微軟正黑體"/>
-                <a:ea typeface="微軟正黑體"/>
-              </a:rPr>
-              <a:t>資料：出站站點/時間/自選健康偏好</a:t>
-            </a:r>
-          </a:p>
-          <a:p>
-            <a:pPr algn="l">
-              <a:lnSpc>
-                <a:spcPct val="112000"/>
-              </a:lnSpc>
-              <a:spcAft>
-                <a:spcPts val="100"/>
-              </a:spcAft>
-            </a:pPr>
-            <a:r>
-              <a:rPr sz="1050" b="0">
-                <a:solidFill>
-                  <a:srgbClr val="6E776F"/>
-                </a:solidFill>
-                <a:latin typeface="微軟正黑體"/>
-                <a:ea typeface="微軟正黑體"/>
-              </a:rPr>
-              <a:t>回饋：捷運點加成、場館券</a:t>
-            </a:r>
-          </a:p>
-          <a:p>
-            <a:pPr algn="l">
-              <a:lnSpc>
-                <a:spcPct val="112000"/>
-              </a:lnSpc>
-              <a:spcAft>
-                <a:spcPts val="100"/>
-              </a:spcAft>
-            </a:pPr>
-            <a:r>
-              <a:rPr sz="1050" b="0">
-                <a:solidFill>
-                  <a:srgbClr val="6E776F"/>
-                </a:solidFill>
-                <a:latin typeface="微軟正黑體"/>
-                <a:ea typeface="微軟正黑體"/>
-              </a:rPr>
-              <a:t>成效：任務完成、步行里程、減碳量</a:t>
-            </a:r>
-          </a:p>
-        </p:txBody>
-      </p:sp>
-      <p:sp>
-        <p:nvSpPr>
-          <p:cNvPr id="11" name="Rounded Rectangle 10"/>
-          <p:cNvSpPr/>
-          <p:nvPr/>
-        </p:nvSpPr>
-        <p:spPr>
-          <a:xfrm>
-            <a:off x="6291072" y="1353312"/>
-            <a:ext cx="5440680" cy="2331720"/>
-          </a:xfrm>
-          <a:prstGeom prst="roundRect">
-            <a:avLst>
-              <a:gd name="adj" fmla="val 12000"/>
-            </a:avLst>
-          </a:prstGeom>
-          <a:solidFill>
-            <a:srgbClr val="17231C"/>
-          </a:solidFill>
-          <a:ln>
-            <a:noFill/>
-          </a:ln>
-          <a:effectLst/>
-        </p:spPr>
-        <p:style>
-          <a:lnRef idx="1">
-            <a:schemeClr val="accent1"/>
-          </a:lnRef>
-          <a:fillRef idx="3">
-            <a:schemeClr val="accent1"/>
-          </a:fillRef>
-          <a:effectRef idx="2">
-            <a:schemeClr val="accent1"/>
-          </a:effectRef>
-          <a:fontRef idx="minor">
-            <a:schemeClr val="lt1"/>
-          </a:fontRef>
-        </p:style>
-        <p:txBody>
-          <a:bodyPr rtlCol="0" anchor="ctr"/>
-          <a:lstStyle/>
-          <a:p>
-            <a:pPr algn="ctr"/>
-          </a:p>
-        </p:txBody>
-      </p:sp>
-      <p:sp>
-        <p:nvSpPr>
-          <p:cNvPr id="12" name="Rounded Rectangle 11"/>
-          <p:cNvSpPr/>
-          <p:nvPr/>
-        </p:nvSpPr>
-        <p:spPr>
-          <a:xfrm>
-            <a:off x="6217920" y="1280160"/>
-            <a:ext cx="5440680" cy="2331720"/>
+            <a:off x="6263640" y="1280160"/>
+            <a:ext cx="5394960" cy="4937760"/>
           </a:xfrm>
           <a:prstGeom prst="roundRect">
             <a:avLst>
@@ -9638,125 +9628,14 @@
       </p:sp>
       <p:sp>
         <p:nvSpPr>
-          <p:cNvPr id="13" name="Rounded Rectangle 12"/>
-          <p:cNvSpPr/>
-          <p:nvPr/>
-        </p:nvSpPr>
-        <p:spPr>
-          <a:xfrm>
-            <a:off x="6492240" y="1508760"/>
-            <a:ext cx="2286000" cy="475488"/>
-          </a:xfrm>
-          <a:prstGeom prst="roundRect">
-            <a:avLst>
-              <a:gd name="adj" fmla="val 50000"/>
-            </a:avLst>
-          </a:prstGeom>
-          <a:solidFill>
-            <a:srgbClr val="17231C"/>
-          </a:solidFill>
-          <a:ln>
-            <a:noFill/>
-          </a:ln>
-          <a:effectLst/>
-        </p:spPr>
-        <p:style>
-          <a:lnRef idx="1">
-            <a:schemeClr val="accent1"/>
-          </a:lnRef>
-          <a:fillRef idx="3">
-            <a:schemeClr val="accent1"/>
-          </a:fillRef>
-          <a:effectRef idx="2">
-            <a:schemeClr val="accent1"/>
-          </a:effectRef>
-          <a:fontRef idx="minor">
-            <a:schemeClr val="lt1"/>
-          </a:fontRef>
-        </p:style>
-        <p:txBody>
-          <a:bodyPr rtlCol="0" anchor="ctr"/>
-          <a:lstStyle/>
-          <a:p>
-            <a:pPr algn="ctr"/>
-          </a:p>
-        </p:txBody>
-      </p:sp>
-      <p:sp>
-        <p:nvSpPr>
-          <p:cNvPr id="14" name="Rounded Rectangle 13"/>
-          <p:cNvSpPr/>
-          <p:nvPr/>
-        </p:nvSpPr>
-        <p:spPr>
-          <a:xfrm>
-            <a:off x="6446520" y="1463039"/>
-            <a:ext cx="2286000" cy="475488"/>
-          </a:xfrm>
-          <a:prstGeom prst="roundRect">
-            <a:avLst>
-              <a:gd name="adj" fmla="val 50000"/>
-            </a:avLst>
-          </a:prstGeom>
-          <a:solidFill>
-            <a:srgbClr val="FFD34D"/>
-          </a:solidFill>
-          <a:ln w="25400">
-            <a:solidFill>
-              <a:srgbClr val="17231C"/>
-            </a:solidFill>
-          </a:ln>
-          <a:effectLst/>
-        </p:spPr>
-        <p:style>
-          <a:lnRef idx="1">
-            <a:schemeClr val="accent1"/>
-          </a:lnRef>
-          <a:fillRef idx="3">
-            <a:schemeClr val="accent1"/>
-          </a:fillRef>
-          <a:effectRef idx="2">
-            <a:schemeClr val="accent1"/>
-          </a:effectRef>
-          <a:fontRef idx="minor">
-            <a:schemeClr val="lt1"/>
-          </a:fontRef>
-        </p:style>
-        <p:txBody>
-          <a:bodyPr rtlCol="0" anchor="ctr" lIns="45720" rIns="45720" tIns="18288" bIns="18288" wrap="square"/>
-          <a:lstStyle/>
-          <a:p>
-            <a:pPr algn="ctr">
-              <a:lnSpc>
-                <a:spcPct val="112000"/>
-              </a:lnSpc>
-              <a:spcAft>
-                <a:spcPts val="0"/>
-              </a:spcAft>
-            </a:pPr>
-            <a:r>
-              <a:rPr sz="1300" b="1">
-                <a:solidFill>
-                  <a:srgbClr val="17231C"/>
-                </a:solidFill>
-                <a:latin typeface="微軟正黑體"/>
-                <a:ea typeface="微軟正黑體"/>
-              </a:rPr>
-              <a:t>B · 雨天共享接力</a:t>
-            </a:r>
-          </a:p>
-        </p:txBody>
-      </p:sp>
-      <p:sp>
-        <p:nvSpPr>
-          <p:cNvPr id="15" name="TextBox 14"/>
+          <p:cNvPr id="10" name="TextBox 9"/>
           <p:cNvSpPr txBox="1"/>
           <p:nvPr/>
         </p:nvSpPr>
         <p:spPr>
           <a:xfrm>
-            <a:off x="6446520" y="2057400"/>
-            <a:ext cx="4937760" cy="640080"/>
+            <a:off x="6583680" y="1508760"/>
+            <a:ext cx="4754880" cy="4572000"/>
           </a:xfrm>
           <a:prstGeom prst="rect">
             <a:avLst/>
@@ -9771,773 +9650,128 @@
           <a:p>
             <a:pPr algn="l">
               <a:lnSpc>
-                <a:spcPct val="120000"/>
-              </a:lnSpc>
-              <a:spcAft>
-                <a:spcPts val="400"/>
-              </a:spcAft>
-            </a:pPr>
-            <a:r>
-              <a:rPr sz="1200" b="0">
-                <a:solidFill>
-                  <a:srgbClr val="17231C"/>
+                <a:spcPct val="112000"/>
+              </a:lnSpc>
+              <a:spcAft>
+                <a:spcPts val="500"/>
+              </a:spcAft>
+            </a:pPr>
+            <a:r>
+              <a:rPr sz="1450" b="1">
+                <a:solidFill>
+                  <a:srgbClr val="0B7A75"/>
                 </a:solidFill>
                 <a:latin typeface="微軟正黑體"/>
                 <a:ea typeface="微軟正黑體"/>
               </a:rPr>
-              <a:t>出站遇雨推播：「本站出口有 rainGo 共享傘，甲站借乙站還，累積共享任務。」</a:t>
-            </a:r>
-          </a:p>
-        </p:txBody>
-      </p:sp>
-      <p:sp>
-        <p:nvSpPr>
-          <p:cNvPr id="16" name="TextBox 15"/>
-          <p:cNvSpPr txBox="1"/>
-          <p:nvPr/>
-        </p:nvSpPr>
-        <p:spPr>
-          <a:xfrm>
-            <a:off x="6446520" y="2697480"/>
-            <a:ext cx="4937760" cy="868680"/>
-          </a:xfrm>
-          <a:prstGeom prst="rect">
-            <a:avLst/>
-          </a:prstGeom>
-          <a:noFill/>
-        </p:spPr>
-        <p:txBody>
-          <a:bodyPr wrap="square">
-            <a:spAutoFit/>
-          </a:bodyPr>
-          <a:lstStyle/>
+              <a:t>點數會計處理（依 IFRS 15）</a:t>
+            </a:r>
+          </a:p>
           <a:p>
             <a:pPr algn="l">
               <a:lnSpc>
-                <a:spcPct val="112000"/>
-              </a:lnSpc>
-              <a:spcAft>
-                <a:spcPts val="100"/>
-              </a:spcAft>
-            </a:pPr>
-            <a:r>
-              <a:rPr sz="1050" b="0">
-                <a:solidFill>
-                  <a:srgbClr val="6E776F"/>
+                <a:spcPct val="125000"/>
+              </a:lnSpc>
+              <a:spcAft>
+                <a:spcPts val="400"/>
+              </a:spcAft>
+            </a:pPr>
+            <a:r>
+              <a:rPr sz="1200" b="0">
+                <a:solidFill>
+                  <a:srgbClr val="17231C"/>
                 </a:solidFill>
                 <a:latin typeface="微軟正黑體"/>
                 <a:ea typeface="微軟正黑體"/>
               </a:rPr>
-              <a:t>資料：天氣/站點/共享傘供給狀態</a:t>
+              <a:t>· 發點時列「合約負債（遞延收入）」，實際核銷或逾期失效時認列收入。</a:t>
             </a:r>
           </a:p>
           <a:p>
             <a:pPr algn="l">
               <a:lnSpc>
-                <a:spcPct val="112000"/>
-              </a:lnSpc>
-              <a:spcAft>
-                <a:spcPts val="100"/>
-              </a:spcAft>
-            </a:pPr>
-            <a:r>
-              <a:rPr sz="1050" b="0">
-                <a:solidFill>
-                  <a:srgbClr val="6E776F"/>
+                <a:spcPct val="125000"/>
+              </a:lnSpc>
+              <a:spcAft>
+                <a:spcPts val="400"/>
+              </a:spcAft>
+            </a:pPr>
+            <a:r>
+              <a:rPr sz="1200" b="0">
+                <a:solidFill>
+                  <a:srgbClr val="17231C"/>
                 </a:solidFill>
                 <a:latin typeface="微軟正黑體"/>
                 <a:ea typeface="微軟正黑體"/>
               </a:rPr>
-              <a:t>回饋：共享任務章、抽獎、借傘券</a:t>
+              <a:t>· 未兌換率（Breakage）參照 LINE POINTS、OPENPOINT 等歷史區間估算，避免虛增負債。</a:t>
             </a:r>
           </a:p>
           <a:p>
             <a:pPr algn="l">
               <a:lnSpc>
-                <a:spcPct val="112000"/>
-              </a:lnSpc>
-              <a:spcAft>
-                <a:spcPts val="100"/>
-              </a:spcAft>
-            </a:pPr>
-            <a:r>
-              <a:rPr sz="1050" b="0">
-                <a:solidFill>
-                  <a:srgbClr val="6E776F"/>
+                <a:spcPct val="125000"/>
+              </a:lnSpc>
+              <a:spcAft>
+                <a:spcPts val="400"/>
+              </a:spcAft>
+            </a:pPr>
+            <a:r>
+              <a:rPr sz="1200" b="0">
+                <a:solidFill>
+                  <a:srgbClr val="17231C"/>
                 </a:solidFill>
                 <a:latin typeface="微軟正黑體"/>
                 <a:ea typeface="微軟正黑體"/>
               </a:rPr>
-              <a:t>成效：曝光、租借導流、減廢敘事</a:t>
-            </a:r>
-          </a:p>
-        </p:txBody>
-      </p:sp>
-      <p:sp>
-        <p:nvSpPr>
-          <p:cNvPr id="17" name="Rounded Rectangle 16"/>
-          <p:cNvSpPr/>
-          <p:nvPr/>
-        </p:nvSpPr>
-        <p:spPr>
-          <a:xfrm>
-            <a:off x="576072" y="3867912"/>
-            <a:ext cx="5440680" cy="2331720"/>
-          </a:xfrm>
-          <a:prstGeom prst="roundRect">
-            <a:avLst>
-              <a:gd name="adj" fmla="val 12000"/>
-            </a:avLst>
-          </a:prstGeom>
-          <a:solidFill>
-            <a:srgbClr val="17231C"/>
-          </a:solidFill>
-          <a:ln>
-            <a:noFill/>
-          </a:ln>
-          <a:effectLst/>
-        </p:spPr>
-        <p:style>
-          <a:lnRef idx="1">
-            <a:schemeClr val="accent1"/>
-          </a:lnRef>
-          <a:fillRef idx="3">
-            <a:schemeClr val="accent1"/>
-          </a:fillRef>
-          <a:effectRef idx="2">
-            <a:schemeClr val="accent1"/>
-          </a:effectRef>
-          <a:fontRef idx="minor">
-            <a:schemeClr val="lt1"/>
-          </a:fontRef>
-        </p:style>
-        <p:txBody>
-          <a:bodyPr rtlCol="0" anchor="ctr"/>
-          <a:lstStyle/>
-          <a:p>
-            <a:pPr algn="ctr"/>
-          </a:p>
-        </p:txBody>
-      </p:sp>
-      <p:sp>
-        <p:nvSpPr>
-          <p:cNvPr id="18" name="Rounded Rectangle 17"/>
-          <p:cNvSpPr/>
-          <p:nvPr/>
-        </p:nvSpPr>
-        <p:spPr>
-          <a:xfrm>
-            <a:off x="502920" y="3794760"/>
-            <a:ext cx="5440680" cy="2331720"/>
-          </a:xfrm>
-          <a:prstGeom prst="roundRect">
-            <a:avLst>
-              <a:gd name="adj" fmla="val 12000"/>
-            </a:avLst>
-          </a:prstGeom>
-          <a:solidFill>
-            <a:srgbClr val="FFF7DF"/>
-          </a:solidFill>
-          <a:ln w="31750">
-            <a:solidFill>
-              <a:srgbClr val="17231C"/>
-            </a:solidFill>
-          </a:ln>
-          <a:effectLst/>
-        </p:spPr>
-        <p:style>
-          <a:lnRef idx="1">
-            <a:schemeClr val="accent1"/>
-          </a:lnRef>
-          <a:fillRef idx="3">
-            <a:schemeClr val="accent1"/>
-          </a:fillRef>
-          <a:effectRef idx="2">
-            <a:schemeClr val="accent1"/>
-          </a:effectRef>
-          <a:fontRef idx="minor">
-            <a:schemeClr val="lt1"/>
-          </a:fontRef>
-        </p:style>
-        <p:txBody>
-          <a:bodyPr rtlCol="0" anchor="ctr"/>
-          <a:lstStyle/>
-          <a:p>
-            <a:pPr algn="ctr"/>
-          </a:p>
-        </p:txBody>
-      </p:sp>
-      <p:sp>
-        <p:nvSpPr>
-          <p:cNvPr id="19" name="Rounded Rectangle 18"/>
-          <p:cNvSpPr/>
-          <p:nvPr/>
-        </p:nvSpPr>
-        <p:spPr>
-          <a:xfrm>
-            <a:off x="777240" y="4023360"/>
-            <a:ext cx="2286000" cy="475488"/>
-          </a:xfrm>
-          <a:prstGeom prst="roundRect">
-            <a:avLst>
-              <a:gd name="adj" fmla="val 50000"/>
-            </a:avLst>
-          </a:prstGeom>
-          <a:solidFill>
-            <a:srgbClr val="17231C"/>
-          </a:solidFill>
-          <a:ln>
-            <a:noFill/>
-          </a:ln>
-          <a:effectLst/>
-        </p:spPr>
-        <p:style>
-          <a:lnRef idx="1">
-            <a:schemeClr val="accent1"/>
-          </a:lnRef>
-          <a:fillRef idx="3">
-            <a:schemeClr val="accent1"/>
-          </a:fillRef>
-          <a:effectRef idx="2">
-            <a:schemeClr val="accent1"/>
-          </a:effectRef>
-          <a:fontRef idx="minor">
-            <a:schemeClr val="lt1"/>
-          </a:fontRef>
-        </p:style>
-        <p:txBody>
-          <a:bodyPr rtlCol="0" anchor="ctr"/>
-          <a:lstStyle/>
-          <a:p>
-            <a:pPr algn="ctr"/>
-          </a:p>
-        </p:txBody>
-      </p:sp>
-      <p:sp>
-        <p:nvSpPr>
-          <p:cNvPr id="20" name="Rounded Rectangle 19"/>
-          <p:cNvSpPr/>
-          <p:nvPr/>
-        </p:nvSpPr>
-        <p:spPr>
-          <a:xfrm>
-            <a:off x="731520" y="3977640"/>
-            <a:ext cx="2286000" cy="475488"/>
-          </a:xfrm>
-          <a:prstGeom prst="roundRect">
-            <a:avLst>
-              <a:gd name="adj" fmla="val 50000"/>
-            </a:avLst>
-          </a:prstGeom>
-          <a:solidFill>
-            <a:srgbClr val="F5A524"/>
-          </a:solidFill>
-          <a:ln w="25400">
-            <a:solidFill>
-              <a:srgbClr val="17231C"/>
-            </a:solidFill>
-          </a:ln>
-          <a:effectLst/>
-        </p:spPr>
-        <p:style>
-          <a:lnRef idx="1">
-            <a:schemeClr val="accent1"/>
-          </a:lnRef>
-          <a:fillRef idx="3">
-            <a:schemeClr val="accent1"/>
-          </a:fillRef>
-          <a:effectRef idx="2">
-            <a:schemeClr val="accent1"/>
-          </a:effectRef>
-          <a:fontRef idx="minor">
-            <a:schemeClr val="lt1"/>
-          </a:fontRef>
-        </p:style>
-        <p:txBody>
-          <a:bodyPr rtlCol="0" anchor="ctr" lIns="45720" rIns="45720" tIns="18288" bIns="18288" wrap="square"/>
-          <a:lstStyle/>
-          <a:p>
-            <a:pPr algn="ctr">
-              <a:lnSpc>
-                <a:spcPct val="112000"/>
-              </a:lnSpc>
-              <a:spcAft>
-                <a:spcPts val="0"/>
-              </a:spcAft>
-            </a:pPr>
-            <a:r>
-              <a:rPr sz="1300" b="1">
+              <a:t>· 點數池由合作商家出資分攤 + 北捷年上限 600 萬補貼，形成可預算化成本結構。</a:t>
+            </a:r>
+          </a:p>
+          <a:p>
+            <a:pPr algn="l">
+              <a:lnSpc>
+                <a:spcPct val="125000"/>
+              </a:lnSpc>
+              <a:spcAft>
+                <a:spcPts val="800"/>
+              </a:spcAft>
+            </a:pPr>
+            <a:r>
+              <a:rPr sz="1200" b="0">
                 <a:solidFill>
                   <a:srgbClr val="17231C"/>
                 </a:solidFill>
                 <a:latin typeface="微軟正黑體"/>
                 <a:ea typeface="微軟正黑體"/>
               </a:rPr>
-              <a:t>C · 週末低碳生活圈</a:t>
-            </a:r>
-          </a:p>
-        </p:txBody>
-      </p:sp>
-      <p:sp>
-        <p:nvSpPr>
-          <p:cNvPr id="21" name="TextBox 20"/>
-          <p:cNvSpPr txBox="1"/>
-          <p:nvPr/>
-        </p:nvSpPr>
-        <p:spPr>
-          <a:xfrm>
-            <a:off x="731520" y="4572000"/>
-            <a:ext cx="4937760" cy="640080"/>
-          </a:xfrm>
-          <a:prstGeom prst="rect">
-            <a:avLst/>
-          </a:prstGeom>
-          <a:noFill/>
-        </p:spPr>
-        <p:txBody>
-          <a:bodyPr wrap="square">
-            <a:spAutoFit/>
-          </a:bodyPr>
-          <a:lstStyle/>
+              <a:t>· 研究底稿：LINE POINTS / OPENPOINT / 星巴克 / Marriott 之點數負債與認列實務。</a:t>
+            </a:r>
+          </a:p>
           <a:p>
             <a:pPr algn="l">
               <a:lnSpc>
-                <a:spcPct val="120000"/>
+                <a:spcPct val="130000"/>
               </a:lnSpc>
               <a:spcAft>
                 <a:spcPts val="400"/>
               </a:spcAft>
             </a:pPr>
             <a:r>
-              <a:rPr sz="1200" b="0">
-                <a:solidFill>
-                  <a:srgbClr val="17231C"/>
+              <a:rPr sz="1150" b="0">
+                <a:solidFill>
+                  <a:srgbClr val="6E776F"/>
                 </a:solidFill>
                 <a:latin typeface="微軟正黑體"/>
                 <a:ea typeface="微軟正黑體"/>
               </a:rPr>
-              <a:t>週末模式：「捷運到大安森林公園站 + YouBike 10 分鐘 + 站內亞尼克補給。」</a:t>
-            </a:r>
-          </a:p>
-        </p:txBody>
-      </p:sp>
-      <p:sp>
-        <p:nvSpPr>
-          <p:cNvPr id="22" name="TextBox 21"/>
-          <p:cNvSpPr txBox="1"/>
-          <p:nvPr/>
-        </p:nvSpPr>
-        <p:spPr>
-          <a:xfrm>
-            <a:off x="731520" y="5212080"/>
-            <a:ext cx="4937760" cy="868680"/>
-          </a:xfrm>
-          <a:prstGeom prst="rect">
-            <a:avLst/>
-          </a:prstGeom>
-          <a:noFill/>
-        </p:spPr>
-        <p:txBody>
-          <a:bodyPr wrap="square">
-            <a:spAutoFit/>
-          </a:bodyPr>
-          <a:lstStyle/>
-          <a:p>
-            <a:pPr algn="l">
-              <a:lnSpc>
-                <a:spcPct val="112000"/>
-              </a:lnSpc>
-              <a:spcAft>
-                <a:spcPts val="100"/>
-              </a:spcAft>
-            </a:pPr>
-            <a:r>
-              <a:rPr sz="1050" b="0">
-                <a:solidFill>
-                  <a:srgbClr val="6E776F"/>
-                </a:solidFill>
-                <a:latin typeface="微軟正黑體"/>
-                <a:ea typeface="微軟正黑體"/>
-              </a:rPr>
-              <a:t>資料：週末模式/興趣偏好/YouBike 站點</a:t>
-            </a:r>
-          </a:p>
-          <a:p>
-            <a:pPr algn="l">
-              <a:lnSpc>
-                <a:spcPct val="112000"/>
-              </a:lnSpc>
-              <a:spcAft>
-                <a:spcPts val="100"/>
-              </a:spcAft>
-            </a:pPr>
-            <a:r>
-              <a:rPr sz="1050" b="0">
-                <a:solidFill>
-                  <a:srgbClr val="6E776F"/>
-                </a:solidFill>
-                <a:latin typeface="微軟正黑體"/>
-                <a:ea typeface="微軟正黑體"/>
-              </a:rPr>
-              <a:t>回饋：完成整段行程領加成或合作券</a:t>
-            </a:r>
-          </a:p>
-          <a:p>
-            <a:pPr algn="l">
-              <a:lnSpc>
-                <a:spcPct val="112000"/>
-              </a:lnSpc>
-              <a:spcAft>
-                <a:spcPts val="100"/>
-              </a:spcAft>
-            </a:pPr>
-            <a:r>
-              <a:rPr sz="1050" b="0">
-                <a:solidFill>
-                  <a:srgbClr val="6E776F"/>
-                </a:solidFill>
-                <a:latin typeface="微軟正黑體"/>
-                <a:ea typeface="微軟正黑體"/>
-              </a:rPr>
-              <a:t>成效：路線完成率、點擊、換券核銷</a:t>
-            </a:r>
-          </a:p>
-        </p:txBody>
-      </p:sp>
-      <p:sp>
-        <p:nvSpPr>
-          <p:cNvPr id="23" name="Rounded Rectangle 22"/>
-          <p:cNvSpPr/>
-          <p:nvPr/>
-        </p:nvSpPr>
-        <p:spPr>
-          <a:xfrm>
-            <a:off x="6291072" y="3867912"/>
-            <a:ext cx="5440680" cy="2331720"/>
-          </a:xfrm>
-          <a:prstGeom prst="roundRect">
-            <a:avLst>
-              <a:gd name="adj" fmla="val 12000"/>
-            </a:avLst>
-          </a:prstGeom>
-          <a:solidFill>
-            <a:srgbClr val="17231C"/>
-          </a:solidFill>
-          <a:ln>
-            <a:noFill/>
-          </a:ln>
-          <a:effectLst/>
-        </p:spPr>
-        <p:style>
-          <a:lnRef idx="1">
-            <a:schemeClr val="accent1"/>
-          </a:lnRef>
-          <a:fillRef idx="3">
-            <a:schemeClr val="accent1"/>
-          </a:fillRef>
-          <a:effectRef idx="2">
-            <a:schemeClr val="accent1"/>
-          </a:effectRef>
-          <a:fontRef idx="minor">
-            <a:schemeClr val="lt1"/>
-          </a:fontRef>
-        </p:style>
-        <p:txBody>
-          <a:bodyPr rtlCol="0" anchor="ctr"/>
-          <a:lstStyle/>
-          <a:p>
-            <a:pPr algn="ctr"/>
-          </a:p>
-        </p:txBody>
-      </p:sp>
-      <p:sp>
-        <p:nvSpPr>
-          <p:cNvPr id="24" name="Rounded Rectangle 23"/>
-          <p:cNvSpPr/>
-          <p:nvPr/>
-        </p:nvSpPr>
-        <p:spPr>
-          <a:xfrm>
-            <a:off x="6217920" y="3794760"/>
-            <a:ext cx="5440680" cy="2331720"/>
-          </a:xfrm>
-          <a:prstGeom prst="roundRect">
-            <a:avLst>
-              <a:gd name="adj" fmla="val 12000"/>
-            </a:avLst>
-          </a:prstGeom>
-          <a:solidFill>
-            <a:srgbClr val="FFF7DF"/>
-          </a:solidFill>
-          <a:ln w="31750">
-            <a:solidFill>
-              <a:srgbClr val="17231C"/>
-            </a:solidFill>
-          </a:ln>
-          <a:effectLst/>
-        </p:spPr>
-        <p:style>
-          <a:lnRef idx="1">
-            <a:schemeClr val="accent1"/>
-          </a:lnRef>
-          <a:fillRef idx="3">
-            <a:schemeClr val="accent1"/>
-          </a:fillRef>
-          <a:effectRef idx="2">
-            <a:schemeClr val="accent1"/>
-          </a:effectRef>
-          <a:fontRef idx="minor">
-            <a:schemeClr val="lt1"/>
-          </a:fontRef>
-        </p:style>
-        <p:txBody>
-          <a:bodyPr rtlCol="0" anchor="ctr"/>
-          <a:lstStyle/>
-          <a:p>
-            <a:pPr algn="ctr"/>
-          </a:p>
-        </p:txBody>
-      </p:sp>
-      <p:sp>
-        <p:nvSpPr>
-          <p:cNvPr id="25" name="Rounded Rectangle 24"/>
-          <p:cNvSpPr/>
-          <p:nvPr/>
-        </p:nvSpPr>
-        <p:spPr>
-          <a:xfrm>
-            <a:off x="6492240" y="4023360"/>
-            <a:ext cx="2286000" cy="475488"/>
-          </a:xfrm>
-          <a:prstGeom prst="roundRect">
-            <a:avLst>
-              <a:gd name="adj" fmla="val 50000"/>
-            </a:avLst>
-          </a:prstGeom>
-          <a:solidFill>
-            <a:srgbClr val="17231C"/>
-          </a:solidFill>
-          <a:ln>
-            <a:noFill/>
-          </a:ln>
-          <a:effectLst/>
-        </p:spPr>
-        <p:style>
-          <a:lnRef idx="1">
-            <a:schemeClr val="accent1"/>
-          </a:lnRef>
-          <a:fillRef idx="3">
-            <a:schemeClr val="accent1"/>
-          </a:fillRef>
-          <a:effectRef idx="2">
-            <a:schemeClr val="accent1"/>
-          </a:effectRef>
-          <a:fontRef idx="minor">
-            <a:schemeClr val="lt1"/>
-          </a:fontRef>
-        </p:style>
-        <p:txBody>
-          <a:bodyPr rtlCol="0" anchor="ctr"/>
-          <a:lstStyle/>
-          <a:p>
-            <a:pPr algn="ctr"/>
-          </a:p>
-        </p:txBody>
-      </p:sp>
-      <p:sp>
-        <p:nvSpPr>
-          <p:cNvPr id="26" name="Rounded Rectangle 25"/>
-          <p:cNvSpPr/>
-          <p:nvPr/>
-        </p:nvSpPr>
-        <p:spPr>
-          <a:xfrm>
-            <a:off x="6446520" y="3977640"/>
-            <a:ext cx="2286000" cy="475488"/>
-          </a:xfrm>
-          <a:prstGeom prst="roundRect">
-            <a:avLst>
-              <a:gd name="adj" fmla="val 50000"/>
-            </a:avLst>
-          </a:prstGeom>
-          <a:solidFill>
-            <a:srgbClr val="C8F3DF"/>
-          </a:solidFill>
-          <a:ln w="25400">
-            <a:solidFill>
-              <a:srgbClr val="17231C"/>
-            </a:solidFill>
-          </a:ln>
-          <a:effectLst/>
-        </p:spPr>
-        <p:style>
-          <a:lnRef idx="1">
-            <a:schemeClr val="accent1"/>
-          </a:lnRef>
-          <a:fillRef idx="3">
-            <a:schemeClr val="accent1"/>
-          </a:fillRef>
-          <a:effectRef idx="2">
-            <a:schemeClr val="accent1"/>
-          </a:effectRef>
-          <a:fontRef idx="minor">
-            <a:schemeClr val="lt1"/>
-          </a:fontRef>
-        </p:style>
-        <p:txBody>
-          <a:bodyPr rtlCol="0" anchor="ctr" lIns="45720" rIns="45720" tIns="18288" bIns="18288" wrap="square"/>
-          <a:lstStyle/>
-          <a:p>
-            <a:pPr algn="ctr">
-              <a:lnSpc>
-                <a:spcPct val="112000"/>
-              </a:lnSpc>
-              <a:spcAft>
-                <a:spcPts val="0"/>
-              </a:spcAft>
-            </a:pPr>
-            <a:r>
-              <a:rPr sz="1300" b="1">
-                <a:solidFill>
-                  <a:srgbClr val="17231C"/>
-                </a:solidFill>
-                <a:latin typeface="微軟正黑體"/>
-                <a:ea typeface="微軟正黑體"/>
-              </a:rPr>
-              <a:t>D · 轉乘空檔服務</a:t>
-            </a:r>
-          </a:p>
-        </p:txBody>
-      </p:sp>
-      <p:sp>
-        <p:nvSpPr>
-          <p:cNvPr id="27" name="TextBox 26"/>
-          <p:cNvSpPr txBox="1"/>
-          <p:nvPr/>
-        </p:nvSpPr>
-        <p:spPr>
-          <a:xfrm>
-            <a:off x="6446520" y="4572000"/>
-            <a:ext cx="4937760" cy="640080"/>
-          </a:xfrm>
-          <a:prstGeom prst="rect">
-            <a:avLst/>
-          </a:prstGeom>
-          <a:noFill/>
-        </p:spPr>
-        <p:txBody>
-          <a:bodyPr wrap="square">
-            <a:spAutoFit/>
-          </a:bodyPr>
-          <a:lstStyle/>
-          <a:p>
-            <a:pPr algn="l">
-              <a:lnSpc>
-                <a:spcPct val="120000"/>
-              </a:lnSpc>
-              <a:spcAft>
-                <a:spcPts val="400"/>
-              </a:spcAft>
-            </a:pPr>
-            <a:r>
-              <a:rPr sz="1200" b="0">
-                <a:solidFill>
-                  <a:srgbClr val="17231C"/>
-                </a:solidFill>
-                <a:latin typeface="微軟正黑體"/>
-                <a:ea typeface="微軟正黑體"/>
-              </a:rPr>
-              <a:t>35 分鐘空檔：「中山站小樹屋電話亭可預約；快閃櫃可用捷運點換券；沿線快剪低等待。」</a:t>
-            </a:r>
-          </a:p>
-        </p:txBody>
-      </p:sp>
-      <p:sp>
-        <p:nvSpPr>
-          <p:cNvPr id="28" name="TextBox 27"/>
-          <p:cNvSpPr txBox="1"/>
-          <p:nvPr/>
-        </p:nvSpPr>
-        <p:spPr>
-          <a:xfrm>
-            <a:off x="6446520" y="5212080"/>
-            <a:ext cx="4937760" cy="868680"/>
-          </a:xfrm>
-          <a:prstGeom prst="rect">
-            <a:avLst/>
-          </a:prstGeom>
-          <a:noFill/>
-        </p:spPr>
-        <p:txBody>
-          <a:bodyPr wrap="square">
-            <a:spAutoFit/>
-          </a:bodyPr>
-          <a:lstStyle/>
-          <a:p>
-            <a:pPr algn="l">
-              <a:lnSpc>
-                <a:spcPct val="112000"/>
-              </a:lnSpc>
-              <a:spcAft>
-                <a:spcPts val="100"/>
-              </a:spcAft>
-            </a:pPr>
-            <a:r>
-              <a:rPr sz="1050" b="0">
-                <a:solidFill>
-                  <a:srgbClr val="6E776F"/>
-                </a:solidFill>
-                <a:latin typeface="微軟正黑體"/>
-                <a:ea typeface="微軟正黑體"/>
-              </a:rPr>
-              <a:t>資料：轉乘時段/站點租賃服務/偏好</a:t>
-            </a:r>
-          </a:p>
-          <a:p>
-            <a:pPr algn="l">
-              <a:lnSpc>
-                <a:spcPct val="112000"/>
-              </a:lnSpc>
-              <a:spcAft>
-                <a:spcPts val="100"/>
-              </a:spcAft>
-            </a:pPr>
-            <a:r>
-              <a:rPr sz="1050" b="0">
-                <a:solidFill>
-                  <a:srgbClr val="6E776F"/>
-                </a:solidFill>
-                <a:latin typeface="微軟正黑體"/>
-                <a:ea typeface="微軟正黑體"/>
-              </a:rPr>
-              <a:t>回饋：時租券、試用券、導購任務</a:t>
-            </a:r>
-          </a:p>
-          <a:p>
-            <a:pPr algn="l">
-              <a:lnSpc>
-                <a:spcPct val="112000"/>
-              </a:lnSpc>
-              <a:spcAft>
-                <a:spcPts val="100"/>
-              </a:spcAft>
-            </a:pPr>
-            <a:r>
-              <a:rPr sz="1050" b="0">
-                <a:solidFill>
-                  <a:srgbClr val="6E776F"/>
-                </a:solidFill>
-                <a:latin typeface="微軟正黑體"/>
-                <a:ea typeface="微軟正黑體"/>
-              </a:rPr>
-              <a:t>成效：預約、到店、核銷、租戶導客</a:t>
-            </a:r>
-          </a:p>
-        </p:txBody>
-      </p:sp>
-      <p:sp>
-        <p:nvSpPr>
-          <p:cNvPr id="29" name="TextBox 28"/>
+              <a:t>所有數字為提案試算；正式收入認列、點數負債與分潤拆分，需由北捷依合約與財會規範確認。</a:t>
+            </a:r>
+          </a:p>
+        </p:txBody>
+      </p:sp>
+      <p:sp>
+        <p:nvSpPr>
+          <p:cNvPr id="11" name="TextBox 10"/>
           <p:cNvSpPr txBox="1"/>
           <p:nvPr/>
         </p:nvSpPr>
@@ -10587,6 +9821,1553 @@
 </file>
 
 <file path=ppt/slides/slide14.xml><?xml version="1.0" encoding="utf-8"?>
+<p:sld xmlns:a="http://schemas.openxmlformats.org/drawingml/2006/main" xmlns:p="http://schemas.openxmlformats.org/presentationml/2006/main" xmlns:r="http://schemas.openxmlformats.org/officeDocument/2006/relationships">
+  <p:cSld>
+    <p:bg>
+      <p:bgPr>
+        <a:solidFill>
+          <a:srgbClr val="FFFDF2"/>
+        </a:solidFill>
+        <a:effectLst/>
+      </p:bgPr>
+    </p:bg>
+    <p:spTree>
+      <p:nvGrpSpPr>
+        <p:cNvPr id="1" name=""/>
+        <p:cNvGrpSpPr/>
+        <p:nvPr/>
+      </p:nvGrpSpPr>
+      <p:grpSpPr/>
+      <p:sp>
+        <p:nvSpPr>
+          <p:cNvPr id="2" name="Rounded Rectangle 1"/>
+          <p:cNvSpPr/>
+          <p:nvPr/>
+        </p:nvSpPr>
+        <p:spPr>
+          <a:xfrm>
+            <a:off x="548640" y="457200"/>
+            <a:ext cx="2103120" cy="502920"/>
+          </a:xfrm>
+          <a:prstGeom prst="roundRect">
+            <a:avLst>
+              <a:gd name="adj" fmla="val 50000"/>
+            </a:avLst>
+          </a:prstGeom>
+          <a:solidFill>
+            <a:srgbClr val="17231C"/>
+          </a:solidFill>
+          <a:ln>
+            <a:noFill/>
+          </a:ln>
+          <a:effectLst/>
+        </p:spPr>
+        <p:style>
+          <a:lnRef idx="1">
+            <a:schemeClr val="accent1"/>
+          </a:lnRef>
+          <a:fillRef idx="3">
+            <a:schemeClr val="accent1"/>
+          </a:fillRef>
+          <a:effectRef idx="2">
+            <a:schemeClr val="accent1"/>
+          </a:effectRef>
+          <a:fontRef idx="minor">
+            <a:schemeClr val="lt1"/>
+          </a:fontRef>
+        </p:style>
+        <p:txBody>
+          <a:bodyPr rtlCol="0" anchor="ctr"/>
+          <a:lstStyle/>
+          <a:p>
+            <a:pPr algn="ctr"/>
+          </a:p>
+        </p:txBody>
+      </p:sp>
+      <p:sp>
+        <p:nvSpPr>
+          <p:cNvPr id="3" name="Rounded Rectangle 2"/>
+          <p:cNvSpPr/>
+          <p:nvPr/>
+        </p:nvSpPr>
+        <p:spPr>
+          <a:xfrm>
+            <a:off x="502920" y="411480"/>
+            <a:ext cx="2103120" cy="502920"/>
+          </a:xfrm>
+          <a:prstGeom prst="roundRect">
+            <a:avLst>
+              <a:gd name="adj" fmla="val 50000"/>
+            </a:avLst>
+          </a:prstGeom>
+          <a:solidFill>
+            <a:srgbClr val="083C37"/>
+          </a:solidFill>
+          <a:ln w="25400">
+            <a:solidFill>
+              <a:srgbClr val="17231C"/>
+            </a:solidFill>
+          </a:ln>
+          <a:effectLst/>
+        </p:spPr>
+        <p:style>
+          <a:lnRef idx="1">
+            <a:schemeClr val="accent1"/>
+          </a:lnRef>
+          <a:fillRef idx="3">
+            <a:schemeClr val="accent1"/>
+          </a:fillRef>
+          <a:effectRef idx="2">
+            <a:schemeClr val="accent1"/>
+          </a:effectRef>
+          <a:fontRef idx="minor">
+            <a:schemeClr val="lt1"/>
+          </a:fontRef>
+        </p:style>
+        <p:txBody>
+          <a:bodyPr rtlCol="0" anchor="ctr" lIns="45720" rIns="45720" tIns="18288" bIns="18288" wrap="square"/>
+          <a:lstStyle/>
+          <a:p>
+            <a:pPr algn="ctr">
+              <a:lnSpc>
+                <a:spcPct val="112000"/>
+              </a:lnSpc>
+              <a:spcAft>
+                <a:spcPts val="0"/>
+              </a:spcAft>
+            </a:pPr>
+            <a:r>
+              <a:rPr sz="1300" b="1">
+                <a:solidFill>
+                  <a:srgbClr val="FFFFFF"/>
+                </a:solidFill>
+                <a:latin typeface="微軟正黑體"/>
+                <a:ea typeface="微軟正黑體"/>
+              </a:rPr>
+              <a:t>附錄 A2 · 備詢用</a:t>
+            </a:r>
+          </a:p>
+        </p:txBody>
+      </p:sp>
+      <p:sp>
+        <p:nvSpPr>
+          <p:cNvPr id="4" name="TextBox 3"/>
+          <p:cNvSpPr txBox="1"/>
+          <p:nvPr/>
+        </p:nvSpPr>
+        <p:spPr>
+          <a:xfrm>
+            <a:off x="2743200" y="411480"/>
+            <a:ext cx="8229600" cy="548640"/>
+          </a:xfrm>
+          <a:prstGeom prst="rect">
+            <a:avLst/>
+          </a:prstGeom>
+          <a:noFill/>
+        </p:spPr>
+        <p:txBody>
+          <a:bodyPr wrap="square">
+            <a:spAutoFit/>
+          </a:bodyPr>
+          <a:lstStyle/>
+          <a:p>
+            <a:pPr algn="l">
+              <a:lnSpc>
+                <a:spcPct val="112000"/>
+              </a:lnSpc>
+              <a:spcAft>
+                <a:spcPts val="400"/>
+              </a:spcAft>
+            </a:pPr>
+            <a:r>
+              <a:rPr sz="2200" b="1">
+                <a:solidFill>
+                  <a:srgbClr val="17231C"/>
+                </a:solidFill>
+                <a:latin typeface="微軟正黑體"/>
+                <a:ea typeface="微軟正黑體"/>
+              </a:rPr>
+              <a:t>四個示範場景（完整版：資料／回饋／成效）</a:t>
+            </a:r>
+          </a:p>
+        </p:txBody>
+      </p:sp>
+      <p:sp>
+        <p:nvSpPr>
+          <p:cNvPr id="5" name="Rounded Rectangle 4"/>
+          <p:cNvSpPr/>
+          <p:nvPr/>
+        </p:nvSpPr>
+        <p:spPr>
+          <a:xfrm>
+            <a:off x="576072" y="1353312"/>
+            <a:ext cx="5440680" cy="2331720"/>
+          </a:xfrm>
+          <a:prstGeom prst="roundRect">
+            <a:avLst>
+              <a:gd name="adj" fmla="val 12000"/>
+            </a:avLst>
+          </a:prstGeom>
+          <a:solidFill>
+            <a:srgbClr val="17231C"/>
+          </a:solidFill>
+          <a:ln>
+            <a:noFill/>
+          </a:ln>
+          <a:effectLst/>
+        </p:spPr>
+        <p:style>
+          <a:lnRef idx="1">
+            <a:schemeClr val="accent1"/>
+          </a:lnRef>
+          <a:fillRef idx="3">
+            <a:schemeClr val="accent1"/>
+          </a:fillRef>
+          <a:effectRef idx="2">
+            <a:schemeClr val="accent1"/>
+          </a:effectRef>
+          <a:fontRef idx="minor">
+            <a:schemeClr val="lt1"/>
+          </a:fontRef>
+        </p:style>
+        <p:txBody>
+          <a:bodyPr rtlCol="0" anchor="ctr"/>
+          <a:lstStyle/>
+          <a:p>
+            <a:pPr algn="ctr"/>
+          </a:p>
+        </p:txBody>
+      </p:sp>
+      <p:sp>
+        <p:nvSpPr>
+          <p:cNvPr id="6" name="Rounded Rectangle 5"/>
+          <p:cNvSpPr/>
+          <p:nvPr/>
+        </p:nvSpPr>
+        <p:spPr>
+          <a:xfrm>
+            <a:off x="502920" y="1280160"/>
+            <a:ext cx="5440680" cy="2331720"/>
+          </a:xfrm>
+          <a:prstGeom prst="roundRect">
+            <a:avLst>
+              <a:gd name="adj" fmla="val 12000"/>
+            </a:avLst>
+          </a:prstGeom>
+          <a:solidFill>
+            <a:srgbClr val="FFF7DF"/>
+          </a:solidFill>
+          <a:ln w="31750">
+            <a:solidFill>
+              <a:srgbClr val="17231C"/>
+            </a:solidFill>
+          </a:ln>
+          <a:effectLst/>
+        </p:spPr>
+        <p:style>
+          <a:lnRef idx="1">
+            <a:schemeClr val="accent1"/>
+          </a:lnRef>
+          <a:fillRef idx="3">
+            <a:schemeClr val="accent1"/>
+          </a:fillRef>
+          <a:effectRef idx="2">
+            <a:schemeClr val="accent1"/>
+          </a:effectRef>
+          <a:fontRef idx="minor">
+            <a:schemeClr val="lt1"/>
+          </a:fontRef>
+        </p:style>
+        <p:txBody>
+          <a:bodyPr rtlCol="0" anchor="ctr"/>
+          <a:lstStyle/>
+          <a:p>
+            <a:pPr algn="ctr"/>
+          </a:p>
+        </p:txBody>
+      </p:sp>
+      <p:sp>
+        <p:nvSpPr>
+          <p:cNvPr id="7" name="Rounded Rectangle 6"/>
+          <p:cNvSpPr/>
+          <p:nvPr/>
+        </p:nvSpPr>
+        <p:spPr>
+          <a:xfrm>
+            <a:off x="777240" y="1508760"/>
+            <a:ext cx="2286000" cy="475488"/>
+          </a:xfrm>
+          <a:prstGeom prst="roundRect">
+            <a:avLst>
+              <a:gd name="adj" fmla="val 50000"/>
+            </a:avLst>
+          </a:prstGeom>
+          <a:solidFill>
+            <a:srgbClr val="17231C"/>
+          </a:solidFill>
+          <a:ln>
+            <a:noFill/>
+          </a:ln>
+          <a:effectLst/>
+        </p:spPr>
+        <p:style>
+          <a:lnRef idx="1">
+            <a:schemeClr val="accent1"/>
+          </a:lnRef>
+          <a:fillRef idx="3">
+            <a:schemeClr val="accent1"/>
+          </a:fillRef>
+          <a:effectRef idx="2">
+            <a:schemeClr val="accent1"/>
+          </a:effectRef>
+          <a:fontRef idx="minor">
+            <a:schemeClr val="lt1"/>
+          </a:fontRef>
+        </p:style>
+        <p:txBody>
+          <a:bodyPr rtlCol="0" anchor="ctr"/>
+          <a:lstStyle/>
+          <a:p>
+            <a:pPr algn="ctr"/>
+          </a:p>
+        </p:txBody>
+      </p:sp>
+      <p:sp>
+        <p:nvSpPr>
+          <p:cNvPr id="8" name="Rounded Rectangle 7"/>
+          <p:cNvSpPr/>
+          <p:nvPr/>
+        </p:nvSpPr>
+        <p:spPr>
+          <a:xfrm>
+            <a:off x="731520" y="1463039"/>
+            <a:ext cx="2286000" cy="475488"/>
+          </a:xfrm>
+          <a:prstGeom prst="roundRect">
+            <a:avLst>
+              <a:gd name="adj" fmla="val 50000"/>
+            </a:avLst>
+          </a:prstGeom>
+          <a:solidFill>
+            <a:srgbClr val="C8F3DF"/>
+          </a:solidFill>
+          <a:ln w="25400">
+            <a:solidFill>
+              <a:srgbClr val="17231C"/>
+            </a:solidFill>
+          </a:ln>
+          <a:effectLst/>
+        </p:spPr>
+        <p:style>
+          <a:lnRef idx="1">
+            <a:schemeClr val="accent1"/>
+          </a:lnRef>
+          <a:fillRef idx="3">
+            <a:schemeClr val="accent1"/>
+          </a:fillRef>
+          <a:effectRef idx="2">
+            <a:schemeClr val="accent1"/>
+          </a:effectRef>
+          <a:fontRef idx="minor">
+            <a:schemeClr val="lt1"/>
+          </a:fontRef>
+        </p:style>
+        <p:txBody>
+          <a:bodyPr rtlCol="0" anchor="ctr" lIns="45720" rIns="45720" tIns="18288" bIns="18288" wrap="square"/>
+          <a:lstStyle/>
+          <a:p>
+            <a:pPr algn="ctr">
+              <a:lnSpc>
+                <a:spcPct val="112000"/>
+              </a:lnSpc>
+              <a:spcAft>
+                <a:spcPts val="0"/>
+              </a:spcAft>
+            </a:pPr>
+            <a:r>
+              <a:rPr sz="1300" b="1">
+                <a:solidFill>
+                  <a:srgbClr val="17231C"/>
+                </a:solidFill>
+                <a:latin typeface="微軟正黑體"/>
+                <a:ea typeface="微軟正黑體"/>
+              </a:rPr>
+              <a:t>A · 下班健康任務</a:t>
+            </a:r>
+          </a:p>
+        </p:txBody>
+      </p:sp>
+      <p:sp>
+        <p:nvSpPr>
+          <p:cNvPr id="9" name="TextBox 8"/>
+          <p:cNvSpPr txBox="1"/>
+          <p:nvPr/>
+        </p:nvSpPr>
+        <p:spPr>
+          <a:xfrm>
+            <a:off x="731520" y="2057400"/>
+            <a:ext cx="4937760" cy="640080"/>
+          </a:xfrm>
+          <a:prstGeom prst="rect">
+            <a:avLst/>
+          </a:prstGeom>
+          <a:noFill/>
+        </p:spPr>
+        <p:txBody>
+          <a:bodyPr wrap="square">
+            <a:spAutoFit/>
+          </a:bodyPr>
+          <a:lstStyle/>
+          <a:p>
+            <a:pPr algn="l">
+              <a:lnSpc>
+                <a:spcPct val="120000"/>
+              </a:lnSpc>
+              <a:spcAft>
+                <a:spcPts val="400"/>
+              </a:spcAft>
+            </a:pPr>
+            <a:r>
+              <a:rPr sz="1200" b="0">
+                <a:solidFill>
+                  <a:srgbClr val="17231C"/>
+                </a:solidFill>
+                <a:latin typeface="微軟正黑體"/>
+                <a:ea typeface="微軟正黑體"/>
+              </a:rPr>
+              <a:t>出站推播：「離萬步差 2,000 步，步行 9 分鐘到運動中心，完成入場解鎖本月加成。」</a:t>
+            </a:r>
+          </a:p>
+        </p:txBody>
+      </p:sp>
+      <p:sp>
+        <p:nvSpPr>
+          <p:cNvPr id="10" name="TextBox 9"/>
+          <p:cNvSpPr txBox="1"/>
+          <p:nvPr/>
+        </p:nvSpPr>
+        <p:spPr>
+          <a:xfrm>
+            <a:off x="731520" y="2697480"/>
+            <a:ext cx="4937760" cy="868680"/>
+          </a:xfrm>
+          <a:prstGeom prst="rect">
+            <a:avLst/>
+          </a:prstGeom>
+          <a:noFill/>
+        </p:spPr>
+        <p:txBody>
+          <a:bodyPr wrap="square">
+            <a:spAutoFit/>
+          </a:bodyPr>
+          <a:lstStyle/>
+          <a:p>
+            <a:pPr algn="l">
+              <a:lnSpc>
+                <a:spcPct val="112000"/>
+              </a:lnSpc>
+              <a:spcAft>
+                <a:spcPts val="100"/>
+              </a:spcAft>
+            </a:pPr>
+            <a:r>
+              <a:rPr sz="1050" b="0">
+                <a:solidFill>
+                  <a:srgbClr val="6E776F"/>
+                </a:solidFill>
+                <a:latin typeface="微軟正黑體"/>
+                <a:ea typeface="微軟正黑體"/>
+              </a:rPr>
+              <a:t>資料：出站站點/時間/自選健康偏好</a:t>
+            </a:r>
+          </a:p>
+          <a:p>
+            <a:pPr algn="l">
+              <a:lnSpc>
+                <a:spcPct val="112000"/>
+              </a:lnSpc>
+              <a:spcAft>
+                <a:spcPts val="100"/>
+              </a:spcAft>
+            </a:pPr>
+            <a:r>
+              <a:rPr sz="1050" b="0">
+                <a:solidFill>
+                  <a:srgbClr val="6E776F"/>
+                </a:solidFill>
+                <a:latin typeface="微軟正黑體"/>
+                <a:ea typeface="微軟正黑體"/>
+              </a:rPr>
+              <a:t>回饋：捷運點加成、場館券</a:t>
+            </a:r>
+          </a:p>
+          <a:p>
+            <a:pPr algn="l">
+              <a:lnSpc>
+                <a:spcPct val="112000"/>
+              </a:lnSpc>
+              <a:spcAft>
+                <a:spcPts val="100"/>
+              </a:spcAft>
+            </a:pPr>
+            <a:r>
+              <a:rPr sz="1050" b="0">
+                <a:solidFill>
+                  <a:srgbClr val="6E776F"/>
+                </a:solidFill>
+                <a:latin typeface="微軟正黑體"/>
+                <a:ea typeface="微軟正黑體"/>
+              </a:rPr>
+              <a:t>成效：任務完成、步行里程、減碳量</a:t>
+            </a:r>
+          </a:p>
+        </p:txBody>
+      </p:sp>
+      <p:sp>
+        <p:nvSpPr>
+          <p:cNvPr id="11" name="Rounded Rectangle 10"/>
+          <p:cNvSpPr/>
+          <p:nvPr/>
+        </p:nvSpPr>
+        <p:spPr>
+          <a:xfrm>
+            <a:off x="6291072" y="1353312"/>
+            <a:ext cx="5440680" cy="2331720"/>
+          </a:xfrm>
+          <a:prstGeom prst="roundRect">
+            <a:avLst>
+              <a:gd name="adj" fmla="val 12000"/>
+            </a:avLst>
+          </a:prstGeom>
+          <a:solidFill>
+            <a:srgbClr val="17231C"/>
+          </a:solidFill>
+          <a:ln>
+            <a:noFill/>
+          </a:ln>
+          <a:effectLst/>
+        </p:spPr>
+        <p:style>
+          <a:lnRef idx="1">
+            <a:schemeClr val="accent1"/>
+          </a:lnRef>
+          <a:fillRef idx="3">
+            <a:schemeClr val="accent1"/>
+          </a:fillRef>
+          <a:effectRef idx="2">
+            <a:schemeClr val="accent1"/>
+          </a:effectRef>
+          <a:fontRef idx="minor">
+            <a:schemeClr val="lt1"/>
+          </a:fontRef>
+        </p:style>
+        <p:txBody>
+          <a:bodyPr rtlCol="0" anchor="ctr"/>
+          <a:lstStyle/>
+          <a:p>
+            <a:pPr algn="ctr"/>
+          </a:p>
+        </p:txBody>
+      </p:sp>
+      <p:sp>
+        <p:nvSpPr>
+          <p:cNvPr id="12" name="Rounded Rectangle 11"/>
+          <p:cNvSpPr/>
+          <p:nvPr/>
+        </p:nvSpPr>
+        <p:spPr>
+          <a:xfrm>
+            <a:off x="6217920" y="1280160"/>
+            <a:ext cx="5440680" cy="2331720"/>
+          </a:xfrm>
+          <a:prstGeom prst="roundRect">
+            <a:avLst>
+              <a:gd name="adj" fmla="val 12000"/>
+            </a:avLst>
+          </a:prstGeom>
+          <a:solidFill>
+            <a:srgbClr val="FFF7DF"/>
+          </a:solidFill>
+          <a:ln w="31750">
+            <a:solidFill>
+              <a:srgbClr val="17231C"/>
+            </a:solidFill>
+          </a:ln>
+          <a:effectLst/>
+        </p:spPr>
+        <p:style>
+          <a:lnRef idx="1">
+            <a:schemeClr val="accent1"/>
+          </a:lnRef>
+          <a:fillRef idx="3">
+            <a:schemeClr val="accent1"/>
+          </a:fillRef>
+          <a:effectRef idx="2">
+            <a:schemeClr val="accent1"/>
+          </a:effectRef>
+          <a:fontRef idx="minor">
+            <a:schemeClr val="lt1"/>
+          </a:fontRef>
+        </p:style>
+        <p:txBody>
+          <a:bodyPr rtlCol="0" anchor="ctr"/>
+          <a:lstStyle/>
+          <a:p>
+            <a:pPr algn="ctr"/>
+          </a:p>
+        </p:txBody>
+      </p:sp>
+      <p:sp>
+        <p:nvSpPr>
+          <p:cNvPr id="13" name="Rounded Rectangle 12"/>
+          <p:cNvSpPr/>
+          <p:nvPr/>
+        </p:nvSpPr>
+        <p:spPr>
+          <a:xfrm>
+            <a:off x="6492240" y="1508760"/>
+            <a:ext cx="2286000" cy="475488"/>
+          </a:xfrm>
+          <a:prstGeom prst="roundRect">
+            <a:avLst>
+              <a:gd name="adj" fmla="val 50000"/>
+            </a:avLst>
+          </a:prstGeom>
+          <a:solidFill>
+            <a:srgbClr val="17231C"/>
+          </a:solidFill>
+          <a:ln>
+            <a:noFill/>
+          </a:ln>
+          <a:effectLst/>
+        </p:spPr>
+        <p:style>
+          <a:lnRef idx="1">
+            <a:schemeClr val="accent1"/>
+          </a:lnRef>
+          <a:fillRef idx="3">
+            <a:schemeClr val="accent1"/>
+          </a:fillRef>
+          <a:effectRef idx="2">
+            <a:schemeClr val="accent1"/>
+          </a:effectRef>
+          <a:fontRef idx="minor">
+            <a:schemeClr val="lt1"/>
+          </a:fontRef>
+        </p:style>
+        <p:txBody>
+          <a:bodyPr rtlCol="0" anchor="ctr"/>
+          <a:lstStyle/>
+          <a:p>
+            <a:pPr algn="ctr"/>
+          </a:p>
+        </p:txBody>
+      </p:sp>
+      <p:sp>
+        <p:nvSpPr>
+          <p:cNvPr id="14" name="Rounded Rectangle 13"/>
+          <p:cNvSpPr/>
+          <p:nvPr/>
+        </p:nvSpPr>
+        <p:spPr>
+          <a:xfrm>
+            <a:off x="6446520" y="1463039"/>
+            <a:ext cx="2286000" cy="475488"/>
+          </a:xfrm>
+          <a:prstGeom prst="roundRect">
+            <a:avLst>
+              <a:gd name="adj" fmla="val 50000"/>
+            </a:avLst>
+          </a:prstGeom>
+          <a:solidFill>
+            <a:srgbClr val="FFD34D"/>
+          </a:solidFill>
+          <a:ln w="25400">
+            <a:solidFill>
+              <a:srgbClr val="17231C"/>
+            </a:solidFill>
+          </a:ln>
+          <a:effectLst/>
+        </p:spPr>
+        <p:style>
+          <a:lnRef idx="1">
+            <a:schemeClr val="accent1"/>
+          </a:lnRef>
+          <a:fillRef idx="3">
+            <a:schemeClr val="accent1"/>
+          </a:fillRef>
+          <a:effectRef idx="2">
+            <a:schemeClr val="accent1"/>
+          </a:effectRef>
+          <a:fontRef idx="minor">
+            <a:schemeClr val="lt1"/>
+          </a:fontRef>
+        </p:style>
+        <p:txBody>
+          <a:bodyPr rtlCol="0" anchor="ctr" lIns="45720" rIns="45720" tIns="18288" bIns="18288" wrap="square"/>
+          <a:lstStyle/>
+          <a:p>
+            <a:pPr algn="ctr">
+              <a:lnSpc>
+                <a:spcPct val="112000"/>
+              </a:lnSpc>
+              <a:spcAft>
+                <a:spcPts val="0"/>
+              </a:spcAft>
+            </a:pPr>
+            <a:r>
+              <a:rPr sz="1300" b="1">
+                <a:solidFill>
+                  <a:srgbClr val="17231C"/>
+                </a:solidFill>
+                <a:latin typeface="微軟正黑體"/>
+                <a:ea typeface="微軟正黑體"/>
+              </a:rPr>
+              <a:t>B · 雨天共享接力</a:t>
+            </a:r>
+          </a:p>
+        </p:txBody>
+      </p:sp>
+      <p:sp>
+        <p:nvSpPr>
+          <p:cNvPr id="15" name="TextBox 14"/>
+          <p:cNvSpPr txBox="1"/>
+          <p:nvPr/>
+        </p:nvSpPr>
+        <p:spPr>
+          <a:xfrm>
+            <a:off x="6446520" y="2057400"/>
+            <a:ext cx="4937760" cy="640080"/>
+          </a:xfrm>
+          <a:prstGeom prst="rect">
+            <a:avLst/>
+          </a:prstGeom>
+          <a:noFill/>
+        </p:spPr>
+        <p:txBody>
+          <a:bodyPr wrap="square">
+            <a:spAutoFit/>
+          </a:bodyPr>
+          <a:lstStyle/>
+          <a:p>
+            <a:pPr algn="l">
+              <a:lnSpc>
+                <a:spcPct val="120000"/>
+              </a:lnSpc>
+              <a:spcAft>
+                <a:spcPts val="400"/>
+              </a:spcAft>
+            </a:pPr>
+            <a:r>
+              <a:rPr sz="1200" b="0">
+                <a:solidFill>
+                  <a:srgbClr val="17231C"/>
+                </a:solidFill>
+                <a:latin typeface="微軟正黑體"/>
+                <a:ea typeface="微軟正黑體"/>
+              </a:rPr>
+              <a:t>出站遇雨推播：「本站出口有 rainGo 共享傘，甲站借乙站還，累積共享任務。」</a:t>
+            </a:r>
+          </a:p>
+        </p:txBody>
+      </p:sp>
+      <p:sp>
+        <p:nvSpPr>
+          <p:cNvPr id="16" name="TextBox 15"/>
+          <p:cNvSpPr txBox="1"/>
+          <p:nvPr/>
+        </p:nvSpPr>
+        <p:spPr>
+          <a:xfrm>
+            <a:off x="6446520" y="2697480"/>
+            <a:ext cx="4937760" cy="868680"/>
+          </a:xfrm>
+          <a:prstGeom prst="rect">
+            <a:avLst/>
+          </a:prstGeom>
+          <a:noFill/>
+        </p:spPr>
+        <p:txBody>
+          <a:bodyPr wrap="square">
+            <a:spAutoFit/>
+          </a:bodyPr>
+          <a:lstStyle/>
+          <a:p>
+            <a:pPr algn="l">
+              <a:lnSpc>
+                <a:spcPct val="112000"/>
+              </a:lnSpc>
+              <a:spcAft>
+                <a:spcPts val="100"/>
+              </a:spcAft>
+            </a:pPr>
+            <a:r>
+              <a:rPr sz="1050" b="0">
+                <a:solidFill>
+                  <a:srgbClr val="6E776F"/>
+                </a:solidFill>
+                <a:latin typeface="微軟正黑體"/>
+                <a:ea typeface="微軟正黑體"/>
+              </a:rPr>
+              <a:t>資料：天氣/站點/共享傘供給狀態</a:t>
+            </a:r>
+          </a:p>
+          <a:p>
+            <a:pPr algn="l">
+              <a:lnSpc>
+                <a:spcPct val="112000"/>
+              </a:lnSpc>
+              <a:spcAft>
+                <a:spcPts val="100"/>
+              </a:spcAft>
+            </a:pPr>
+            <a:r>
+              <a:rPr sz="1050" b="0">
+                <a:solidFill>
+                  <a:srgbClr val="6E776F"/>
+                </a:solidFill>
+                <a:latin typeface="微軟正黑體"/>
+                <a:ea typeface="微軟正黑體"/>
+              </a:rPr>
+              <a:t>回饋：共享任務章、抽獎、借傘券</a:t>
+            </a:r>
+          </a:p>
+          <a:p>
+            <a:pPr algn="l">
+              <a:lnSpc>
+                <a:spcPct val="112000"/>
+              </a:lnSpc>
+              <a:spcAft>
+                <a:spcPts val="100"/>
+              </a:spcAft>
+            </a:pPr>
+            <a:r>
+              <a:rPr sz="1050" b="0">
+                <a:solidFill>
+                  <a:srgbClr val="6E776F"/>
+                </a:solidFill>
+                <a:latin typeface="微軟正黑體"/>
+                <a:ea typeface="微軟正黑體"/>
+              </a:rPr>
+              <a:t>成效：曝光、租借導流、減廢敘事</a:t>
+            </a:r>
+          </a:p>
+        </p:txBody>
+      </p:sp>
+      <p:sp>
+        <p:nvSpPr>
+          <p:cNvPr id="17" name="Rounded Rectangle 16"/>
+          <p:cNvSpPr/>
+          <p:nvPr/>
+        </p:nvSpPr>
+        <p:spPr>
+          <a:xfrm>
+            <a:off x="576072" y="3867912"/>
+            <a:ext cx="5440680" cy="2331720"/>
+          </a:xfrm>
+          <a:prstGeom prst="roundRect">
+            <a:avLst>
+              <a:gd name="adj" fmla="val 12000"/>
+            </a:avLst>
+          </a:prstGeom>
+          <a:solidFill>
+            <a:srgbClr val="17231C"/>
+          </a:solidFill>
+          <a:ln>
+            <a:noFill/>
+          </a:ln>
+          <a:effectLst/>
+        </p:spPr>
+        <p:style>
+          <a:lnRef idx="1">
+            <a:schemeClr val="accent1"/>
+          </a:lnRef>
+          <a:fillRef idx="3">
+            <a:schemeClr val="accent1"/>
+          </a:fillRef>
+          <a:effectRef idx="2">
+            <a:schemeClr val="accent1"/>
+          </a:effectRef>
+          <a:fontRef idx="minor">
+            <a:schemeClr val="lt1"/>
+          </a:fontRef>
+        </p:style>
+        <p:txBody>
+          <a:bodyPr rtlCol="0" anchor="ctr"/>
+          <a:lstStyle/>
+          <a:p>
+            <a:pPr algn="ctr"/>
+          </a:p>
+        </p:txBody>
+      </p:sp>
+      <p:sp>
+        <p:nvSpPr>
+          <p:cNvPr id="18" name="Rounded Rectangle 17"/>
+          <p:cNvSpPr/>
+          <p:nvPr/>
+        </p:nvSpPr>
+        <p:spPr>
+          <a:xfrm>
+            <a:off x="502920" y="3794760"/>
+            <a:ext cx="5440680" cy="2331720"/>
+          </a:xfrm>
+          <a:prstGeom prst="roundRect">
+            <a:avLst>
+              <a:gd name="adj" fmla="val 12000"/>
+            </a:avLst>
+          </a:prstGeom>
+          <a:solidFill>
+            <a:srgbClr val="FFF7DF"/>
+          </a:solidFill>
+          <a:ln w="31750">
+            <a:solidFill>
+              <a:srgbClr val="17231C"/>
+            </a:solidFill>
+          </a:ln>
+          <a:effectLst/>
+        </p:spPr>
+        <p:style>
+          <a:lnRef idx="1">
+            <a:schemeClr val="accent1"/>
+          </a:lnRef>
+          <a:fillRef idx="3">
+            <a:schemeClr val="accent1"/>
+          </a:fillRef>
+          <a:effectRef idx="2">
+            <a:schemeClr val="accent1"/>
+          </a:effectRef>
+          <a:fontRef idx="minor">
+            <a:schemeClr val="lt1"/>
+          </a:fontRef>
+        </p:style>
+        <p:txBody>
+          <a:bodyPr rtlCol="0" anchor="ctr"/>
+          <a:lstStyle/>
+          <a:p>
+            <a:pPr algn="ctr"/>
+          </a:p>
+        </p:txBody>
+      </p:sp>
+      <p:sp>
+        <p:nvSpPr>
+          <p:cNvPr id="19" name="Rounded Rectangle 18"/>
+          <p:cNvSpPr/>
+          <p:nvPr/>
+        </p:nvSpPr>
+        <p:spPr>
+          <a:xfrm>
+            <a:off x="777240" y="4023360"/>
+            <a:ext cx="2286000" cy="475488"/>
+          </a:xfrm>
+          <a:prstGeom prst="roundRect">
+            <a:avLst>
+              <a:gd name="adj" fmla="val 50000"/>
+            </a:avLst>
+          </a:prstGeom>
+          <a:solidFill>
+            <a:srgbClr val="17231C"/>
+          </a:solidFill>
+          <a:ln>
+            <a:noFill/>
+          </a:ln>
+          <a:effectLst/>
+        </p:spPr>
+        <p:style>
+          <a:lnRef idx="1">
+            <a:schemeClr val="accent1"/>
+          </a:lnRef>
+          <a:fillRef idx="3">
+            <a:schemeClr val="accent1"/>
+          </a:fillRef>
+          <a:effectRef idx="2">
+            <a:schemeClr val="accent1"/>
+          </a:effectRef>
+          <a:fontRef idx="minor">
+            <a:schemeClr val="lt1"/>
+          </a:fontRef>
+        </p:style>
+        <p:txBody>
+          <a:bodyPr rtlCol="0" anchor="ctr"/>
+          <a:lstStyle/>
+          <a:p>
+            <a:pPr algn="ctr"/>
+          </a:p>
+        </p:txBody>
+      </p:sp>
+      <p:sp>
+        <p:nvSpPr>
+          <p:cNvPr id="20" name="Rounded Rectangle 19"/>
+          <p:cNvSpPr/>
+          <p:nvPr/>
+        </p:nvSpPr>
+        <p:spPr>
+          <a:xfrm>
+            <a:off x="731520" y="3977640"/>
+            <a:ext cx="2286000" cy="475488"/>
+          </a:xfrm>
+          <a:prstGeom prst="roundRect">
+            <a:avLst>
+              <a:gd name="adj" fmla="val 50000"/>
+            </a:avLst>
+          </a:prstGeom>
+          <a:solidFill>
+            <a:srgbClr val="F5A524"/>
+          </a:solidFill>
+          <a:ln w="25400">
+            <a:solidFill>
+              <a:srgbClr val="17231C"/>
+            </a:solidFill>
+          </a:ln>
+          <a:effectLst/>
+        </p:spPr>
+        <p:style>
+          <a:lnRef idx="1">
+            <a:schemeClr val="accent1"/>
+          </a:lnRef>
+          <a:fillRef idx="3">
+            <a:schemeClr val="accent1"/>
+          </a:fillRef>
+          <a:effectRef idx="2">
+            <a:schemeClr val="accent1"/>
+          </a:effectRef>
+          <a:fontRef idx="minor">
+            <a:schemeClr val="lt1"/>
+          </a:fontRef>
+        </p:style>
+        <p:txBody>
+          <a:bodyPr rtlCol="0" anchor="ctr" lIns="45720" rIns="45720" tIns="18288" bIns="18288" wrap="square"/>
+          <a:lstStyle/>
+          <a:p>
+            <a:pPr algn="ctr">
+              <a:lnSpc>
+                <a:spcPct val="112000"/>
+              </a:lnSpc>
+              <a:spcAft>
+                <a:spcPts val="0"/>
+              </a:spcAft>
+            </a:pPr>
+            <a:r>
+              <a:rPr sz="1300" b="1">
+                <a:solidFill>
+                  <a:srgbClr val="17231C"/>
+                </a:solidFill>
+                <a:latin typeface="微軟正黑體"/>
+                <a:ea typeface="微軟正黑體"/>
+              </a:rPr>
+              <a:t>C · 週末低碳生活圈</a:t>
+            </a:r>
+          </a:p>
+        </p:txBody>
+      </p:sp>
+      <p:sp>
+        <p:nvSpPr>
+          <p:cNvPr id="21" name="TextBox 20"/>
+          <p:cNvSpPr txBox="1"/>
+          <p:nvPr/>
+        </p:nvSpPr>
+        <p:spPr>
+          <a:xfrm>
+            <a:off x="731520" y="4572000"/>
+            <a:ext cx="4937760" cy="640080"/>
+          </a:xfrm>
+          <a:prstGeom prst="rect">
+            <a:avLst/>
+          </a:prstGeom>
+          <a:noFill/>
+        </p:spPr>
+        <p:txBody>
+          <a:bodyPr wrap="square">
+            <a:spAutoFit/>
+          </a:bodyPr>
+          <a:lstStyle/>
+          <a:p>
+            <a:pPr algn="l">
+              <a:lnSpc>
+                <a:spcPct val="120000"/>
+              </a:lnSpc>
+              <a:spcAft>
+                <a:spcPts val="400"/>
+              </a:spcAft>
+            </a:pPr>
+            <a:r>
+              <a:rPr sz="1200" b="0">
+                <a:solidFill>
+                  <a:srgbClr val="17231C"/>
+                </a:solidFill>
+                <a:latin typeface="微軟正黑體"/>
+                <a:ea typeface="微軟正黑體"/>
+              </a:rPr>
+              <a:t>週末模式：「捷運到大安森林公園站 + YouBike 10 分鐘 + 站內亞尼克補給。」</a:t>
+            </a:r>
+          </a:p>
+        </p:txBody>
+      </p:sp>
+      <p:sp>
+        <p:nvSpPr>
+          <p:cNvPr id="22" name="TextBox 21"/>
+          <p:cNvSpPr txBox="1"/>
+          <p:nvPr/>
+        </p:nvSpPr>
+        <p:spPr>
+          <a:xfrm>
+            <a:off x="731520" y="5212080"/>
+            <a:ext cx="4937760" cy="868680"/>
+          </a:xfrm>
+          <a:prstGeom prst="rect">
+            <a:avLst/>
+          </a:prstGeom>
+          <a:noFill/>
+        </p:spPr>
+        <p:txBody>
+          <a:bodyPr wrap="square">
+            <a:spAutoFit/>
+          </a:bodyPr>
+          <a:lstStyle/>
+          <a:p>
+            <a:pPr algn="l">
+              <a:lnSpc>
+                <a:spcPct val="112000"/>
+              </a:lnSpc>
+              <a:spcAft>
+                <a:spcPts val="100"/>
+              </a:spcAft>
+            </a:pPr>
+            <a:r>
+              <a:rPr sz="1050" b="0">
+                <a:solidFill>
+                  <a:srgbClr val="6E776F"/>
+                </a:solidFill>
+                <a:latin typeface="微軟正黑體"/>
+                <a:ea typeface="微軟正黑體"/>
+              </a:rPr>
+              <a:t>資料：週末模式/興趣偏好/YouBike 站點</a:t>
+            </a:r>
+          </a:p>
+          <a:p>
+            <a:pPr algn="l">
+              <a:lnSpc>
+                <a:spcPct val="112000"/>
+              </a:lnSpc>
+              <a:spcAft>
+                <a:spcPts val="100"/>
+              </a:spcAft>
+            </a:pPr>
+            <a:r>
+              <a:rPr sz="1050" b="0">
+                <a:solidFill>
+                  <a:srgbClr val="6E776F"/>
+                </a:solidFill>
+                <a:latin typeface="微軟正黑體"/>
+                <a:ea typeface="微軟正黑體"/>
+              </a:rPr>
+              <a:t>回饋：完成整段行程領加成或合作券</a:t>
+            </a:r>
+          </a:p>
+          <a:p>
+            <a:pPr algn="l">
+              <a:lnSpc>
+                <a:spcPct val="112000"/>
+              </a:lnSpc>
+              <a:spcAft>
+                <a:spcPts val="100"/>
+              </a:spcAft>
+            </a:pPr>
+            <a:r>
+              <a:rPr sz="1050" b="0">
+                <a:solidFill>
+                  <a:srgbClr val="6E776F"/>
+                </a:solidFill>
+                <a:latin typeface="微軟正黑體"/>
+                <a:ea typeface="微軟正黑體"/>
+              </a:rPr>
+              <a:t>成效：路線完成率、點擊、換券核銷</a:t>
+            </a:r>
+          </a:p>
+        </p:txBody>
+      </p:sp>
+      <p:sp>
+        <p:nvSpPr>
+          <p:cNvPr id="23" name="Rounded Rectangle 22"/>
+          <p:cNvSpPr/>
+          <p:nvPr/>
+        </p:nvSpPr>
+        <p:spPr>
+          <a:xfrm>
+            <a:off x="6291072" y="3867912"/>
+            <a:ext cx="5440680" cy="2331720"/>
+          </a:xfrm>
+          <a:prstGeom prst="roundRect">
+            <a:avLst>
+              <a:gd name="adj" fmla="val 12000"/>
+            </a:avLst>
+          </a:prstGeom>
+          <a:solidFill>
+            <a:srgbClr val="17231C"/>
+          </a:solidFill>
+          <a:ln>
+            <a:noFill/>
+          </a:ln>
+          <a:effectLst/>
+        </p:spPr>
+        <p:style>
+          <a:lnRef idx="1">
+            <a:schemeClr val="accent1"/>
+          </a:lnRef>
+          <a:fillRef idx="3">
+            <a:schemeClr val="accent1"/>
+          </a:fillRef>
+          <a:effectRef idx="2">
+            <a:schemeClr val="accent1"/>
+          </a:effectRef>
+          <a:fontRef idx="minor">
+            <a:schemeClr val="lt1"/>
+          </a:fontRef>
+        </p:style>
+        <p:txBody>
+          <a:bodyPr rtlCol="0" anchor="ctr"/>
+          <a:lstStyle/>
+          <a:p>
+            <a:pPr algn="ctr"/>
+          </a:p>
+        </p:txBody>
+      </p:sp>
+      <p:sp>
+        <p:nvSpPr>
+          <p:cNvPr id="24" name="Rounded Rectangle 23"/>
+          <p:cNvSpPr/>
+          <p:nvPr/>
+        </p:nvSpPr>
+        <p:spPr>
+          <a:xfrm>
+            <a:off x="6217920" y="3794760"/>
+            <a:ext cx="5440680" cy="2331720"/>
+          </a:xfrm>
+          <a:prstGeom prst="roundRect">
+            <a:avLst>
+              <a:gd name="adj" fmla="val 12000"/>
+            </a:avLst>
+          </a:prstGeom>
+          <a:solidFill>
+            <a:srgbClr val="FFF7DF"/>
+          </a:solidFill>
+          <a:ln w="31750">
+            <a:solidFill>
+              <a:srgbClr val="17231C"/>
+            </a:solidFill>
+          </a:ln>
+          <a:effectLst/>
+        </p:spPr>
+        <p:style>
+          <a:lnRef idx="1">
+            <a:schemeClr val="accent1"/>
+          </a:lnRef>
+          <a:fillRef idx="3">
+            <a:schemeClr val="accent1"/>
+          </a:fillRef>
+          <a:effectRef idx="2">
+            <a:schemeClr val="accent1"/>
+          </a:effectRef>
+          <a:fontRef idx="minor">
+            <a:schemeClr val="lt1"/>
+          </a:fontRef>
+        </p:style>
+        <p:txBody>
+          <a:bodyPr rtlCol="0" anchor="ctr"/>
+          <a:lstStyle/>
+          <a:p>
+            <a:pPr algn="ctr"/>
+          </a:p>
+        </p:txBody>
+      </p:sp>
+      <p:sp>
+        <p:nvSpPr>
+          <p:cNvPr id="25" name="Rounded Rectangle 24"/>
+          <p:cNvSpPr/>
+          <p:nvPr/>
+        </p:nvSpPr>
+        <p:spPr>
+          <a:xfrm>
+            <a:off x="6492240" y="4023360"/>
+            <a:ext cx="2286000" cy="475488"/>
+          </a:xfrm>
+          <a:prstGeom prst="roundRect">
+            <a:avLst>
+              <a:gd name="adj" fmla="val 50000"/>
+            </a:avLst>
+          </a:prstGeom>
+          <a:solidFill>
+            <a:srgbClr val="17231C"/>
+          </a:solidFill>
+          <a:ln>
+            <a:noFill/>
+          </a:ln>
+          <a:effectLst/>
+        </p:spPr>
+        <p:style>
+          <a:lnRef idx="1">
+            <a:schemeClr val="accent1"/>
+          </a:lnRef>
+          <a:fillRef idx="3">
+            <a:schemeClr val="accent1"/>
+          </a:fillRef>
+          <a:effectRef idx="2">
+            <a:schemeClr val="accent1"/>
+          </a:effectRef>
+          <a:fontRef idx="minor">
+            <a:schemeClr val="lt1"/>
+          </a:fontRef>
+        </p:style>
+        <p:txBody>
+          <a:bodyPr rtlCol="0" anchor="ctr"/>
+          <a:lstStyle/>
+          <a:p>
+            <a:pPr algn="ctr"/>
+          </a:p>
+        </p:txBody>
+      </p:sp>
+      <p:sp>
+        <p:nvSpPr>
+          <p:cNvPr id="26" name="Rounded Rectangle 25"/>
+          <p:cNvSpPr/>
+          <p:nvPr/>
+        </p:nvSpPr>
+        <p:spPr>
+          <a:xfrm>
+            <a:off x="6446520" y="3977640"/>
+            <a:ext cx="2286000" cy="475488"/>
+          </a:xfrm>
+          <a:prstGeom prst="roundRect">
+            <a:avLst>
+              <a:gd name="adj" fmla="val 50000"/>
+            </a:avLst>
+          </a:prstGeom>
+          <a:solidFill>
+            <a:srgbClr val="C8F3DF"/>
+          </a:solidFill>
+          <a:ln w="25400">
+            <a:solidFill>
+              <a:srgbClr val="17231C"/>
+            </a:solidFill>
+          </a:ln>
+          <a:effectLst/>
+        </p:spPr>
+        <p:style>
+          <a:lnRef idx="1">
+            <a:schemeClr val="accent1"/>
+          </a:lnRef>
+          <a:fillRef idx="3">
+            <a:schemeClr val="accent1"/>
+          </a:fillRef>
+          <a:effectRef idx="2">
+            <a:schemeClr val="accent1"/>
+          </a:effectRef>
+          <a:fontRef idx="minor">
+            <a:schemeClr val="lt1"/>
+          </a:fontRef>
+        </p:style>
+        <p:txBody>
+          <a:bodyPr rtlCol="0" anchor="ctr" lIns="45720" rIns="45720" tIns="18288" bIns="18288" wrap="square"/>
+          <a:lstStyle/>
+          <a:p>
+            <a:pPr algn="ctr">
+              <a:lnSpc>
+                <a:spcPct val="112000"/>
+              </a:lnSpc>
+              <a:spcAft>
+                <a:spcPts val="0"/>
+              </a:spcAft>
+            </a:pPr>
+            <a:r>
+              <a:rPr sz="1300" b="1">
+                <a:solidFill>
+                  <a:srgbClr val="17231C"/>
+                </a:solidFill>
+                <a:latin typeface="微軟正黑體"/>
+                <a:ea typeface="微軟正黑體"/>
+              </a:rPr>
+              <a:t>D · 轉乘空檔服務</a:t>
+            </a:r>
+          </a:p>
+        </p:txBody>
+      </p:sp>
+      <p:sp>
+        <p:nvSpPr>
+          <p:cNvPr id="27" name="TextBox 26"/>
+          <p:cNvSpPr txBox="1"/>
+          <p:nvPr/>
+        </p:nvSpPr>
+        <p:spPr>
+          <a:xfrm>
+            <a:off x="6446520" y="4572000"/>
+            <a:ext cx="4937760" cy="640080"/>
+          </a:xfrm>
+          <a:prstGeom prst="rect">
+            <a:avLst/>
+          </a:prstGeom>
+          <a:noFill/>
+        </p:spPr>
+        <p:txBody>
+          <a:bodyPr wrap="square">
+            <a:spAutoFit/>
+          </a:bodyPr>
+          <a:lstStyle/>
+          <a:p>
+            <a:pPr algn="l">
+              <a:lnSpc>
+                <a:spcPct val="120000"/>
+              </a:lnSpc>
+              <a:spcAft>
+                <a:spcPts val="400"/>
+              </a:spcAft>
+            </a:pPr>
+            <a:r>
+              <a:rPr sz="1200" b="0">
+                <a:solidFill>
+                  <a:srgbClr val="17231C"/>
+                </a:solidFill>
+                <a:latin typeface="微軟正黑體"/>
+                <a:ea typeface="微軟正黑體"/>
+              </a:rPr>
+              <a:t>35 分鐘空檔：「中山站小樹屋電話亭可預約；快閃櫃可用捷運點換券；沿線快剪低等待。」</a:t>
+            </a:r>
+          </a:p>
+        </p:txBody>
+      </p:sp>
+      <p:sp>
+        <p:nvSpPr>
+          <p:cNvPr id="28" name="TextBox 27"/>
+          <p:cNvSpPr txBox="1"/>
+          <p:nvPr/>
+        </p:nvSpPr>
+        <p:spPr>
+          <a:xfrm>
+            <a:off x="6446520" y="5212080"/>
+            <a:ext cx="4937760" cy="868680"/>
+          </a:xfrm>
+          <a:prstGeom prst="rect">
+            <a:avLst/>
+          </a:prstGeom>
+          <a:noFill/>
+        </p:spPr>
+        <p:txBody>
+          <a:bodyPr wrap="square">
+            <a:spAutoFit/>
+          </a:bodyPr>
+          <a:lstStyle/>
+          <a:p>
+            <a:pPr algn="l">
+              <a:lnSpc>
+                <a:spcPct val="112000"/>
+              </a:lnSpc>
+              <a:spcAft>
+                <a:spcPts val="100"/>
+              </a:spcAft>
+            </a:pPr>
+            <a:r>
+              <a:rPr sz="1050" b="0">
+                <a:solidFill>
+                  <a:srgbClr val="6E776F"/>
+                </a:solidFill>
+                <a:latin typeface="微軟正黑體"/>
+                <a:ea typeface="微軟正黑體"/>
+              </a:rPr>
+              <a:t>資料：轉乘時段/站點租賃服務/偏好</a:t>
+            </a:r>
+          </a:p>
+          <a:p>
+            <a:pPr algn="l">
+              <a:lnSpc>
+                <a:spcPct val="112000"/>
+              </a:lnSpc>
+              <a:spcAft>
+                <a:spcPts val="100"/>
+              </a:spcAft>
+            </a:pPr>
+            <a:r>
+              <a:rPr sz="1050" b="0">
+                <a:solidFill>
+                  <a:srgbClr val="6E776F"/>
+                </a:solidFill>
+                <a:latin typeface="微軟正黑體"/>
+                <a:ea typeface="微軟正黑體"/>
+              </a:rPr>
+              <a:t>回饋：時租券、試用券、導購任務</a:t>
+            </a:r>
+          </a:p>
+          <a:p>
+            <a:pPr algn="l">
+              <a:lnSpc>
+                <a:spcPct val="112000"/>
+              </a:lnSpc>
+              <a:spcAft>
+                <a:spcPts val="100"/>
+              </a:spcAft>
+            </a:pPr>
+            <a:r>
+              <a:rPr sz="1050" b="0">
+                <a:solidFill>
+                  <a:srgbClr val="6E776F"/>
+                </a:solidFill>
+                <a:latin typeface="微軟正黑體"/>
+                <a:ea typeface="微軟正黑體"/>
+              </a:rPr>
+              <a:t>成效：預約、到店、核銷、租戶導客</a:t>
+            </a:r>
+          </a:p>
+        </p:txBody>
+      </p:sp>
+      <p:sp>
+        <p:nvSpPr>
+          <p:cNvPr id="29" name="TextBox 28"/>
+          <p:cNvSpPr txBox="1"/>
+          <p:nvPr/>
+        </p:nvSpPr>
+        <p:spPr>
+          <a:xfrm>
+            <a:off x="502920" y="6473952"/>
+            <a:ext cx="8229600" cy="320040"/>
+          </a:xfrm>
+          <a:prstGeom prst="rect">
+            <a:avLst/>
+          </a:prstGeom>
+          <a:noFill/>
+        </p:spPr>
+        <p:txBody>
+          <a:bodyPr wrap="square">
+            <a:spAutoFit/>
+          </a:bodyPr>
+          <a:lstStyle/>
+          <a:p>
+            <a:pPr algn="l">
+              <a:lnSpc>
+                <a:spcPct val="112000"/>
+              </a:lnSpc>
+              <a:spcAft>
+                <a:spcPts val="400"/>
+              </a:spcAft>
+            </a:pPr>
+            <a:r>
+              <a:rPr sz="900" b="0">
+                <a:solidFill>
+                  <a:srgbClr val="6E776F"/>
+                </a:solidFill>
+                <a:latin typeface="微軟正黑體"/>
+                <a:ea typeface="微軟正黑體"/>
+              </a:rPr>
+              <a:t>從碳客變捷客 · 附錄（不在 7 分鐘簡報內，供評審提問時備詢）</a:t>
+            </a:r>
+          </a:p>
+        </p:txBody>
+      </p:sp>
+    </p:spTree>
+  </p:cSld>
+  <p:clrMapOvr>
+    <a:masterClrMapping/>
+  </p:clrMapOvr>
+</p:sld>
+</file>
+
+<file path=ppt/slides/slide15.xml><?xml version="1.0" encoding="utf-8"?>
 <p:sld xmlns:a="http://schemas.openxmlformats.org/drawingml/2006/main" xmlns:p="http://schemas.openxmlformats.org/presentationml/2006/main" xmlns:r="http://schemas.openxmlformats.org/officeDocument/2006/relationships">
   <p:cSld>
     <p:bg>
